--- a/slides/03-tinh-huong-dac-thu.pptx
+++ b/slides/03-tinh-huong-dac-thu.pptx
@@ -12552,108 +12552,14 @@
     </a:clrScheme>
     <a:fontScheme name="Office">
       <a:majorFont>
-        <a:latin typeface="Calibri Light" panose="020F0302020204030204"/>
-        <a:ea typeface=""/>
-        <a:cs typeface=""/>
-        <a:font script="Jpan" typeface="游ゴシック Light"/>
-        <a:font script="Hang" typeface="맑은 고딕"/>
-        <a:font script="Hans" typeface="等线 Light"/>
-        <a:font script="Hant" typeface="新細明體"/>
-        <a:font script="Arab" typeface="Times New Roman"/>
-        <a:font script="Hebr" typeface="Times New Roman"/>
-        <a:font script="Thai" typeface="Angsana New"/>
-        <a:font script="Ethi" typeface="Nyala"/>
-        <a:font script="Beng" typeface="Vrinda"/>
-        <a:font script="Gujr" typeface="Shruti"/>
-        <a:font script="Khmr" typeface="MoolBoran"/>
-        <a:font script="Knda" typeface="Tunga"/>
-        <a:font script="Guru" typeface="Raavi"/>
-        <a:font script="Cans" typeface="Euphemia"/>
-        <a:font script="Cher" typeface="Plantagenet Cherokee"/>
-        <a:font script="Yiii" typeface="Microsoft Yi Baiti"/>
-        <a:font script="Tibt" typeface="Microsoft Himalaya"/>
-        <a:font script="Thaa" typeface="MV Boli"/>
-        <a:font script="Deva" typeface="Mangal"/>
-        <a:font script="Telu" typeface="Gautami"/>
-        <a:font script="Taml" typeface="Latha"/>
-        <a:font script="Syrc" typeface="Estrangelo Edessa"/>
-        <a:font script="Orya" typeface="Kalinga"/>
-        <a:font script="Mlym" typeface="Kartika"/>
-        <a:font script="Laoo" typeface="DokChampa"/>
-        <a:font script="Sinh" typeface="Iskoola Pota"/>
-        <a:font script="Mong" typeface="Mongolian Baiti"/>
-        <a:font script="Viet" typeface="Times New Roman"/>
-        <a:font script="Uigh" typeface="Microsoft Uighur"/>
-        <a:font script="Geor" typeface="Sylfaen"/>
-        <a:font script="Armn" typeface="Arial"/>
-        <a:font script="Bugi" typeface="Leelawadee UI"/>
-        <a:font script="Bopo" typeface="Microsoft JhengHei"/>
-        <a:font script="Java" typeface="Javanese Text"/>
-        <a:font script="Lisu" typeface="Segoe UI"/>
-        <a:font script="Mymr" typeface="Myanmar Text"/>
-        <a:font script="Nkoo" typeface="Ebrima"/>
-        <a:font script="Olck" typeface="Nirmala UI"/>
-        <a:font script="Osma" typeface="Ebrima"/>
-        <a:font script="Phag" typeface="Phagspa"/>
-        <a:font script="Syrn" typeface="Estrangelo Edessa"/>
-        <a:font script="Syrj" typeface="Estrangelo Edessa"/>
-        <a:font script="Syre" typeface="Estrangelo Edessa"/>
-        <a:font script="Sora" typeface="Nirmala UI"/>
-        <a:font script="Tale" typeface="Microsoft Tai Le"/>
-        <a:font script="Talu" typeface="Microsoft New Tai Lue"/>
-        <a:font script="Tfng" typeface="Ebrima"/>
+        <a:latin typeface="Cambria" panose="020F0302020204030204"/>
+        <a:ea typeface="Cambria"/>
+        <a:cs typeface="Cambria"/>
       </a:majorFont>
       <a:minorFont>
         <a:latin typeface="Calibri" panose="020F0502020204030204"/>
-        <a:ea typeface=""/>
-        <a:cs typeface=""/>
-        <a:font script="Jpan" typeface="游ゴシック"/>
-        <a:font script="Hang" typeface="맑은 고딕"/>
-        <a:font script="Hans" typeface="等线"/>
-        <a:font script="Hant" typeface="新細明體"/>
-        <a:font script="Arab" typeface="Arial"/>
-        <a:font script="Hebr" typeface="Arial"/>
-        <a:font script="Thai" typeface="Cordia New"/>
-        <a:font script="Ethi" typeface="Nyala"/>
-        <a:font script="Beng" typeface="Vrinda"/>
-        <a:font script="Gujr" typeface="Shruti"/>
-        <a:font script="Khmr" typeface="DaunPenh"/>
-        <a:font script="Knda" typeface="Tunga"/>
-        <a:font script="Guru" typeface="Raavi"/>
-        <a:font script="Cans" typeface="Euphemia"/>
-        <a:font script="Cher" typeface="Plantagenet Cherokee"/>
-        <a:font script="Yiii" typeface="Microsoft Yi Baiti"/>
-        <a:font script="Tibt" typeface="Microsoft Himalaya"/>
-        <a:font script="Thaa" typeface="MV Boli"/>
-        <a:font script="Deva" typeface="Mangal"/>
-        <a:font script="Telu" typeface="Gautami"/>
-        <a:font script="Taml" typeface="Latha"/>
-        <a:font script="Syrc" typeface="Estrangelo Edessa"/>
-        <a:font script="Orya" typeface="Kalinga"/>
-        <a:font script="Mlym" typeface="Kartika"/>
-        <a:font script="Laoo" typeface="DokChampa"/>
-        <a:font script="Sinh" typeface="Iskoola Pota"/>
-        <a:font script="Mong" typeface="Mongolian Baiti"/>
-        <a:font script="Viet" typeface="Arial"/>
-        <a:font script="Uigh" typeface="Microsoft Uighur"/>
-        <a:font script="Geor" typeface="Sylfaen"/>
-        <a:font script="Armn" typeface="Arial"/>
-        <a:font script="Bugi" typeface="Leelawadee UI"/>
-        <a:font script="Bopo" typeface="Microsoft JhengHei"/>
-        <a:font script="Java" typeface="Javanese Text"/>
-        <a:font script="Lisu" typeface="Segoe UI"/>
-        <a:font script="Mymr" typeface="Myanmar Text"/>
-        <a:font script="Nkoo" typeface="Ebrima"/>
-        <a:font script="Olck" typeface="Nirmala UI"/>
-        <a:font script="Osma" typeface="Ebrima"/>
-        <a:font script="Phag" typeface="Phagspa"/>
-        <a:font script="Syrn" typeface="Estrangelo Edessa"/>
-        <a:font script="Syrj" typeface="Estrangelo Edessa"/>
-        <a:font script="Syre" typeface="Estrangelo Edessa"/>
-        <a:font script="Sora" typeface="Nirmala UI"/>
-        <a:font script="Tale" typeface="Microsoft Tai Le"/>
-        <a:font script="Talu" typeface="Microsoft New Tai Lue"/>
-        <a:font script="Tfng" typeface="Ebrima"/>
+        <a:ea typeface="Calibri"/>
+        <a:cs typeface="Calibri"/>
       </a:minorFont>
     </a:fontScheme>
     <a:fmtScheme name="Office">

--- a/slides/03-tinh-huong-dac-thu.pptx
+++ b/slides/03-tinh-huong-dac-thu.pptx
@@ -7,15 +7,15 @@
   <p:sldIdLst>
     <p:sldId id="256" r:id="rId2"/>
     <p:sldId id="257" r:id="rId3"/>
-    <p:sldId id="272" r:id="rId23"/>
-    <p:sldId id="273" r:id="rId24"/>
     <p:sldId id="258" r:id="rId4"/>
     <p:sldId id="271" r:id="rId22"/>
     <p:sldId id="259" r:id="rId5"/>
     <p:sldId id="260" r:id="rId6"/>
+    <p:sldId id="272" r:id="rId23"/>
     <p:sldId id="261" r:id="rId7"/>
     <p:sldId id="262" r:id="rId8"/>
     <p:sldId id="263" r:id="rId9"/>
+    <p:sldId id="273" r:id="rId24"/>
     <p:sldId id="264" r:id="rId10"/>
     <p:sldId id="265" r:id="rId11"/>
     <p:sldId id="266" r:id="rId12"/>
@@ -8217,7 +8217,7 @@
         <p:spPr>
           <a:xfrm>
             <a:off x="1051560" y="1545336"/>
-            <a:ext cx="10652760" cy="1131570"/>
+            <a:ext cx="10652760" cy="960120"/>
           </a:xfrm>
           <a:prstGeom prst="rect">
             <a:avLst/>
@@ -8269,7 +8269,7 @@
         </p:nvSpPr>
         <p:spPr>
           <a:xfrm>
-            <a:off x="502920" y="2750058"/>
+            <a:off x="502920" y="2578608"/>
             <a:ext cx="384048" cy="384048"/>
           </a:xfrm>
           <a:prstGeom prst="ellipse">
@@ -8293,7 +8293,7 @@
         </p:nvSpPr>
         <p:spPr>
           <a:xfrm>
-            <a:off x="502920" y="2750058"/>
+            <a:off x="502920" y="2578608"/>
             <a:ext cx="384048" cy="384048"/>
           </a:xfrm>
           <a:prstGeom prst="rect">
@@ -8332,8 +8332,8 @@
         </p:nvSpPr>
         <p:spPr>
           <a:xfrm>
-            <a:off x="1051560" y="2676906"/>
-            <a:ext cx="10652760" cy="1131570"/>
+            <a:off x="1051560" y="2505456"/>
+            <a:ext cx="10652760" cy="960120"/>
           </a:xfrm>
           <a:prstGeom prst="rect">
             <a:avLst/>
@@ -8385,7 +8385,7 @@
         </p:nvSpPr>
         <p:spPr>
           <a:xfrm>
-            <a:off x="502920" y="3881628"/>
+            <a:off x="502920" y="3538728"/>
             <a:ext cx="384048" cy="384048"/>
           </a:xfrm>
           <a:prstGeom prst="ellipse">
@@ -8409,7 +8409,7 @@
         </p:nvSpPr>
         <p:spPr>
           <a:xfrm>
-            <a:off x="502920" y="3881628"/>
+            <a:off x="502920" y="3538728"/>
             <a:ext cx="384048" cy="384048"/>
           </a:xfrm>
           <a:prstGeom prst="rect">
@@ -8448,8 +8448,8 @@
         </p:nvSpPr>
         <p:spPr>
           <a:xfrm>
-            <a:off x="1051560" y="3808476"/>
-            <a:ext cx="10652760" cy="1131570"/>
+            <a:off x="1051560" y="3465576"/>
+            <a:ext cx="10652760" cy="960120"/>
           </a:xfrm>
           <a:prstGeom prst="rect">
             <a:avLst/>
@@ -8501,7 +8501,7 @@
         </p:nvSpPr>
         <p:spPr>
           <a:xfrm>
-            <a:off x="502920" y="5013198"/>
+            <a:off x="502920" y="4498848"/>
             <a:ext cx="384048" cy="384048"/>
           </a:xfrm>
           <a:prstGeom prst="ellipse">
@@ -8525,7 +8525,7 @@
         </p:nvSpPr>
         <p:spPr>
           <a:xfrm>
-            <a:off x="502920" y="5013198"/>
+            <a:off x="502920" y="4498848"/>
             <a:ext cx="384048" cy="384048"/>
           </a:xfrm>
           <a:prstGeom prst="rect">
@@ -8564,8 +8564,8 @@
         </p:nvSpPr>
         <p:spPr>
           <a:xfrm>
-            <a:off x="1051560" y="4940046"/>
-            <a:ext cx="10652760" cy="1131570"/>
+            <a:off x="1051560" y="4425696"/>
+            <a:ext cx="10652760" cy="960120"/>
           </a:xfrm>
           <a:prstGeom prst="rect">
             <a:avLst/>
@@ -8956,7 +8956,7 @@
         <p:spPr>
           <a:xfrm>
             <a:off x="1051560" y="1545336"/>
-            <a:ext cx="10652760" cy="1131570"/>
+            <a:ext cx="10652760" cy="960120"/>
           </a:xfrm>
           <a:prstGeom prst="rect">
             <a:avLst/>
@@ -9008,7 +9008,7 @@
         </p:nvSpPr>
         <p:spPr>
           <a:xfrm>
-            <a:off x="502920" y="2750058"/>
+            <a:off x="502920" y="2578608"/>
             <a:ext cx="384048" cy="384048"/>
           </a:xfrm>
           <a:prstGeom prst="ellipse">
@@ -9032,7 +9032,7 @@
         </p:nvSpPr>
         <p:spPr>
           <a:xfrm>
-            <a:off x="502920" y="2750058"/>
+            <a:off x="502920" y="2578608"/>
             <a:ext cx="384048" cy="384048"/>
           </a:xfrm>
           <a:prstGeom prst="rect">
@@ -9071,8 +9071,8 @@
         </p:nvSpPr>
         <p:spPr>
           <a:xfrm>
-            <a:off x="1051560" y="2676906"/>
-            <a:ext cx="10652760" cy="1131570"/>
+            <a:off x="1051560" y="2505456"/>
+            <a:ext cx="10652760" cy="960120"/>
           </a:xfrm>
           <a:prstGeom prst="rect">
             <a:avLst/>
@@ -9124,7 +9124,7 @@
         </p:nvSpPr>
         <p:spPr>
           <a:xfrm>
-            <a:off x="502920" y="3881628"/>
+            <a:off x="502920" y="3538728"/>
             <a:ext cx="384048" cy="384048"/>
           </a:xfrm>
           <a:prstGeom prst="ellipse">
@@ -9148,7 +9148,7 @@
         </p:nvSpPr>
         <p:spPr>
           <a:xfrm>
-            <a:off x="502920" y="3881628"/>
+            <a:off x="502920" y="3538728"/>
             <a:ext cx="384048" cy="384048"/>
           </a:xfrm>
           <a:prstGeom prst="rect">
@@ -9187,8 +9187,8 @@
         </p:nvSpPr>
         <p:spPr>
           <a:xfrm>
-            <a:off x="1051560" y="3808476"/>
-            <a:ext cx="10652760" cy="1131570"/>
+            <a:off x="1051560" y="3465576"/>
+            <a:ext cx="10652760" cy="960120"/>
           </a:xfrm>
           <a:prstGeom prst="rect">
             <a:avLst/>
@@ -9240,7 +9240,7 @@
         </p:nvSpPr>
         <p:spPr>
           <a:xfrm>
-            <a:off x="502920" y="5013198"/>
+            <a:off x="502920" y="4498848"/>
             <a:ext cx="384048" cy="384048"/>
           </a:xfrm>
           <a:prstGeom prst="ellipse">
@@ -9264,7 +9264,7 @@
         </p:nvSpPr>
         <p:spPr>
           <a:xfrm>
-            <a:off x="502920" y="5013198"/>
+            <a:off x="502920" y="4498848"/>
             <a:ext cx="384048" cy="384048"/>
           </a:xfrm>
           <a:prstGeom prst="rect">
@@ -9303,8 +9303,8 @@
         </p:nvSpPr>
         <p:spPr>
           <a:xfrm>
-            <a:off x="1051560" y="4940046"/>
-            <a:ext cx="10652760" cy="1131570"/>
+            <a:off x="1051560" y="4425696"/>
+            <a:ext cx="10652760" cy="960120"/>
           </a:xfrm>
           <a:prstGeom prst="rect">
             <a:avLst/>

--- a/slides/03-tinh-huong-dac-thu.pptx
+++ b/slides/03-tinh-huong-dac-thu.pptx
@@ -2534,7 +2534,7 @@
       </p:sp>
       <p:pic>
         <p:nvPicPr>
-          <p:cNvPr id="3" name="Image 0" descr="assets/logo_tron.png">    </p:cNvPr>
+          <p:cNvPr id="3" name="Image 0" descr="/home/user/comdraft/assets/img/dau-huong.png">    </p:cNvPr>
           <p:cNvPicPr>
             <a:picLocks noChangeAspect="1"/>
           </p:cNvPicPr>
@@ -2560,7 +2560,7 @@
       </p:pic>
       <p:pic>
         <p:nvPicPr>
-          <p:cNvPr id="4" name="Image 1" descr="assets/logo_ngang.png">    </p:cNvPr>
+          <p:cNvPr id="4" name="Image 1" descr="/home/user/comdraft/assets/img/lockup-huong.png">    </p:cNvPr>
           <p:cNvPicPr>
             <a:picLocks noChangeAspect="1"/>
           </p:cNvPicPr>
@@ -2868,6 +2868,1486 @@
 </file>
 
 <file path=ppt/slides/slide10.xml><?xml version="1.0" encoding="utf-8"?>
+<p:sld xmlns:a="http://schemas.openxmlformats.org/drawingml/2006/main" xmlns:r="http://schemas.openxmlformats.org/officeDocument/2006/relationships" xmlns:p="http://schemas.openxmlformats.org/presentationml/2006/main">
+  <p:cSld name="Slide 8">
+    <p:bg>
+      <p:bgPr>
+        <a:solidFill>
+          <a:srgbClr val="FDFBF8"/>
+        </a:solidFill>
+      </p:bgPr>
+    </p:bg>
+    <p:spTree>
+      <p:nvGrpSpPr>
+        <p:cNvPr id="1" name=""/>
+        <p:cNvGrpSpPr/>
+        <p:nvPr/>
+      </p:nvGrpSpPr>
+      <p:grpSpPr>
+        <a:xfrm>
+          <a:off x="0" y="0"/>
+          <a:ext cx="0" cy="0"/>
+          <a:chOff x="0" y="0"/>
+          <a:chExt cx="0" cy="0"/>
+        </a:xfrm>
+      </p:grpSpPr>
+      <p:pic>
+        <p:nvPicPr>
+          <p:cNvPr id="2" name="Image 0" descr="/home/user/comdraft/assets/img/dau-huong.png">    </p:cNvPr>
+          <p:cNvPicPr>
+            <a:picLocks noChangeAspect="1"/>
+          </p:cNvPicPr>
+          <p:nvPr/>
+        </p:nvPicPr>
+        <p:blipFill>
+          <a:blip r:embed="rId1"/>
+          <a:stretch>
+            <a:fillRect/>
+          </a:stretch>
+        </p:blipFill>
+        <p:spPr>
+          <a:xfrm>
+            <a:off x="411480" y="6327648"/>
+            <a:ext cx="384048" cy="384048"/>
+          </a:xfrm>
+          <a:prstGeom prst="rect">
+            <a:avLst/>
+          </a:prstGeom>
+        </p:spPr>
+      </p:pic>
+      <p:sp>
+        <p:nvSpPr>
+          <p:cNvPr id="3" name="Text 0"/>
+          <p:cNvSpPr/>
+          <p:nvPr/>
+        </p:nvSpPr>
+        <p:spPr>
+          <a:xfrm>
+            <a:off x="868680" y="6355080"/>
+            <a:ext cx="7498080" cy="310896"/>
+          </a:xfrm>
+          <a:prstGeom prst="rect">
+            <a:avLst/>
+          </a:prstGeom>
+          <a:noFill/>
+          <a:ln/>
+        </p:spPr>
+        <p:txBody>
+          <a:bodyPr wrap="square" lIns="0" tIns="0" rIns="0" bIns="0" rtlCol="0" anchor="ctr"/>
+          <a:lstStyle/>
+          <a:p>
+            <a:pPr indent="0" marL="0">
+              <a:buNone/>
+            </a:pPr>
+            <a:r>
+              <a:rPr lang="en-US" sz="900" dirty="0">
+                <a:solidFill>
+                  <a:srgbClr val="8A7A76"/>
+                </a:solidFill>
+                <a:latin typeface="Calibri" pitchFamily="34" charset="0"/>
+                <a:ea typeface="Calibri" pitchFamily="34" charset="-122"/>
+                <a:cs typeface="Calibri" pitchFamily="34" charset="-120"/>
+              </a:rPr>
+              <a:t>Je m'appelle Huong  •  GV. Đỗ Thùy Hương  •  EC1103</a:t>
+            </a:r>
+            <a:endParaRPr lang="en-US" sz="900" dirty="0"/>
+          </a:p>
+        </p:txBody>
+      </p:sp>
+      <p:sp>
+        <p:nvSpPr>
+          <p:cNvPr id="4" name="Text 1"/>
+          <p:cNvSpPr/>
+          <p:nvPr/>
+        </p:nvSpPr>
+        <p:spPr>
+          <a:xfrm>
+            <a:off x="8503920" y="6355080"/>
+            <a:ext cx="2743200" cy="310896"/>
+          </a:xfrm>
+          <a:prstGeom prst="rect">
+            <a:avLst/>
+          </a:prstGeom>
+          <a:noFill/>
+          <a:ln/>
+        </p:spPr>
+        <p:txBody>
+          <a:bodyPr wrap="square" lIns="0" tIns="0" rIns="0" bIns="0" rtlCol="0" anchor="ctr"/>
+          <a:lstStyle/>
+          <a:p>
+            <a:pPr algn="r" indent="0" marL="0">
+              <a:buNone/>
+            </a:pPr>
+            <a:r>
+              <a:rPr lang="en-US" sz="900" dirty="0">
+                <a:solidFill>
+                  <a:srgbClr val="8A7A76"/>
+                </a:solidFill>
+                <a:latin typeface="Calibri" pitchFamily="34" charset="0"/>
+                <a:ea typeface="Calibri" pitchFamily="34" charset="-122"/>
+                <a:cs typeface="Calibri" pitchFamily="34" charset="-120"/>
+              </a:rPr>
+              <a:t>Chương 3</a:t>
+            </a:r>
+            <a:endParaRPr lang="en-US" sz="900" dirty="0"/>
+          </a:p>
+        </p:txBody>
+      </p:sp>
+      <p:sp>
+        <p:nvSpPr>
+          <p:cNvPr id="5" name="Shape 2"/>
+          <p:cNvSpPr/>
+          <p:nvPr/>
+        </p:nvSpPr>
+        <p:spPr>
+          <a:xfrm>
+            <a:off x="11430000" y="6327648"/>
+            <a:ext cx="365760" cy="365760"/>
+          </a:xfrm>
+          <a:prstGeom prst="ellipse">
+            <a:avLst/>
+          </a:prstGeom>
+          <a:solidFill>
+            <a:srgbClr val="DC756A"/>
+          </a:solidFill>
+          <a:ln/>
+        </p:spPr>
+        <p:txBody>
+          <a:bodyPr/>
+          <a:p/>
+        </p:txBody>
+      </p:sp>
+      <p:sp>
+        <p:nvSpPr>
+          <p:cNvPr id="6" name="Text 3"/>
+          <p:cNvSpPr/>
+          <p:nvPr/>
+        </p:nvSpPr>
+        <p:spPr>
+          <a:xfrm>
+            <a:off x="11430000" y="6327648"/>
+            <a:ext cx="365760" cy="365760"/>
+          </a:xfrm>
+          <a:prstGeom prst="rect">
+            <a:avLst/>
+          </a:prstGeom>
+          <a:noFill/>
+          <a:ln/>
+        </p:spPr>
+        <p:txBody>
+          <a:bodyPr wrap="square" lIns="0" tIns="0" rIns="0" bIns="0" rtlCol="0" anchor="ctr"/>
+          <a:lstStyle/>
+          <a:p>
+            <a:pPr algn="ctr" indent="0" marL="0">
+              <a:buNone/>
+            </a:pPr>
+            <a:r>
+              <a:rPr lang="en-US" sz="1000" b="1" dirty="0">
+                <a:solidFill>
+                  <a:srgbClr val="FFFFFF"/>
+                </a:solidFill>
+                <a:latin typeface="Calibri" pitchFamily="34" charset="0"/>
+                <a:ea typeface="Calibri" pitchFamily="34" charset="-122"/>
+                <a:cs typeface="Calibri" pitchFamily="34" charset="-120"/>
+              </a:rPr>
+              <a:t>8</a:t>
+            </a:r>
+            <a:endParaRPr lang="en-US" sz="1000" dirty="0"/>
+          </a:p>
+        </p:txBody>
+      </p:sp>
+      <p:sp>
+        <p:nvSpPr>
+          <p:cNvPr id="7" name="Text 4"/>
+          <p:cNvSpPr/>
+          <p:nvPr/>
+        </p:nvSpPr>
+        <p:spPr>
+          <a:xfrm>
+            <a:off x="502920" y="310896"/>
+            <a:ext cx="11155680" cy="274320"/>
+          </a:xfrm>
+          <a:prstGeom prst="rect">
+            <a:avLst/>
+          </a:prstGeom>
+          <a:noFill/>
+          <a:ln/>
+        </p:spPr>
+        <p:txBody>
+          <a:bodyPr wrap="square" lIns="0" tIns="0" rIns="0" bIns="0" rtlCol="0" anchor="ctr"/>
+          <a:lstStyle/>
+          <a:p>
+            <a:pPr indent="0" marL="0">
+              <a:buNone/>
+            </a:pPr>
+            <a:r>
+              <a:rPr lang="en-US" sz="1100" b="1" spc="300" kern="0" dirty="0">
+                <a:solidFill>
+                  <a:srgbClr val="DC756A"/>
+                </a:solidFill>
+                <a:latin typeface="Calibri" pitchFamily="34" charset="0"/>
+                <a:ea typeface="Calibri" pitchFamily="34" charset="-122"/>
+                <a:cs typeface="Calibri" pitchFamily="34" charset="-120"/>
+              </a:rPr>
+              <a:t>3.2</a:t>
+            </a:r>
+            <a:endParaRPr lang="en-US" sz="1100" dirty="0"/>
+          </a:p>
+        </p:txBody>
+      </p:sp>
+      <p:sp>
+        <p:nvSpPr>
+          <p:cNvPr id="8" name="Text 5"/>
+          <p:cNvSpPr/>
+          <p:nvPr/>
+        </p:nvSpPr>
+        <p:spPr>
+          <a:xfrm>
+            <a:off x="502920" y="576072"/>
+            <a:ext cx="11155680" cy="713232"/>
+          </a:xfrm>
+          <a:prstGeom prst="rect">
+            <a:avLst/>
+          </a:prstGeom>
+          <a:noFill/>
+          <a:ln/>
+        </p:spPr>
+        <p:txBody>
+          <a:bodyPr wrap="square" lIns="0" tIns="0" rIns="0" bIns="0" rtlCol="0" anchor="ctr"/>
+          <a:lstStyle/>
+          <a:p>
+            <a:pPr indent="0" marL="0">
+              <a:buNone/>
+            </a:pPr>
+            <a:r>
+              <a:rPr lang="en-US" sz="2700" b="1" dirty="0">
+                <a:solidFill>
+                  <a:srgbClr val="AC4D33"/>
+                </a:solidFill>
+                <a:latin typeface="Cambria" pitchFamily="34" charset="0"/>
+                <a:ea typeface="Cambria" pitchFamily="34" charset="-122"/>
+                <a:cs typeface="Cambria" pitchFamily="34" charset="-120"/>
+              </a:rPr>
+              <a:t>Với đối tác, cơ quan nhà nước và truyền thông</a:t>
+            </a:r>
+            <a:endParaRPr lang="en-US" sz="2700" dirty="0"/>
+          </a:p>
+        </p:txBody>
+      </p:sp>
+      <p:sp>
+        <p:nvSpPr>
+          <p:cNvPr id="9" name="Shape 6"/>
+          <p:cNvSpPr/>
+          <p:nvPr/>
+        </p:nvSpPr>
+        <p:spPr>
+          <a:xfrm>
+            <a:off x="502920" y="1417320"/>
+            <a:ext cx="11201400" cy="1490472"/>
+          </a:xfrm>
+          <a:prstGeom prst="roundRect">
+            <a:avLst>
+              <a:gd name="adj" fmla="val 5521"/>
+            </a:avLst>
+          </a:prstGeom>
+          <a:solidFill>
+            <a:srgbClr val="FDF1EF"/>
+          </a:solidFill>
+          <a:ln w="15875">
+            <a:solidFill>
+              <a:srgbClr val="FBCEC9"/>
+            </a:solidFill>
+            <a:prstDash val="solid"/>
+          </a:ln>
+        </p:spPr>
+        <p:txBody>
+          <a:bodyPr/>
+          <a:p/>
+        </p:txBody>
+      </p:sp>
+      <p:sp>
+        <p:nvSpPr>
+          <p:cNvPr id="10" name="Text 7"/>
+          <p:cNvSpPr/>
+          <p:nvPr/>
+        </p:nvSpPr>
+        <p:spPr>
+          <a:xfrm>
+            <a:off x="722376" y="1472184"/>
+            <a:ext cx="10762488" cy="1380744"/>
+          </a:xfrm>
+          <a:prstGeom prst="rect">
+            <a:avLst/>
+          </a:prstGeom>
+          <a:noFill/>
+          <a:ln/>
+        </p:spPr>
+        <p:txBody>
+          <a:bodyPr wrap="square" lIns="0" tIns="0" rIns="0" bIns="0" rtlCol="0" anchor="ctr"/>
+          <a:lstStyle/>
+          <a:p>
+            <a:pPr indent="0" marL="0">
+              <a:buNone/>
+            </a:pPr>
+            <a:r>
+              <a:rPr lang="en-US" sz="1500" b="1" dirty="0">
+                <a:solidFill>
+                  <a:srgbClr val="AC4D33"/>
+                </a:solidFill>
+                <a:latin typeface="Calibri" pitchFamily="34" charset="0"/>
+                <a:ea typeface="Calibri" pitchFamily="34" charset="-122"/>
+                <a:cs typeface="Calibri" pitchFamily="34" charset="-120"/>
+              </a:rPr>
+              <a:t>Đối tác kinh doanh</a:t>
+            </a:r>
+            <a:endParaRPr lang="en-US" sz="1500" dirty="0"/>
+          </a:p>
+          <a:p>
+            <a:pPr indent="0" marL="0">
+              <a:buNone/>
+            </a:pPr>
+            <a:r>
+              <a:rPr lang="en-US" sz="1300" dirty="0">
+                <a:solidFill>
+                  <a:srgbClr val="3A2B28"/>
+                </a:solidFill>
+                <a:latin typeface="Calibri" pitchFamily="34" charset="0"/>
+                <a:ea typeface="Calibri" pitchFamily="34" charset="-122"/>
+                <a:cs typeface="Calibri" pitchFamily="34" charset="-120"/>
+              </a:rPr>
+              <a:t>Bình đẳng, giữ chữ tín, minh bạch thông tin; quan hệ lâu dài quan trọng hơn lợi thế ngắn hạn — nền tảng cho đàm phán ở Chương 4.</a:t>
+            </a:r>
+            <a:endParaRPr lang="en-US" sz="1500" dirty="0"/>
+          </a:p>
+        </p:txBody>
+      </p:sp>
+      <p:sp>
+        <p:nvSpPr>
+          <p:cNvPr id="11" name="Shape 8"/>
+          <p:cNvSpPr/>
+          <p:nvPr/>
+        </p:nvSpPr>
+        <p:spPr>
+          <a:xfrm>
+            <a:off x="502920" y="3072384"/>
+            <a:ext cx="11201400" cy="1490472"/>
+          </a:xfrm>
+          <a:prstGeom prst="roundRect">
+            <a:avLst>
+              <a:gd name="adj" fmla="val 5521"/>
+            </a:avLst>
+          </a:prstGeom>
+          <a:solidFill>
+            <a:srgbClr val="FDF1EF"/>
+          </a:solidFill>
+          <a:ln w="15875">
+            <a:solidFill>
+              <a:srgbClr val="FBCEC9"/>
+            </a:solidFill>
+            <a:prstDash val="solid"/>
+          </a:ln>
+        </p:spPr>
+        <p:txBody>
+          <a:bodyPr/>
+          <a:p/>
+        </p:txBody>
+      </p:sp>
+      <p:sp>
+        <p:nvSpPr>
+          <p:cNvPr id="12" name="Text 9"/>
+          <p:cNvSpPr/>
+          <p:nvPr/>
+        </p:nvSpPr>
+        <p:spPr>
+          <a:xfrm>
+            <a:off x="722376" y="3127248"/>
+            <a:ext cx="10762488" cy="1380744"/>
+          </a:xfrm>
+          <a:prstGeom prst="rect">
+            <a:avLst/>
+          </a:prstGeom>
+          <a:noFill/>
+          <a:ln/>
+        </p:spPr>
+        <p:txBody>
+          <a:bodyPr wrap="square" lIns="0" tIns="0" rIns="0" bIns="0" rtlCol="0" anchor="ctr"/>
+          <a:lstStyle/>
+          <a:p>
+            <a:pPr indent="0" marL="0">
+              <a:buNone/>
+            </a:pPr>
+            <a:r>
+              <a:rPr lang="en-US" sz="1500" b="1" dirty="0">
+                <a:solidFill>
+                  <a:srgbClr val="AC4D33"/>
+                </a:solidFill>
+                <a:latin typeface="Calibri" pitchFamily="34" charset="0"/>
+                <a:ea typeface="Calibri" pitchFamily="34" charset="-122"/>
+                <a:cs typeface="Calibri" pitchFamily="34" charset="-120"/>
+              </a:rPr>
+              <a:t>Cơ quan nhà nước</a:t>
+            </a:r>
+            <a:endParaRPr lang="en-US" sz="1500" dirty="0"/>
+          </a:p>
+          <a:p>
+            <a:pPr indent="0" marL="0">
+              <a:buNone/>
+            </a:pPr>
+            <a:r>
+              <a:rPr lang="en-US" sz="1300" dirty="0">
+                <a:solidFill>
+                  <a:srgbClr val="3A2B28"/>
+                </a:solidFill>
+                <a:latin typeface="Calibri" pitchFamily="34" charset="0"/>
+                <a:ea typeface="Calibri" pitchFamily="34" charset="-122"/>
+                <a:cs typeface="Calibri" pitchFamily="34" charset="-120"/>
+              </a:rPr>
+              <a:t>Đúng thủ tục, đúng thẩm quyền, hồ sơ – văn bản chuẩn thể thức (Chương 5); tác phong nghiêm túc, đúng hẹn; tuyệt đối không “đi tắt” trái quy định.</a:t>
+            </a:r>
+            <a:endParaRPr lang="en-US" sz="1500" dirty="0"/>
+          </a:p>
+        </p:txBody>
+      </p:sp>
+      <p:sp>
+        <p:nvSpPr>
+          <p:cNvPr id="13" name="Shape 10"/>
+          <p:cNvSpPr/>
+          <p:nvPr/>
+        </p:nvSpPr>
+        <p:spPr>
+          <a:xfrm>
+            <a:off x="502920" y="4727448"/>
+            <a:ext cx="11201400" cy="1490472"/>
+          </a:xfrm>
+          <a:prstGeom prst="roundRect">
+            <a:avLst>
+              <a:gd name="adj" fmla="val 5521"/>
+            </a:avLst>
+          </a:prstGeom>
+          <a:solidFill>
+            <a:srgbClr val="FDF1EF"/>
+          </a:solidFill>
+          <a:ln w="15875">
+            <a:solidFill>
+              <a:srgbClr val="FBCEC9"/>
+            </a:solidFill>
+            <a:prstDash val="solid"/>
+          </a:ln>
+        </p:spPr>
+        <p:txBody>
+          <a:bodyPr/>
+          <a:p/>
+        </p:txBody>
+      </p:sp>
+      <p:sp>
+        <p:nvSpPr>
+          <p:cNvPr id="14" name="Text 11"/>
+          <p:cNvSpPr/>
+          <p:nvPr/>
+        </p:nvSpPr>
+        <p:spPr>
+          <a:xfrm>
+            <a:off x="722376" y="4782312"/>
+            <a:ext cx="10762488" cy="1380744"/>
+          </a:xfrm>
+          <a:prstGeom prst="rect">
+            <a:avLst/>
+          </a:prstGeom>
+          <a:noFill/>
+          <a:ln/>
+        </p:spPr>
+        <p:txBody>
+          <a:bodyPr wrap="square" lIns="0" tIns="0" rIns="0" bIns="0" rtlCol="0" anchor="ctr"/>
+          <a:lstStyle/>
+          <a:p>
+            <a:pPr indent="0" marL="0">
+              <a:buNone/>
+            </a:pPr>
+            <a:r>
+              <a:rPr lang="en-US" sz="1500" b="1" dirty="0">
+                <a:solidFill>
+                  <a:srgbClr val="AC4D33"/>
+                </a:solidFill>
+                <a:latin typeface="Calibri" pitchFamily="34" charset="0"/>
+                <a:ea typeface="Calibri" pitchFamily="34" charset="-122"/>
+                <a:cs typeface="Calibri" pitchFamily="34" charset="-120"/>
+              </a:rPr>
+              <a:t>Truyền thông – báo chí</a:t>
+            </a:r>
+            <a:endParaRPr lang="en-US" sz="1500" dirty="0"/>
+          </a:p>
+          <a:p>
+            <a:pPr indent="0" marL="0">
+              <a:buNone/>
+            </a:pPr>
+            <a:r>
+              <a:rPr lang="en-US" sz="1300" dirty="0">
+                <a:solidFill>
+                  <a:srgbClr val="3A2B28"/>
+                </a:solidFill>
+                <a:latin typeface="Calibri" pitchFamily="34" charset="0"/>
+                <a:ea typeface="Calibri" pitchFamily="34" charset="-122"/>
+                <a:cs typeface="Calibri" pitchFamily="34" charset="-120"/>
+              </a:rPr>
+              <a:t>Chỉ người được ủy quyền phát ngôn; thông tin nhất quán, trung thực; khi có khủng hoảng: phản hồi nhanh, nhận trách nhiệm đúng phần của mình, không né tránh.</a:t>
+            </a:r>
+            <a:endParaRPr lang="en-US" sz="1500" dirty="0"/>
+          </a:p>
+        </p:txBody>
+      </p:sp>
+    </p:spTree>
+  </p:cSld>
+  <p:clrMapOvr>
+    <a:masterClrMapping/>
+  </p:clrMapOvr>
+</p:sld>
+</file>
+
+<file path=ppt/slides/slide11.xml><?xml version="1.0" encoding="utf-8"?>
+<p:sld xmlns:a="http://schemas.openxmlformats.org/drawingml/2006/main" xmlns:p="http://schemas.openxmlformats.org/presentationml/2006/main" xmlns:r="http://schemas.openxmlformats.org/officeDocument/2006/relationships">
+  <p:cSld>
+    <p:spTree>
+      <p:nvGrpSpPr>
+        <p:cNvPr id="1" name=""/>
+        <p:cNvGrpSpPr/>
+        <p:nvPr/>
+      </p:nvGrpSpPr>
+      <p:grpSpPr/>
+      <p:sp>
+        <p:nvSpPr>
+          <p:cNvPr id="2" name="Rectangle 1"/>
+          <p:cNvSpPr/>
+          <p:nvPr/>
+        </p:nvSpPr>
+        <p:spPr>
+          <a:xfrm>
+            <a:off x="0" y="0"/>
+            <a:ext cx="12191695" cy="6858000"/>
+          </a:xfrm>
+          <a:prstGeom prst="rect">
+            <a:avLst/>
+          </a:prstGeom>
+          <a:solidFill>
+            <a:srgbClr val="FDFBF8"/>
+          </a:solidFill>
+          <a:ln>
+            <a:noFill/>
+          </a:ln>
+          <a:effectLst/>
+        </p:spPr>
+        <p:style>
+          <a:lnRef idx="1">
+            <a:schemeClr val="accent1"/>
+          </a:lnRef>
+          <a:fillRef idx="3">
+            <a:schemeClr val="accent1"/>
+          </a:fillRef>
+          <a:effectRef idx="2">
+            <a:schemeClr val="accent1"/>
+          </a:effectRef>
+          <a:fontRef idx="minor">
+            <a:schemeClr val="lt1"/>
+          </a:fontRef>
+        </p:style>
+        <p:txBody>
+          <a:bodyPr rtlCol="0" anchor="ctr"/>
+          <a:lstStyle/>
+          <a:p>
+            <a:pPr algn="ctr"/>
+          </a:p>
+        </p:txBody>
+      </p:sp>
+      <p:sp>
+        <p:nvSpPr>
+          <p:cNvPr id="3" name="Rectangle 2"/>
+          <p:cNvSpPr/>
+          <p:nvPr/>
+        </p:nvSpPr>
+        <p:spPr>
+          <a:xfrm>
+            <a:off x="0" y="2103120"/>
+            <a:ext cx="12191695" cy="2743200"/>
+          </a:xfrm>
+          <a:prstGeom prst="rect">
+            <a:avLst/>
+          </a:prstGeom>
+          <a:solidFill>
+            <a:srgbClr val="FDF1EF"/>
+          </a:solidFill>
+          <a:ln>
+            <a:noFill/>
+          </a:ln>
+          <a:effectLst/>
+        </p:spPr>
+        <p:style>
+          <a:lnRef idx="1">
+            <a:schemeClr val="accent1"/>
+          </a:lnRef>
+          <a:fillRef idx="3">
+            <a:schemeClr val="accent1"/>
+          </a:fillRef>
+          <a:effectRef idx="2">
+            <a:schemeClr val="accent1"/>
+          </a:effectRef>
+          <a:fontRef idx="minor">
+            <a:schemeClr val="lt1"/>
+          </a:fontRef>
+        </p:style>
+        <p:txBody>
+          <a:bodyPr rtlCol="0" anchor="ctr"/>
+          <a:lstStyle/>
+          <a:p>
+            <a:pPr algn="ctr"/>
+          </a:p>
+        </p:txBody>
+      </p:sp>
+      <p:sp>
+        <p:nvSpPr>
+          <p:cNvPr id="4" name="Rectangle 3"/>
+          <p:cNvSpPr/>
+          <p:nvPr/>
+        </p:nvSpPr>
+        <p:spPr>
+          <a:xfrm>
+            <a:off x="0" y="0"/>
+            <a:ext cx="274320" cy="6858000"/>
+          </a:xfrm>
+          <a:prstGeom prst="rect">
+            <a:avLst/>
+          </a:prstGeom>
+          <a:solidFill>
+            <a:srgbClr val="DC756A"/>
+          </a:solidFill>
+          <a:ln>
+            <a:noFill/>
+          </a:ln>
+          <a:effectLst/>
+        </p:spPr>
+        <p:style>
+          <a:lnRef idx="1">
+            <a:schemeClr val="accent1"/>
+          </a:lnRef>
+          <a:fillRef idx="3">
+            <a:schemeClr val="accent1"/>
+          </a:fillRef>
+          <a:effectRef idx="2">
+            <a:schemeClr val="accent1"/>
+          </a:effectRef>
+          <a:fontRef idx="minor">
+            <a:schemeClr val="lt1"/>
+          </a:fontRef>
+        </p:style>
+        <p:txBody>
+          <a:bodyPr rtlCol="0" anchor="ctr"/>
+          <a:lstStyle/>
+          <a:p>
+            <a:pPr algn="ctr"/>
+          </a:p>
+        </p:txBody>
+      </p:sp>
+      <p:sp>
+        <p:nvSpPr>
+          <p:cNvPr id="5" name="TextBox 4"/>
+          <p:cNvSpPr txBox="1"/>
+          <p:nvPr/>
+        </p:nvSpPr>
+        <p:spPr>
+          <a:xfrm>
+            <a:off x="1280160" y="2377440"/>
+            <a:ext cx="9692640" cy="411480"/>
+          </a:xfrm>
+          <a:prstGeom prst="rect">
+            <a:avLst/>
+          </a:prstGeom>
+          <a:noFill/>
+        </p:spPr>
+        <p:txBody>
+          <a:bodyPr wrap="none">
+            <a:spAutoFit/>
+          </a:bodyPr>
+          <a:lstStyle/>
+          <a:p>
+            <a:r>
+              <a:rPr sz="1500" b="1">
+                <a:solidFill>
+                  <a:srgbClr val="DC756A"/>
+                </a:solidFill>
+                <a:latin typeface="Calibri"/>
+              </a:rPr>
+              <a:t>MỤC 3.3 – 3.4</a:t>
+            </a:r>
+          </a:p>
+        </p:txBody>
+      </p:sp>
+      <p:sp>
+        <p:nvSpPr>
+          <p:cNvPr id="6" name="TextBox 5"/>
+          <p:cNvSpPr txBox="1"/>
+          <p:nvPr/>
+        </p:nvSpPr>
+        <p:spPr>
+          <a:xfrm>
+            <a:off x="1280160" y="2788920"/>
+            <a:ext cx="9601200" cy="1371600"/>
+          </a:xfrm>
+          <a:prstGeom prst="rect">
+            <a:avLst/>
+          </a:prstGeom>
+          <a:noFill/>
+        </p:spPr>
+        <p:txBody>
+          <a:bodyPr wrap="square">
+            <a:spAutoFit/>
+          </a:bodyPr>
+          <a:lstStyle/>
+          <a:p>
+            <a:r>
+              <a:rPr sz="3800" b="1">
+                <a:solidFill>
+                  <a:srgbClr val="AC4D33"/>
+                </a:solidFill>
+                <a:latin typeface="Cambria"/>
+              </a:rPr>
+              <a:t>Bàn tiệc và môi trường đa văn hóa</a:t>
+            </a:r>
+          </a:p>
+        </p:txBody>
+      </p:sp>
+      <p:sp>
+        <p:nvSpPr>
+          <p:cNvPr id="7" name="TextBox 6"/>
+          <p:cNvSpPr txBox="1"/>
+          <p:nvPr/>
+        </p:nvSpPr>
+        <p:spPr>
+          <a:xfrm>
+            <a:off x="1280160" y="4224528"/>
+            <a:ext cx="9418320" cy="640080"/>
+          </a:xfrm>
+          <a:prstGeom prst="rect">
+            <a:avLst/>
+          </a:prstGeom>
+          <a:noFill/>
+        </p:spPr>
+        <p:txBody>
+          <a:bodyPr wrap="square">
+            <a:spAutoFit/>
+          </a:bodyPr>
+          <a:lstStyle/>
+          <a:p>
+            <a:r>
+              <a:rPr sz="1450" i="1">
+                <a:solidFill>
+                  <a:srgbClr val="8A7A76"/>
+                </a:solidFill>
+                <a:latin typeface="Calibri"/>
+              </a:rPr>
+              <a:t>Nơi công việc vẫn tiếp diễn dù không ai nhắc đến công việc.</a:t>
+            </a:r>
+          </a:p>
+        </p:txBody>
+      </p:sp>
+      <p:sp>
+        <p:nvSpPr>
+          <p:cNvPr id="8" name="TextBox 7"/>
+          <p:cNvSpPr txBox="1"/>
+          <p:nvPr/>
+        </p:nvSpPr>
+        <p:spPr>
+          <a:xfrm>
+            <a:off x="502920" y="6419088"/>
+            <a:ext cx="7772400" cy="292608"/>
+          </a:xfrm>
+          <a:prstGeom prst="rect">
+            <a:avLst/>
+          </a:prstGeom>
+          <a:noFill/>
+        </p:spPr>
+        <p:txBody>
+          <a:bodyPr wrap="none">
+            <a:spAutoFit/>
+          </a:bodyPr>
+          <a:lstStyle/>
+          <a:p>
+            <a:r>
+              <a:rPr sz="900">
+                <a:solidFill>
+                  <a:srgbClr val="8A7A76"/>
+                </a:solidFill>
+                <a:latin typeface="Calibri"/>
+              </a:rPr>
+              <a:t>Je m'appelle Huong  •  GV. Đỗ Thùy Hương  •  EC1103</a:t>
+            </a:r>
+          </a:p>
+        </p:txBody>
+      </p:sp>
+      <p:sp>
+        <p:nvSpPr>
+          <p:cNvPr id="9" name="TextBox 8"/>
+          <p:cNvSpPr txBox="1"/>
+          <p:nvPr/>
+        </p:nvSpPr>
+        <p:spPr>
+          <a:xfrm>
+            <a:off x="9326880" y="6419088"/>
+            <a:ext cx="1920240" cy="292608"/>
+          </a:xfrm>
+          <a:prstGeom prst="rect">
+            <a:avLst/>
+          </a:prstGeom>
+          <a:noFill/>
+        </p:spPr>
+        <p:txBody>
+          <a:bodyPr wrap="none">
+            <a:spAutoFit/>
+          </a:bodyPr>
+          <a:lstStyle/>
+          <a:p>
+            <a:pPr algn="r"/>
+            <a:r>
+              <a:rPr sz="900">
+                <a:solidFill>
+                  <a:srgbClr val="8A7A76"/>
+                </a:solidFill>
+                <a:latin typeface="Calibri"/>
+              </a:rPr>
+              <a:t>Chương 3</a:t>
+            </a:r>
+          </a:p>
+        </p:txBody>
+      </p:sp>
+    </p:spTree>
+  </p:cSld>
+  <p:clrMapOvr>
+    <a:masterClrMapping/>
+  </p:clrMapOvr>
+</p:sld>
+</file>
+
+<file path=ppt/slides/slide12.xml><?xml version="1.0" encoding="utf-8"?>
+<p:sld xmlns:a="http://schemas.openxmlformats.org/drawingml/2006/main" xmlns:r="http://schemas.openxmlformats.org/officeDocument/2006/relationships" xmlns:p="http://schemas.openxmlformats.org/presentationml/2006/main">
+  <p:cSld name="Slide 9">
+    <p:bg>
+      <p:bgPr>
+        <a:solidFill>
+          <a:srgbClr val="FDFBF8"/>
+        </a:solidFill>
+      </p:bgPr>
+    </p:bg>
+    <p:spTree>
+      <p:nvGrpSpPr>
+        <p:cNvPr id="1" name=""/>
+        <p:cNvGrpSpPr/>
+        <p:nvPr/>
+      </p:nvGrpSpPr>
+      <p:grpSpPr>
+        <a:xfrm>
+          <a:off x="0" y="0"/>
+          <a:ext cx="0" cy="0"/>
+          <a:chOff x="0" y="0"/>
+          <a:chExt cx="0" cy="0"/>
+        </a:xfrm>
+      </p:grpSpPr>
+      <p:pic>
+        <p:nvPicPr>
+          <p:cNvPr id="2" name="Image 0" descr="/home/user/comdraft/assets/img/dau-huong.png">    </p:cNvPr>
+          <p:cNvPicPr>
+            <a:picLocks noChangeAspect="1"/>
+          </p:cNvPicPr>
+          <p:nvPr/>
+        </p:nvPicPr>
+        <p:blipFill>
+          <a:blip r:embed="rId1"/>
+          <a:stretch>
+            <a:fillRect/>
+          </a:stretch>
+        </p:blipFill>
+        <p:spPr>
+          <a:xfrm>
+            <a:off x="411480" y="6327648"/>
+            <a:ext cx="384048" cy="384048"/>
+          </a:xfrm>
+          <a:prstGeom prst="rect">
+            <a:avLst/>
+          </a:prstGeom>
+        </p:spPr>
+      </p:pic>
+      <p:sp>
+        <p:nvSpPr>
+          <p:cNvPr id="3" name="Text 0"/>
+          <p:cNvSpPr/>
+          <p:nvPr/>
+        </p:nvSpPr>
+        <p:spPr>
+          <a:xfrm>
+            <a:off x="868680" y="6355080"/>
+            <a:ext cx="7498080" cy="310896"/>
+          </a:xfrm>
+          <a:prstGeom prst="rect">
+            <a:avLst/>
+          </a:prstGeom>
+          <a:noFill/>
+          <a:ln/>
+        </p:spPr>
+        <p:txBody>
+          <a:bodyPr wrap="square" lIns="0" tIns="0" rIns="0" bIns="0" rtlCol="0" anchor="ctr"/>
+          <a:lstStyle/>
+          <a:p>
+            <a:pPr indent="0" marL="0">
+              <a:buNone/>
+            </a:pPr>
+            <a:r>
+              <a:rPr lang="en-US" sz="900" dirty="0">
+                <a:solidFill>
+                  <a:srgbClr val="8A7A76"/>
+                </a:solidFill>
+                <a:latin typeface="Calibri" pitchFamily="34" charset="0"/>
+                <a:ea typeface="Calibri" pitchFamily="34" charset="-122"/>
+                <a:cs typeface="Calibri" pitchFamily="34" charset="-120"/>
+              </a:rPr>
+              <a:t>Je m'appelle Huong  •  GV. Đỗ Thùy Hương  •  EC1103</a:t>
+            </a:r>
+            <a:endParaRPr lang="en-US" sz="900" dirty="0"/>
+          </a:p>
+        </p:txBody>
+      </p:sp>
+      <p:sp>
+        <p:nvSpPr>
+          <p:cNvPr id="4" name="Text 1"/>
+          <p:cNvSpPr/>
+          <p:nvPr/>
+        </p:nvSpPr>
+        <p:spPr>
+          <a:xfrm>
+            <a:off x="8503920" y="6355080"/>
+            <a:ext cx="2743200" cy="310896"/>
+          </a:xfrm>
+          <a:prstGeom prst="rect">
+            <a:avLst/>
+          </a:prstGeom>
+          <a:noFill/>
+          <a:ln/>
+        </p:spPr>
+        <p:txBody>
+          <a:bodyPr wrap="square" lIns="0" tIns="0" rIns="0" bIns="0" rtlCol="0" anchor="ctr"/>
+          <a:lstStyle/>
+          <a:p>
+            <a:pPr algn="r" indent="0" marL="0">
+              <a:buNone/>
+            </a:pPr>
+            <a:r>
+              <a:rPr lang="en-US" sz="900" dirty="0">
+                <a:solidFill>
+                  <a:srgbClr val="8A7A76"/>
+                </a:solidFill>
+                <a:latin typeface="Calibri" pitchFamily="34" charset="0"/>
+                <a:ea typeface="Calibri" pitchFamily="34" charset="-122"/>
+                <a:cs typeface="Calibri" pitchFamily="34" charset="-120"/>
+              </a:rPr>
+              <a:t>Chương 3</a:t>
+            </a:r>
+            <a:endParaRPr lang="en-US" sz="900" dirty="0"/>
+          </a:p>
+        </p:txBody>
+      </p:sp>
+      <p:sp>
+        <p:nvSpPr>
+          <p:cNvPr id="5" name="Shape 2"/>
+          <p:cNvSpPr/>
+          <p:nvPr/>
+        </p:nvSpPr>
+        <p:spPr>
+          <a:xfrm>
+            <a:off x="11430000" y="6327648"/>
+            <a:ext cx="365760" cy="365760"/>
+          </a:xfrm>
+          <a:prstGeom prst="ellipse">
+            <a:avLst/>
+          </a:prstGeom>
+          <a:solidFill>
+            <a:srgbClr val="DC756A"/>
+          </a:solidFill>
+          <a:ln/>
+        </p:spPr>
+        <p:txBody>
+          <a:bodyPr/>
+          <a:p/>
+        </p:txBody>
+      </p:sp>
+      <p:sp>
+        <p:nvSpPr>
+          <p:cNvPr id="6" name="Text 3"/>
+          <p:cNvSpPr/>
+          <p:nvPr/>
+        </p:nvSpPr>
+        <p:spPr>
+          <a:xfrm>
+            <a:off x="11430000" y="6327648"/>
+            <a:ext cx="365760" cy="365760"/>
+          </a:xfrm>
+          <a:prstGeom prst="rect">
+            <a:avLst/>
+          </a:prstGeom>
+          <a:noFill/>
+          <a:ln/>
+        </p:spPr>
+        <p:txBody>
+          <a:bodyPr wrap="square" lIns="0" tIns="0" rIns="0" bIns="0" rtlCol="0" anchor="ctr"/>
+          <a:lstStyle/>
+          <a:p>
+            <a:pPr algn="ctr" indent="0" marL="0">
+              <a:buNone/>
+            </a:pPr>
+            <a:r>
+              <a:rPr lang="en-US" sz="1000" b="1" dirty="0">
+                <a:solidFill>
+                  <a:srgbClr val="FFFFFF"/>
+                </a:solidFill>
+                <a:latin typeface="Calibri" pitchFamily="34" charset="0"/>
+                <a:ea typeface="Calibri" pitchFamily="34" charset="-122"/>
+                <a:cs typeface="Calibri" pitchFamily="34" charset="-120"/>
+              </a:rPr>
+              <a:t>9</a:t>
+            </a:r>
+            <a:endParaRPr lang="en-US" sz="1000" dirty="0"/>
+          </a:p>
+        </p:txBody>
+      </p:sp>
+      <p:sp>
+        <p:nvSpPr>
+          <p:cNvPr id="7" name="Text 4"/>
+          <p:cNvSpPr/>
+          <p:nvPr/>
+        </p:nvSpPr>
+        <p:spPr>
+          <a:xfrm>
+            <a:off x="502920" y="310896"/>
+            <a:ext cx="11155680" cy="274320"/>
+          </a:xfrm>
+          <a:prstGeom prst="rect">
+            <a:avLst/>
+          </a:prstGeom>
+          <a:noFill/>
+          <a:ln/>
+        </p:spPr>
+        <p:txBody>
+          <a:bodyPr wrap="square" lIns="0" tIns="0" rIns="0" bIns="0" rtlCol="0" anchor="ctr"/>
+          <a:lstStyle/>
+          <a:p>
+            <a:pPr indent="0" marL="0">
+              <a:buNone/>
+            </a:pPr>
+            <a:r>
+              <a:rPr lang="en-US" sz="1100" b="1" spc="300" kern="0" dirty="0">
+                <a:solidFill>
+                  <a:srgbClr val="DC756A"/>
+                </a:solidFill>
+                <a:latin typeface="Calibri" pitchFamily="34" charset="0"/>
+                <a:ea typeface="Calibri" pitchFamily="34" charset="-122"/>
+                <a:cs typeface="Calibri" pitchFamily="34" charset="-120"/>
+              </a:rPr>
+              <a:t>3.3</a:t>
+            </a:r>
+            <a:endParaRPr lang="en-US" sz="1100" dirty="0"/>
+          </a:p>
+        </p:txBody>
+      </p:sp>
+      <p:sp>
+        <p:nvSpPr>
+          <p:cNvPr id="8" name="Text 5"/>
+          <p:cNvSpPr/>
+          <p:nvPr/>
+        </p:nvSpPr>
+        <p:spPr>
+          <a:xfrm>
+            <a:off x="502920" y="576072"/>
+            <a:ext cx="11155680" cy="713232"/>
+          </a:xfrm>
+          <a:prstGeom prst="rect">
+            <a:avLst/>
+          </a:prstGeom>
+          <a:noFill/>
+          <a:ln/>
+        </p:spPr>
+        <p:txBody>
+          <a:bodyPr wrap="square" lIns="0" tIns="0" rIns="0" bIns="0" rtlCol="0" anchor="ctr"/>
+          <a:lstStyle/>
+          <a:p>
+            <a:pPr indent="0" marL="0">
+              <a:buNone/>
+            </a:pPr>
+            <a:r>
+              <a:rPr lang="en-US" sz="2700" b="1" dirty="0">
+                <a:solidFill>
+                  <a:srgbClr val="AC4D33"/>
+                </a:solidFill>
+                <a:latin typeface="Cambria" pitchFamily="34" charset="0"/>
+                <a:ea typeface="Cambria" pitchFamily="34" charset="-122"/>
+                <a:cs typeface="Cambria" pitchFamily="34" charset="-120"/>
+              </a:rPr>
+              <a:t>Giao tiếp trên bàn tiệc</a:t>
+            </a:r>
+            <a:endParaRPr lang="en-US" sz="2700" dirty="0"/>
+          </a:p>
+        </p:txBody>
+      </p:sp>
+      <p:sp>
+        <p:nvSpPr>
+          <p:cNvPr id="9" name="Shape 6"/>
+          <p:cNvSpPr/>
+          <p:nvPr/>
+        </p:nvSpPr>
+        <p:spPr>
+          <a:xfrm>
+            <a:off x="502920" y="1417320"/>
+            <a:ext cx="5509260" cy="2308860"/>
+          </a:xfrm>
+          <a:prstGeom prst="roundRect">
+            <a:avLst>
+              <a:gd name="adj" fmla="val 3564"/>
+            </a:avLst>
+          </a:prstGeom>
+          <a:solidFill>
+            <a:srgbClr val="FDF1EF"/>
+          </a:solidFill>
+          <a:ln w="15875">
+            <a:solidFill>
+              <a:srgbClr val="FBCEC9"/>
+            </a:solidFill>
+            <a:prstDash val="solid"/>
+          </a:ln>
+        </p:spPr>
+        <p:txBody>
+          <a:bodyPr/>
+          <a:p/>
+        </p:txBody>
+      </p:sp>
+      <p:sp>
+        <p:nvSpPr>
+          <p:cNvPr id="10" name="Text 7"/>
+          <p:cNvSpPr/>
+          <p:nvPr/>
+        </p:nvSpPr>
+        <p:spPr>
+          <a:xfrm>
+            <a:off x="722376" y="1490472"/>
+            <a:ext cx="5070348" cy="2162556"/>
+          </a:xfrm>
+          <a:prstGeom prst="rect">
+            <a:avLst/>
+          </a:prstGeom>
+          <a:noFill/>
+          <a:ln/>
+        </p:spPr>
+        <p:txBody>
+          <a:bodyPr wrap="square" lIns="0" tIns="0" rIns="0" bIns="0" rtlCol="0" anchor="ctr"/>
+          <a:lstStyle/>
+          <a:p>
+            <a:pPr indent="0" marL="0">
+              <a:buNone/>
+            </a:pPr>
+            <a:r>
+              <a:rPr lang="en-US" sz="1500" b="1" dirty="0">
+                <a:solidFill>
+                  <a:srgbClr val="AC4D33"/>
+                </a:solidFill>
+                <a:latin typeface="Calibri" pitchFamily="34" charset="0"/>
+                <a:ea typeface="Calibri" pitchFamily="34" charset="-122"/>
+                <a:cs typeface="Calibri" pitchFamily="34" charset="-120"/>
+              </a:rPr>
+              <a:t>Trước bữa tiệc</a:t>
+            </a:r>
+            <a:endParaRPr lang="en-US" sz="1500" dirty="0"/>
+          </a:p>
+          <a:p>
+            <a:pPr indent="0" marL="0">
+              <a:buNone/>
+            </a:pPr>
+            <a:r>
+              <a:rPr lang="en-US" sz="1250" dirty="0">
+                <a:solidFill>
+                  <a:srgbClr val="3A2B28"/>
+                </a:solidFill>
+                <a:latin typeface="Calibri" pitchFamily="34" charset="0"/>
+                <a:ea typeface="Calibri" pitchFamily="34" charset="-122"/>
+                <a:cs typeface="Calibri" pitchFamily="34" charset="-120"/>
+              </a:rPr>
+              <a:t>Xác nhận tham dự đúng hạn; đến đúng giờ; trang phục theo tính chất tiệc; chờ chủ tiệc mời và xếp chỗ — vị trí ngồi thể hiện thứ bậc.</a:t>
+            </a:r>
+            <a:endParaRPr lang="en-US" sz="1500" dirty="0"/>
+          </a:p>
+        </p:txBody>
+      </p:sp>
+      <p:sp>
+        <p:nvSpPr>
+          <p:cNvPr id="11" name="Shape 8"/>
+          <p:cNvSpPr/>
+          <p:nvPr/>
+        </p:nvSpPr>
+        <p:spPr>
+          <a:xfrm>
+            <a:off x="6195060" y="1417320"/>
+            <a:ext cx="5509260" cy="2308860"/>
+          </a:xfrm>
+          <a:prstGeom prst="roundRect">
+            <a:avLst>
+              <a:gd name="adj" fmla="val 3564"/>
+            </a:avLst>
+          </a:prstGeom>
+          <a:solidFill>
+            <a:srgbClr val="FDF1EF"/>
+          </a:solidFill>
+          <a:ln w="15875">
+            <a:solidFill>
+              <a:srgbClr val="FBCEC9"/>
+            </a:solidFill>
+            <a:prstDash val="solid"/>
+          </a:ln>
+        </p:spPr>
+        <p:txBody>
+          <a:bodyPr/>
+          <a:p/>
+        </p:txBody>
+      </p:sp>
+      <p:sp>
+        <p:nvSpPr>
+          <p:cNvPr id="12" name="Text 9"/>
+          <p:cNvSpPr/>
+          <p:nvPr/>
+        </p:nvSpPr>
+        <p:spPr>
+          <a:xfrm>
+            <a:off x="6414516" y="1490472"/>
+            <a:ext cx="5070348" cy="2162556"/>
+          </a:xfrm>
+          <a:prstGeom prst="rect">
+            <a:avLst/>
+          </a:prstGeom>
+          <a:noFill/>
+          <a:ln/>
+        </p:spPr>
+        <p:txBody>
+          <a:bodyPr wrap="square" lIns="0" tIns="0" rIns="0" bIns="0" rtlCol="0" anchor="ctr"/>
+          <a:lstStyle/>
+          <a:p>
+            <a:pPr indent="0" marL="0">
+              <a:buNone/>
+            </a:pPr>
+            <a:r>
+              <a:rPr lang="en-US" sz="1500" b="1" dirty="0">
+                <a:solidFill>
+                  <a:srgbClr val="AC4D33"/>
+                </a:solidFill>
+                <a:latin typeface="Calibri" pitchFamily="34" charset="0"/>
+                <a:ea typeface="Calibri" pitchFamily="34" charset="-122"/>
+                <a:cs typeface="Calibri" pitchFamily="34" charset="-120"/>
+              </a:rPr>
+              <a:t>Trong bữa ăn</a:t>
+            </a:r>
+            <a:endParaRPr lang="en-US" sz="1500" dirty="0"/>
+          </a:p>
+          <a:p>
+            <a:pPr indent="0" marL="0">
+              <a:buNone/>
+            </a:pPr>
+            <a:r>
+              <a:rPr lang="en-US" sz="1250" dirty="0">
+                <a:solidFill>
+                  <a:srgbClr val="3A2B28"/>
+                </a:solidFill>
+                <a:latin typeface="Calibri" pitchFamily="34" charset="0"/>
+                <a:ea typeface="Calibri" pitchFamily="34" charset="-122"/>
+                <a:cs typeface="Calibri" pitchFamily="34" charset="-120"/>
+              </a:rPr>
+              <a:t>Chủ tiệc bắt đầu trước; dùng dụng cụ từ ngoài vào trong; không nói khi đang nhai, không gõ đũa, không xoay đĩa thức ăn về phía mình liên tục.</a:t>
+            </a:r>
+            <a:endParaRPr lang="en-US" sz="1500" dirty="0"/>
+          </a:p>
+        </p:txBody>
+      </p:sp>
+      <p:sp>
+        <p:nvSpPr>
+          <p:cNvPr id="13" name="Shape 10"/>
+          <p:cNvSpPr/>
+          <p:nvPr/>
+        </p:nvSpPr>
+        <p:spPr>
+          <a:xfrm>
+            <a:off x="502920" y="3909060"/>
+            <a:ext cx="5509260" cy="2308860"/>
+          </a:xfrm>
+          <a:prstGeom prst="roundRect">
+            <a:avLst>
+              <a:gd name="adj" fmla="val 3564"/>
+            </a:avLst>
+          </a:prstGeom>
+          <a:solidFill>
+            <a:srgbClr val="FDF1EF"/>
+          </a:solidFill>
+          <a:ln w="15875">
+            <a:solidFill>
+              <a:srgbClr val="FBCEC9"/>
+            </a:solidFill>
+            <a:prstDash val="solid"/>
+          </a:ln>
+        </p:spPr>
+        <p:txBody>
+          <a:bodyPr/>
+          <a:p/>
+        </p:txBody>
+      </p:sp>
+      <p:sp>
+        <p:nvSpPr>
+          <p:cNvPr id="14" name="Text 11"/>
+          <p:cNvSpPr/>
+          <p:nvPr/>
+        </p:nvSpPr>
+        <p:spPr>
+          <a:xfrm>
+            <a:off x="722376" y="3982212"/>
+            <a:ext cx="5070348" cy="2162556"/>
+          </a:xfrm>
+          <a:prstGeom prst="rect">
+            <a:avLst/>
+          </a:prstGeom>
+          <a:noFill/>
+          <a:ln/>
+        </p:spPr>
+        <p:txBody>
+          <a:bodyPr wrap="square" lIns="0" tIns="0" rIns="0" bIns="0" rtlCol="0" anchor="ctr"/>
+          <a:lstStyle/>
+          <a:p>
+            <a:pPr indent="0" marL="0">
+              <a:buNone/>
+            </a:pPr>
+            <a:r>
+              <a:rPr lang="en-US" sz="1500" b="1" dirty="0">
+                <a:solidFill>
+                  <a:srgbClr val="AC4D33"/>
+                </a:solidFill>
+                <a:latin typeface="Calibri" pitchFamily="34" charset="0"/>
+                <a:ea typeface="Calibri" pitchFamily="34" charset="-122"/>
+                <a:cs typeface="Calibri" pitchFamily="34" charset="-120"/>
+              </a:rPr>
+              <a:t>Chúc rượu – cụng ly</a:t>
+            </a:r>
+            <a:endParaRPr lang="en-US" sz="1500" dirty="0"/>
+          </a:p>
+          <a:p>
+            <a:pPr indent="0" marL="0">
+              <a:buNone/>
+            </a:pPr>
+            <a:r>
+              <a:rPr lang="en-US" sz="1250" dirty="0">
+                <a:solidFill>
+                  <a:srgbClr val="3A2B28"/>
+                </a:solidFill>
+                <a:latin typeface="Calibri" pitchFamily="34" charset="0"/>
+                <a:ea typeface="Calibri" pitchFamily="34" charset="-122"/>
+                <a:cs typeface="Calibri" pitchFamily="34" charset="-120"/>
+              </a:rPr>
+              <a:t>Người vị thế thấp nâng ly thấp hơn khi cụng; chúc ngắn gọn, đúng đối tượng; tôn trọng người không dùng rượu bia — không ép.</a:t>
+            </a:r>
+            <a:endParaRPr lang="en-US" sz="1500" dirty="0"/>
+          </a:p>
+        </p:txBody>
+      </p:sp>
+      <p:sp>
+        <p:nvSpPr>
+          <p:cNvPr id="15" name="Shape 12"/>
+          <p:cNvSpPr/>
+          <p:nvPr/>
+        </p:nvSpPr>
+        <p:spPr>
+          <a:xfrm>
+            <a:off x="6195060" y="3909060"/>
+            <a:ext cx="5509260" cy="2308860"/>
+          </a:xfrm>
+          <a:prstGeom prst="roundRect">
+            <a:avLst>
+              <a:gd name="adj" fmla="val 3564"/>
+            </a:avLst>
+          </a:prstGeom>
+          <a:solidFill>
+            <a:srgbClr val="FDF1EF"/>
+          </a:solidFill>
+          <a:ln w="15875">
+            <a:solidFill>
+              <a:srgbClr val="FBCEC9"/>
+            </a:solidFill>
+            <a:prstDash val="solid"/>
+          </a:ln>
+        </p:spPr>
+        <p:txBody>
+          <a:bodyPr/>
+          <a:p/>
+        </p:txBody>
+      </p:sp>
+      <p:sp>
+        <p:nvSpPr>
+          <p:cNvPr id="16" name="Text 13"/>
+          <p:cNvSpPr/>
+          <p:nvPr/>
+        </p:nvSpPr>
+        <p:spPr>
+          <a:xfrm>
+            <a:off x="6414516" y="3982212"/>
+            <a:ext cx="5070348" cy="2162556"/>
+          </a:xfrm>
+          <a:prstGeom prst="rect">
+            <a:avLst/>
+          </a:prstGeom>
+          <a:noFill/>
+          <a:ln/>
+        </p:spPr>
+        <p:txBody>
+          <a:bodyPr wrap="square" lIns="0" tIns="0" rIns="0" bIns="0" rtlCol="0" anchor="ctr"/>
+          <a:lstStyle/>
+          <a:p>
+            <a:pPr indent="0" marL="0">
+              <a:buNone/>
+            </a:pPr>
+            <a:r>
+              <a:rPr lang="en-US" sz="1500" b="1" dirty="0">
+                <a:solidFill>
+                  <a:srgbClr val="AC4D33"/>
+                </a:solidFill>
+                <a:latin typeface="Calibri" pitchFamily="34" charset="0"/>
+                <a:ea typeface="Calibri" pitchFamily="34" charset="-122"/>
+                <a:cs typeface="Calibri" pitchFamily="34" charset="-120"/>
+              </a:rPr>
+              <a:t>Câu chuyện trên bàn tiệc</a:t>
+            </a:r>
+            <a:endParaRPr lang="en-US" sz="1500" dirty="0"/>
+          </a:p>
+          <a:p>
+            <a:pPr indent="0" marL="0">
+              <a:buNone/>
+            </a:pPr>
+            <a:r>
+              <a:rPr lang="en-US" sz="1250" dirty="0">
+                <a:solidFill>
+                  <a:srgbClr val="3A2B28"/>
+                </a:solidFill>
+                <a:latin typeface="Calibri" pitchFamily="34" charset="0"/>
+                <a:ea typeface="Calibri" pitchFamily="34" charset="-122"/>
+                <a:cs typeface="Calibri" pitchFamily="34" charset="-120"/>
+              </a:rPr>
+              <a:t>Chủ đề nhẹ nhàng: ẩm thực, thể thao, du lịch, quê quán; tránh chính trị, tôn giáo, thu nhập, đời tư; công việc chỉ bàn khi chủ tiệc gợi mở.</a:t>
+            </a:r>
+            <a:endParaRPr lang="en-US" sz="1500" dirty="0"/>
+          </a:p>
+        </p:txBody>
+      </p:sp>
+    </p:spTree>
+  </p:cSld>
+  <p:clrMapOvr>
+    <a:masterClrMapping/>
+  </p:clrMapOvr>
+</p:sld>
+</file>
+
+<file path=ppt/slides/slide13.xml><?xml version="1.0" encoding="utf-8"?>
 <p:sld xmlns:a="http://schemas.openxmlformats.org/drawingml/2006/main" xmlns:r="http://schemas.openxmlformats.org/officeDocument/2006/relationships" xmlns:p="http://schemas.openxmlformats.org/presentationml/2006/main">
   <p:cSld name="Slide 10">
     <p:bg>
@@ -2893,7 +4373,7 @@
       </p:grpSpPr>
       <p:pic>
         <p:nvPicPr>
-          <p:cNvPr id="2" name="Image 0" descr="assets/logo_tron.png">    </p:cNvPr>
+          <p:cNvPr id="2" name="Image 0" descr="/home/user/comdraft/assets/img/dau-huong.png">    </p:cNvPr>
           <p:cNvPicPr>
             <a:picLocks noChangeAspect="1"/>
           </p:cNvPicPr>
@@ -3134,351 +4614,62 @@
           </a:p>
         </p:txBody>
       </p:sp>
-      <p:sp>
-        <p:nvSpPr>
-          <p:cNvPr id="9" name="Shape 6"/>
-          <p:cNvSpPr/>
-          <p:nvPr/>
-        </p:nvSpPr>
-        <p:spPr>
-          <a:xfrm>
-            <a:off x="502920" y="1417320"/>
-            <a:ext cx="5509260" cy="2308860"/>
-          </a:xfrm>
-          <a:prstGeom prst="roundRect">
-            <a:avLst>
-              <a:gd name="adj" fmla="val 3564"/>
-            </a:avLst>
-          </a:prstGeom>
-          <a:solidFill>
-            <a:srgbClr val="FDF1EF"/>
-          </a:solidFill>
-          <a:ln w="15875">
-            <a:solidFill>
-              <a:srgbClr val="FBCEC9"/>
-            </a:solidFill>
-            <a:prstDash val="solid"/>
-          </a:ln>
-        </p:spPr>
-        <p:txBody>
-          <a:bodyPr/>
-          <a:p/>
-        </p:txBody>
-      </p:sp>
-      <p:sp>
-        <p:nvSpPr>
-          <p:cNvPr id="10" name="Text 7"/>
-          <p:cNvSpPr/>
-          <p:nvPr/>
-        </p:nvSpPr>
-        <p:spPr>
-          <a:xfrm>
-            <a:off x="722376" y="1490472"/>
-            <a:ext cx="5070348" cy="2162556"/>
-          </a:xfrm>
-          <a:prstGeom prst="rect">
-            <a:avLst/>
-          </a:prstGeom>
-          <a:noFill/>
-          <a:ln/>
-        </p:spPr>
-        <p:txBody>
-          <a:bodyPr wrap="square" lIns="0" tIns="0" rIns="0" bIns="0" rtlCol="0" anchor="ctr"/>
-          <a:lstStyle/>
-          <a:p>
-            <a:pPr indent="0" marL="0">
-              <a:buNone/>
-            </a:pPr>
-            <a:r>
-              <a:rPr lang="en-US" sz="1500" b="1" dirty="0">
-                <a:solidFill>
-                  <a:srgbClr val="AC4D33"/>
-                </a:solidFill>
-                <a:latin typeface="Calibri" pitchFamily="34" charset="0"/>
-                <a:ea typeface="Calibri" pitchFamily="34" charset="-122"/>
-                <a:cs typeface="Calibri" pitchFamily="34" charset="-120"/>
-              </a:rPr>
-              <a:t>Cách nói</a:t>
-            </a:r>
-            <a:endParaRPr lang="en-US" sz="1500" dirty="0"/>
-          </a:p>
-          <a:p>
-            <a:pPr indent="0" marL="0">
-              <a:buNone/>
-            </a:pPr>
-            <a:r>
-              <a:rPr lang="en-US" sz="1250" dirty="0">
-                <a:solidFill>
-                  <a:srgbClr val="3A2B28"/>
-                </a:solidFill>
-                <a:latin typeface="Calibri" pitchFamily="34" charset="0"/>
-                <a:ea typeface="Calibri" pitchFamily="34" charset="-122"/>
-                <a:cs typeface="Calibri" pitchFamily="34" charset="-120"/>
-              </a:rPr>
-              <a:t>Văn hóa “nói thẳng” (Đức, Mỹ, Hà Lan) đánh giá cao sự rõ ràng; văn hóa “nói vòng” (Nhật, Hàn, Việt) ưu tiên giữ thể diện — “để chúng tôi xem xét” có thể là lời từ chối.</a:t>
-            </a:r>
-            <a:endParaRPr lang="en-US" sz="1500" dirty="0"/>
-          </a:p>
-        </p:txBody>
-      </p:sp>
-      <p:sp>
-        <p:nvSpPr>
-          <p:cNvPr id="11" name="Shape 8"/>
-          <p:cNvSpPr/>
-          <p:nvPr/>
-        </p:nvSpPr>
-        <p:spPr>
-          <a:xfrm>
-            <a:off x="6195060" y="1417320"/>
-            <a:ext cx="5509260" cy="2308860"/>
-          </a:xfrm>
-          <a:prstGeom prst="roundRect">
-            <a:avLst>
-              <a:gd name="adj" fmla="val 3564"/>
-            </a:avLst>
-          </a:prstGeom>
-          <a:solidFill>
-            <a:srgbClr val="FDF1EF"/>
-          </a:solidFill>
-          <a:ln w="15875">
-            <a:solidFill>
-              <a:srgbClr val="FBCEC9"/>
-            </a:solidFill>
-            <a:prstDash val="solid"/>
-          </a:ln>
-        </p:spPr>
-        <p:txBody>
-          <a:bodyPr/>
-          <a:p/>
-        </p:txBody>
-      </p:sp>
-      <p:sp>
-        <p:nvSpPr>
-          <p:cNvPr id="12" name="Text 9"/>
-          <p:cNvSpPr/>
-          <p:nvPr/>
-        </p:nvSpPr>
-        <p:spPr>
-          <a:xfrm>
-            <a:off x="6414516" y="1490472"/>
-            <a:ext cx="5070348" cy="2162556"/>
-          </a:xfrm>
-          <a:prstGeom prst="rect">
-            <a:avLst/>
-          </a:prstGeom>
-          <a:noFill/>
-          <a:ln/>
-        </p:spPr>
-        <p:txBody>
-          <a:bodyPr wrap="square" lIns="0" tIns="0" rIns="0" bIns="0" rtlCol="0" anchor="ctr"/>
-          <a:lstStyle/>
-          <a:p>
-            <a:pPr indent="0" marL="0">
-              <a:buNone/>
-            </a:pPr>
-            <a:r>
-              <a:rPr lang="en-US" sz="1500" b="1" dirty="0">
-                <a:solidFill>
-                  <a:srgbClr val="AC4D33"/>
-                </a:solidFill>
-                <a:latin typeface="Calibri" pitchFamily="34" charset="0"/>
-                <a:ea typeface="Calibri" pitchFamily="34" charset="-122"/>
-                <a:cs typeface="Calibri" pitchFamily="34" charset="-120"/>
-              </a:rPr>
-              <a:t>Thứ bậc và ra quyết định</a:t>
-            </a:r>
-            <a:endParaRPr lang="en-US" sz="1500" dirty="0"/>
-          </a:p>
-          <a:p>
-            <a:pPr indent="0" marL="0">
-              <a:buNone/>
-            </a:pPr>
-            <a:r>
-              <a:rPr lang="en-US" sz="1250" dirty="0">
-                <a:solidFill>
-                  <a:srgbClr val="3A2B28"/>
-                </a:solidFill>
-                <a:latin typeface="Calibri" pitchFamily="34" charset="0"/>
-                <a:ea typeface="Calibri" pitchFamily="34" charset="-122"/>
-                <a:cs typeface="Calibri" pitchFamily="34" charset="-120"/>
-              </a:rPr>
-              <a:t>Nơi coi trọng tôn ti (Nhật, Hàn, Trung): đúng vai, đúng cấp, quyết định tập thể chậm mà chắc; nơi bình đẳng (Bắc Âu, Úc): gọi tên, tranh luận thẳng với sếp là bình thường.</a:t>
-            </a:r>
-            <a:endParaRPr lang="en-US" sz="1500" dirty="0"/>
-          </a:p>
-        </p:txBody>
-      </p:sp>
-      <p:sp>
-        <p:nvSpPr>
-          <p:cNvPr id="13" name="Shape 10"/>
-          <p:cNvSpPr/>
-          <p:nvPr/>
-        </p:nvSpPr>
-        <p:spPr>
-          <a:xfrm>
-            <a:off x="502920" y="3909060"/>
-            <a:ext cx="5509260" cy="2308860"/>
-          </a:xfrm>
-          <a:prstGeom prst="roundRect">
-            <a:avLst>
-              <a:gd name="adj" fmla="val 3564"/>
-            </a:avLst>
-          </a:prstGeom>
-          <a:solidFill>
-            <a:srgbClr val="FDF1EF"/>
-          </a:solidFill>
-          <a:ln w="15875">
-            <a:solidFill>
-              <a:srgbClr val="FBCEC9"/>
-            </a:solidFill>
-            <a:prstDash val="solid"/>
-          </a:ln>
-        </p:spPr>
-        <p:txBody>
-          <a:bodyPr/>
-          <a:p/>
-        </p:txBody>
-      </p:sp>
-      <p:sp>
-        <p:nvSpPr>
-          <p:cNvPr id="14" name="Text 11"/>
-          <p:cNvSpPr/>
-          <p:nvPr/>
-        </p:nvSpPr>
-        <p:spPr>
-          <a:xfrm>
-            <a:off x="722376" y="3982212"/>
-            <a:ext cx="5070348" cy="2162556"/>
-          </a:xfrm>
-          <a:prstGeom prst="rect">
-            <a:avLst/>
-          </a:prstGeom>
-          <a:noFill/>
-          <a:ln/>
-        </p:spPr>
-        <p:txBody>
-          <a:bodyPr wrap="square" lIns="0" tIns="0" rIns="0" bIns="0" rtlCol="0" anchor="ctr"/>
-          <a:lstStyle/>
-          <a:p>
-            <a:pPr indent="0" marL="0">
-              <a:buNone/>
-            </a:pPr>
-            <a:r>
-              <a:rPr lang="en-US" sz="1500" b="1" dirty="0">
-                <a:solidFill>
-                  <a:srgbClr val="AC4D33"/>
-                </a:solidFill>
-                <a:latin typeface="Calibri" pitchFamily="34" charset="0"/>
-                <a:ea typeface="Calibri" pitchFamily="34" charset="-122"/>
-                <a:cs typeface="Calibri" pitchFamily="34" charset="-120"/>
-              </a:rPr>
-              <a:t>Thời gian và cam kết</a:t>
-            </a:r>
-            <a:endParaRPr lang="en-US" sz="1500" dirty="0"/>
-          </a:p>
-          <a:p>
-            <a:pPr indent="0" marL="0">
-              <a:buNone/>
-            </a:pPr>
-            <a:r>
-              <a:rPr lang="en-US" sz="1250" dirty="0">
-                <a:solidFill>
-                  <a:srgbClr val="3A2B28"/>
-                </a:solidFill>
-                <a:latin typeface="Calibri" pitchFamily="34" charset="0"/>
-                <a:ea typeface="Calibri" pitchFamily="34" charset="-122"/>
-                <a:cs typeface="Calibri" pitchFamily="34" charset="-120"/>
-              </a:rPr>
-              <a:t>Văn hóa giờ giấc chặt (Đức, Nhật, Thụy Sĩ): trễ 5 phút là thất lễ; văn hóa thời gian linh hoạt: quan hệ đi trước, tiến độ đi sau — cần chốt mốc bằng văn bản.</a:t>
-            </a:r>
-            <a:endParaRPr lang="en-US" sz="1500" dirty="0"/>
-          </a:p>
-        </p:txBody>
-      </p:sp>
-      <p:sp>
-        <p:nvSpPr>
-          <p:cNvPr id="15" name="Shape 12"/>
-          <p:cNvSpPr/>
-          <p:nvPr/>
-        </p:nvSpPr>
-        <p:spPr>
-          <a:xfrm>
-            <a:off x="6195060" y="3909060"/>
-            <a:ext cx="5509260" cy="2308860"/>
-          </a:xfrm>
-          <a:prstGeom prst="roundRect">
-            <a:avLst>
-              <a:gd name="adj" fmla="val 3564"/>
-            </a:avLst>
-          </a:prstGeom>
-          <a:solidFill>
-            <a:srgbClr val="FDF1EF"/>
-          </a:solidFill>
-          <a:ln w="15875">
-            <a:solidFill>
-              <a:srgbClr val="FBCEC9"/>
-            </a:solidFill>
-            <a:prstDash val="solid"/>
-          </a:ln>
-        </p:spPr>
-        <p:txBody>
-          <a:bodyPr/>
-          <a:p/>
-        </p:txBody>
-      </p:sp>
-      <p:sp>
-        <p:nvSpPr>
-          <p:cNvPr id="16" name="Text 13"/>
-          <p:cNvSpPr/>
-          <p:nvPr/>
-        </p:nvSpPr>
-        <p:spPr>
-          <a:xfrm>
-            <a:off x="6414516" y="3982212"/>
-            <a:ext cx="5070348" cy="2162556"/>
-          </a:xfrm>
-          <a:prstGeom prst="rect">
-            <a:avLst/>
-          </a:prstGeom>
-          <a:noFill/>
-          <a:ln/>
-        </p:spPr>
-        <p:txBody>
-          <a:bodyPr wrap="square" lIns="0" tIns="0" rIns="0" bIns="0" rtlCol="0" anchor="ctr"/>
-          <a:lstStyle/>
-          <a:p>
-            <a:pPr indent="0" marL="0">
-              <a:buNone/>
-            </a:pPr>
-            <a:r>
-              <a:rPr lang="en-US" sz="1500" b="1" dirty="0">
-                <a:solidFill>
-                  <a:srgbClr val="AC4D33"/>
-                </a:solidFill>
-                <a:latin typeface="Calibri" pitchFamily="34" charset="0"/>
-                <a:ea typeface="Calibri" pitchFamily="34" charset="-122"/>
-                <a:cs typeface="Calibri" pitchFamily="34" charset="-120"/>
-              </a:rPr>
-              <a:t>Cử chỉ và kiêng kỵ</a:t>
-            </a:r>
-            <a:endParaRPr lang="en-US" sz="1500" dirty="0"/>
-          </a:p>
-          <a:p>
-            <a:pPr indent="0" marL="0">
-              <a:buNone/>
-            </a:pPr>
-            <a:r>
-              <a:rPr lang="en-US" sz="1250" dirty="0">
-                <a:solidFill>
-                  <a:srgbClr val="3A2B28"/>
-                </a:solidFill>
-                <a:latin typeface="Calibri" pitchFamily="34" charset="0"/>
-                <a:ea typeface="Calibri" pitchFamily="34" charset="-122"/>
-                <a:cs typeface="Calibri" pitchFamily="34" charset="-120"/>
-              </a:rPr>
-              <a:t>Cùng một cử chỉ mang nghĩa khác nhau giữa các nước; màu sắc, con số, quà tặng đều có thể nhạy cảm — tra cứu trước khi gặp đối tác nước ngoài.</a:t>
-            </a:r>
-            <a:endParaRPr lang="en-US" sz="1500" dirty="0"/>
+      <p:pic>
+        <p:nvPicPr>
+          <p:cNvPr id="9" name="Picture 8" descr="c3-ba-truc-van-hoa-nt.png"/>
+          <p:cNvPicPr>
+            <a:picLocks noChangeAspect="1"/>
+          </p:cNvPicPr>
+          <p:nvPr/>
+        </p:nvPicPr>
+        <p:blipFill>
+          <a:blip r:embed="rId4"/>
+          <a:stretch>
+            <a:fillRect/>
+          </a:stretch>
+        </p:blipFill>
+        <p:spPr>
+          <a:xfrm>
+            <a:off x="823647" y="1640598"/>
+            <a:ext cx="10544400" cy="4390619"/>
+          </a:xfrm>
+          <a:prstGeom prst="rect">
+            <a:avLst/>
+          </a:prstGeom>
+        </p:spPr>
+      </p:pic>
+      <p:sp>
+        <p:nvSpPr>
+          <p:cNvPr id="10" name="TextBox 9"/>
+          <p:cNvSpPr txBox="1"/>
+          <p:nvPr/>
+        </p:nvSpPr>
+        <p:spPr>
+          <a:xfrm>
+            <a:off x="548640" y="6104369"/>
+            <a:ext cx="11109960" cy="310896"/>
+          </a:xfrm>
+          <a:prstGeom prst="rect">
+            <a:avLst/>
+          </a:prstGeom>
+          <a:noFill/>
+        </p:spPr>
+        <p:txBody>
+          <a:bodyPr wrap="square">
+            <a:spAutoFit/>
+          </a:bodyPr>
+          <a:lstStyle/>
+          <a:p>
+            <a:pPr algn="ctr"/>
+            <a:r>
+              <a:rPr sz="1150" i="1">
+                <a:solidFill>
+                  <a:srgbClr val="8A7A76"/>
+                </a:solidFill>
+                <a:latin typeface="Calibri"/>
+              </a:rPr>
+              <a:t>Không cực nào đúng hơn cực nào — biết mình đang đứng ở đâu trên trục mới là việc.</a:t>
+            </a:r>
           </a:p>
         </p:txBody>
       </p:sp>
@@ -3490,7 +4681,7 @@
 </p:sld>
 </file>
 
-<file path=ppt/slides/slide11.xml><?xml version="1.0" encoding="utf-8"?>
+<file path=ppt/slides/slide14.xml><?xml version="1.0" encoding="utf-8"?>
 <p:sld xmlns:a="http://schemas.openxmlformats.org/drawingml/2006/main" xmlns:r="http://schemas.openxmlformats.org/officeDocument/2006/relationships" xmlns:p="http://schemas.openxmlformats.org/presentationml/2006/main">
   <p:cSld name="Slide 11">
     <p:bg>
@@ -3516,7 +4707,7 @@
       </p:grpSpPr>
       <p:pic>
         <p:nvPicPr>
-          <p:cNvPr id="2" name="Image 0" descr="assets/logo_tron.png">    </p:cNvPr>
+          <p:cNvPr id="2" name="Image 0" descr="/home/user/comdraft/assets/img/dau-huong.png">    </p:cNvPr>
           <p:cNvPicPr>
             <a:picLocks noChangeAspect="1"/>
           </p:cNvPicPr>
@@ -4345,7 +5536,7 @@
 </p:sld>
 </file>
 
-<file path=ppt/slides/slide12.xml><?xml version="1.0" encoding="utf-8"?>
+<file path=ppt/slides/slide15.xml><?xml version="1.0" encoding="utf-8"?>
 <p:sld xmlns:a="http://schemas.openxmlformats.org/drawingml/2006/main" xmlns:r="http://schemas.openxmlformats.org/officeDocument/2006/relationships" xmlns:p="http://schemas.openxmlformats.org/presentationml/2006/main">
   <p:cSld name="Slide 12">
     <p:bg>
@@ -4371,7 +5562,7 @@
       </p:grpSpPr>
       <p:pic>
         <p:nvPicPr>
-          <p:cNvPr id="2" name="Image 0" descr="assets/logo_tron.png">    </p:cNvPr>
+          <p:cNvPr id="2" name="Image 0" descr="/home/user/comdraft/assets/img/dau-huong.png">    </p:cNvPr>
           <p:cNvPicPr>
             <a:picLocks noChangeAspect="1"/>
           </p:cNvPicPr>
@@ -5076,7 +6267,7 @@
 </p:sld>
 </file>
 
-<file path=ppt/slides/slide13.xml><?xml version="1.0" encoding="utf-8"?>
+<file path=ppt/slides/slide16.xml><?xml version="1.0" encoding="utf-8"?>
 <p:sld xmlns:a="http://schemas.openxmlformats.org/drawingml/2006/main" xmlns:r="http://schemas.openxmlformats.org/officeDocument/2006/relationships" xmlns:p="http://schemas.openxmlformats.org/presentationml/2006/main">
   <p:cSld name="Slide 13">
     <p:bg>
@@ -5102,7 +6293,7 @@
       </p:grpSpPr>
       <p:pic>
         <p:nvPicPr>
-          <p:cNvPr id="2" name="Image 0" descr="assets/logo_tron.png">    </p:cNvPr>
+          <p:cNvPr id="2" name="Image 0" descr="/home/user/comdraft/assets/img/dau-huong.png">    </p:cNvPr>
           <p:cNvPicPr>
             <a:picLocks noChangeAspect="1"/>
           </p:cNvPicPr>
@@ -5612,7 +6803,7 @@
 </p:sld>
 </file>
 
-<file path=ppt/slides/slide14.xml><?xml version="1.0" encoding="utf-8"?>
+<file path=ppt/slides/slide17.xml><?xml version="1.0" encoding="utf-8"?>
 <p:sld xmlns:a="http://schemas.openxmlformats.org/drawingml/2006/main" xmlns:r="http://schemas.openxmlformats.org/officeDocument/2006/relationships" xmlns:p="http://schemas.openxmlformats.org/presentationml/2006/main">
   <p:cSld name="Slide 14">
     <p:bg>
@@ -5638,7 +6829,7 @@
       </p:grpSpPr>
       <p:pic>
         <p:nvPicPr>
-          <p:cNvPr id="2" name="Image 0" descr="assets/logo_tron.png">    </p:cNvPr>
+          <p:cNvPr id="2" name="Image 0" descr="/home/user/comdraft/assets/img/dau-huong.png">    </p:cNvPr>
           <p:cNvPicPr>
             <a:picLocks noChangeAspect="1"/>
           </p:cNvPicPr>
@@ -6379,7 +7570,7 @@
 </p:sld>
 </file>
 
-<file path=ppt/slides/slide15.xml><?xml version="1.0" encoding="utf-8"?>
+<file path=ppt/slides/slide18.xml><?xml version="1.0" encoding="utf-8"?>
 <p:sld xmlns:a="http://schemas.openxmlformats.org/drawingml/2006/main" xmlns:r="http://schemas.openxmlformats.org/officeDocument/2006/relationships" xmlns:p="http://schemas.openxmlformats.org/presentationml/2006/main">
   <p:cSld name="Slide 15">
     <p:bg>
@@ -6405,7 +7596,7 @@
       </p:grpSpPr>
       <p:pic>
         <p:nvPicPr>
-          <p:cNvPr id="2" name="Image 0" descr="assets/logo_tron.png">    </p:cNvPr>
+          <p:cNvPr id="2" name="Image 0" descr="/home/user/comdraft/assets/img/dau-huong.png">    </p:cNvPr>
           <p:cNvPicPr>
             <a:picLocks noChangeAspect="1"/>
           </p:cNvPicPr>
@@ -6904,969 +8095,6 @@
               <a:t>Slide bài giảng, tình huống và bài tập do GV. Đỗ Thùy Hương biên soạn; cung cấp sau mỗi buổi học trên nhóm lớp.</a:t>
             </a:r>
             <a:endParaRPr lang="en-US" sz="1500" dirty="0"/>
-          </a:p>
-        </p:txBody>
-      </p:sp>
-    </p:spTree>
-  </p:cSld>
-  <p:clrMapOvr>
-    <a:masterClrMapping/>
-  </p:clrMapOvr>
-</p:sld>
-</file>
-
-<file path=ppt/slides/slide16.xml><?xml version="1.0" encoding="utf-8"?>
-<p:sld xmlns:a="http://schemas.openxmlformats.org/drawingml/2006/main" xmlns:p="http://schemas.openxmlformats.org/presentationml/2006/main" xmlns:r="http://schemas.openxmlformats.org/officeDocument/2006/relationships">
-  <p:cSld>
-    <p:spTree>
-      <p:nvGrpSpPr>
-        <p:cNvPr id="1" name=""/>
-        <p:cNvGrpSpPr/>
-        <p:nvPr/>
-      </p:nvGrpSpPr>
-      <p:grpSpPr/>
-      <p:sp>
-        <p:nvSpPr>
-          <p:cNvPr id="2" name="Rectangle 1"/>
-          <p:cNvSpPr/>
-          <p:nvPr/>
-        </p:nvSpPr>
-        <p:spPr>
-          <a:xfrm>
-            <a:off x="0" y="0"/>
-            <a:ext cx="12191695" cy="6858000"/>
-          </a:xfrm>
-          <a:prstGeom prst="rect">
-            <a:avLst/>
-          </a:prstGeom>
-          <a:solidFill>
-            <a:srgbClr val="FDFBF8"/>
-          </a:solidFill>
-          <a:ln>
-            <a:noFill/>
-          </a:ln>
-          <a:effectLst/>
-        </p:spPr>
-        <p:style>
-          <a:lnRef idx="1">
-            <a:schemeClr val="accent1"/>
-          </a:lnRef>
-          <a:fillRef idx="3">
-            <a:schemeClr val="accent1"/>
-          </a:fillRef>
-          <a:effectRef idx="2">
-            <a:schemeClr val="accent1"/>
-          </a:effectRef>
-          <a:fontRef idx="minor">
-            <a:schemeClr val="lt1"/>
-          </a:fontRef>
-        </p:style>
-        <p:txBody>
-          <a:bodyPr rtlCol="0" anchor="ctr"/>
-          <a:lstStyle/>
-          <a:p>
-            <a:pPr algn="ctr"/>
-          </a:p>
-        </p:txBody>
-      </p:sp>
-      <p:sp>
-        <p:nvSpPr>
-          <p:cNvPr id="3" name="Rectangle 2"/>
-          <p:cNvSpPr/>
-          <p:nvPr/>
-        </p:nvSpPr>
-        <p:spPr>
-          <a:xfrm>
-            <a:off x="0" y="2103120"/>
-            <a:ext cx="12191695" cy="2743200"/>
-          </a:xfrm>
-          <a:prstGeom prst="rect">
-            <a:avLst/>
-          </a:prstGeom>
-          <a:solidFill>
-            <a:srgbClr val="FDF1EF"/>
-          </a:solidFill>
-          <a:ln>
-            <a:noFill/>
-          </a:ln>
-          <a:effectLst/>
-        </p:spPr>
-        <p:style>
-          <a:lnRef idx="1">
-            <a:schemeClr val="accent1"/>
-          </a:lnRef>
-          <a:fillRef idx="3">
-            <a:schemeClr val="accent1"/>
-          </a:fillRef>
-          <a:effectRef idx="2">
-            <a:schemeClr val="accent1"/>
-          </a:effectRef>
-          <a:fontRef idx="minor">
-            <a:schemeClr val="lt1"/>
-          </a:fontRef>
-        </p:style>
-        <p:txBody>
-          <a:bodyPr rtlCol="0" anchor="ctr"/>
-          <a:lstStyle/>
-          <a:p>
-            <a:pPr algn="ctr"/>
-          </a:p>
-        </p:txBody>
-      </p:sp>
-      <p:sp>
-        <p:nvSpPr>
-          <p:cNvPr id="4" name="Rectangle 3"/>
-          <p:cNvSpPr/>
-          <p:nvPr/>
-        </p:nvSpPr>
-        <p:spPr>
-          <a:xfrm>
-            <a:off x="0" y="0"/>
-            <a:ext cx="274320" cy="6858000"/>
-          </a:xfrm>
-          <a:prstGeom prst="rect">
-            <a:avLst/>
-          </a:prstGeom>
-          <a:solidFill>
-            <a:srgbClr val="DC756A"/>
-          </a:solidFill>
-          <a:ln>
-            <a:noFill/>
-          </a:ln>
-          <a:effectLst/>
-        </p:spPr>
-        <p:style>
-          <a:lnRef idx="1">
-            <a:schemeClr val="accent1"/>
-          </a:lnRef>
-          <a:fillRef idx="3">
-            <a:schemeClr val="accent1"/>
-          </a:fillRef>
-          <a:effectRef idx="2">
-            <a:schemeClr val="accent1"/>
-          </a:effectRef>
-          <a:fontRef idx="minor">
-            <a:schemeClr val="lt1"/>
-          </a:fontRef>
-        </p:style>
-        <p:txBody>
-          <a:bodyPr rtlCol="0" anchor="ctr"/>
-          <a:lstStyle/>
-          <a:p>
-            <a:pPr algn="ctr"/>
-          </a:p>
-        </p:txBody>
-      </p:sp>
-      <p:sp>
-        <p:nvSpPr>
-          <p:cNvPr id="5" name="TextBox 4"/>
-          <p:cNvSpPr txBox="1"/>
-          <p:nvPr/>
-        </p:nvSpPr>
-        <p:spPr>
-          <a:xfrm>
-            <a:off x="1280160" y="2377440"/>
-            <a:ext cx="9692640" cy="411480"/>
-          </a:xfrm>
-          <a:prstGeom prst="rect">
-            <a:avLst/>
-          </a:prstGeom>
-          <a:noFill/>
-        </p:spPr>
-        <p:txBody>
-          <a:bodyPr wrap="none">
-            <a:spAutoFit/>
-          </a:bodyPr>
-          <a:lstStyle/>
-          <a:p>
-            <a:r>
-              <a:rPr sz="1500" b="1">
-                <a:solidFill>
-                  <a:srgbClr val="DC756A"/>
-                </a:solidFill>
-                <a:latin typeface="Calibri"/>
-              </a:rPr>
-              <a:t>MỤC 3.1</a:t>
-            </a:r>
-          </a:p>
-        </p:txBody>
-      </p:sp>
-      <p:sp>
-        <p:nvSpPr>
-          <p:cNvPr id="6" name="TextBox 5"/>
-          <p:cNvSpPr txBox="1"/>
-          <p:nvPr/>
-        </p:nvSpPr>
-        <p:spPr>
-          <a:xfrm>
-            <a:off x="1280160" y="2788920"/>
-            <a:ext cx="9601200" cy="1371600"/>
-          </a:xfrm>
-          <a:prstGeom prst="rect">
-            <a:avLst/>
-          </a:prstGeom>
-          <a:noFill/>
-        </p:spPr>
-        <p:txBody>
-          <a:bodyPr wrap="square">
-            <a:spAutoFit/>
-          </a:bodyPr>
-          <a:lstStyle/>
-          <a:p>
-            <a:r>
-              <a:rPr sz="3800" b="1">
-                <a:solidFill>
-                  <a:srgbClr val="AC4D33"/>
-                </a:solidFill>
-                <a:latin typeface="Cambria"/>
-              </a:rPr>
-              <a:t>Giao tiếp trong nội bộ tổ chức</a:t>
-            </a:r>
-          </a:p>
-        </p:txBody>
-      </p:sp>
-      <p:sp>
-        <p:nvSpPr>
-          <p:cNvPr id="7" name="TextBox 6"/>
-          <p:cNvSpPr txBox="1"/>
-          <p:nvPr/>
-        </p:nvSpPr>
-        <p:spPr>
-          <a:xfrm>
-            <a:off x="1280160" y="4224528"/>
-            <a:ext cx="9418320" cy="640080"/>
-          </a:xfrm>
-          <a:prstGeom prst="rect">
-            <a:avLst/>
-          </a:prstGeom>
-          <a:noFill/>
-        </p:spPr>
-        <p:txBody>
-          <a:bodyPr wrap="square">
-            <a:spAutoFit/>
-          </a:bodyPr>
-          <a:lstStyle/>
-          <a:p>
-            <a:r>
-              <a:rPr sz="1450" i="1">
-                <a:solidFill>
-                  <a:srgbClr val="8A7A76"/>
-                </a:solidFill>
-                <a:latin typeface="Calibri"/>
-              </a:rPr>
-              <a:t>Với cấp trên, cấp dưới và đồng nghiệp — mỗi mối quan hệ một cách ứng xử.</a:t>
-            </a:r>
-          </a:p>
-        </p:txBody>
-      </p:sp>
-      <p:sp>
-        <p:nvSpPr>
-          <p:cNvPr id="8" name="TextBox 7"/>
-          <p:cNvSpPr txBox="1"/>
-          <p:nvPr/>
-        </p:nvSpPr>
-        <p:spPr>
-          <a:xfrm>
-            <a:off x="502920" y="6419088"/>
-            <a:ext cx="7772400" cy="292608"/>
-          </a:xfrm>
-          <a:prstGeom prst="rect">
-            <a:avLst/>
-          </a:prstGeom>
-          <a:noFill/>
-        </p:spPr>
-        <p:txBody>
-          <a:bodyPr wrap="none">
-            <a:spAutoFit/>
-          </a:bodyPr>
-          <a:lstStyle/>
-          <a:p>
-            <a:r>
-              <a:rPr sz="900">
-                <a:solidFill>
-                  <a:srgbClr val="8A7A76"/>
-                </a:solidFill>
-                <a:latin typeface="Calibri"/>
-              </a:rPr>
-              <a:t>Je m'appelle Huong  •  GV. Đỗ Thùy Hương  •  EC1103</a:t>
-            </a:r>
-          </a:p>
-        </p:txBody>
-      </p:sp>
-      <p:sp>
-        <p:nvSpPr>
-          <p:cNvPr id="9" name="TextBox 8"/>
-          <p:cNvSpPr txBox="1"/>
-          <p:nvPr/>
-        </p:nvSpPr>
-        <p:spPr>
-          <a:xfrm>
-            <a:off x="9326880" y="6419088"/>
-            <a:ext cx="1920240" cy="292608"/>
-          </a:xfrm>
-          <a:prstGeom prst="rect">
-            <a:avLst/>
-          </a:prstGeom>
-          <a:noFill/>
-        </p:spPr>
-        <p:txBody>
-          <a:bodyPr wrap="none">
-            <a:spAutoFit/>
-          </a:bodyPr>
-          <a:lstStyle/>
-          <a:p>
-            <a:pPr algn="r"/>
-            <a:r>
-              <a:rPr sz="900">
-                <a:solidFill>
-                  <a:srgbClr val="8A7A76"/>
-                </a:solidFill>
-                <a:latin typeface="Calibri"/>
-              </a:rPr>
-              <a:t>Chương 3</a:t>
-            </a:r>
-          </a:p>
-        </p:txBody>
-      </p:sp>
-    </p:spTree>
-  </p:cSld>
-  <p:clrMapOvr>
-    <a:masterClrMapping/>
-  </p:clrMapOvr>
-</p:sld>
-</file>
-
-<file path=ppt/slides/slide17.xml><?xml version="1.0" encoding="utf-8"?>
-<p:sld xmlns:a="http://schemas.openxmlformats.org/drawingml/2006/main" xmlns:p="http://schemas.openxmlformats.org/presentationml/2006/main" xmlns:r="http://schemas.openxmlformats.org/officeDocument/2006/relationships">
-  <p:cSld>
-    <p:spTree>
-      <p:nvGrpSpPr>
-        <p:cNvPr id="1" name=""/>
-        <p:cNvGrpSpPr/>
-        <p:nvPr/>
-      </p:nvGrpSpPr>
-      <p:grpSpPr/>
-      <p:sp>
-        <p:nvSpPr>
-          <p:cNvPr id="2" name="Rectangle 1"/>
-          <p:cNvSpPr/>
-          <p:nvPr/>
-        </p:nvSpPr>
-        <p:spPr>
-          <a:xfrm>
-            <a:off x="0" y="0"/>
-            <a:ext cx="12191695" cy="6858000"/>
-          </a:xfrm>
-          <a:prstGeom prst="rect">
-            <a:avLst/>
-          </a:prstGeom>
-          <a:solidFill>
-            <a:srgbClr val="FDFBF8"/>
-          </a:solidFill>
-          <a:ln>
-            <a:noFill/>
-          </a:ln>
-          <a:effectLst/>
-        </p:spPr>
-        <p:style>
-          <a:lnRef idx="1">
-            <a:schemeClr val="accent1"/>
-          </a:lnRef>
-          <a:fillRef idx="3">
-            <a:schemeClr val="accent1"/>
-          </a:fillRef>
-          <a:effectRef idx="2">
-            <a:schemeClr val="accent1"/>
-          </a:effectRef>
-          <a:fontRef idx="minor">
-            <a:schemeClr val="lt1"/>
-          </a:fontRef>
-        </p:style>
-        <p:txBody>
-          <a:bodyPr rtlCol="0" anchor="ctr"/>
-          <a:lstStyle/>
-          <a:p>
-            <a:pPr algn="ctr"/>
-          </a:p>
-        </p:txBody>
-      </p:sp>
-      <p:sp>
-        <p:nvSpPr>
-          <p:cNvPr id="3" name="Rectangle 2"/>
-          <p:cNvSpPr/>
-          <p:nvPr/>
-        </p:nvSpPr>
-        <p:spPr>
-          <a:xfrm>
-            <a:off x="0" y="2103120"/>
-            <a:ext cx="12191695" cy="2743200"/>
-          </a:xfrm>
-          <a:prstGeom prst="rect">
-            <a:avLst/>
-          </a:prstGeom>
-          <a:solidFill>
-            <a:srgbClr val="FDF1EF"/>
-          </a:solidFill>
-          <a:ln>
-            <a:noFill/>
-          </a:ln>
-          <a:effectLst/>
-        </p:spPr>
-        <p:style>
-          <a:lnRef idx="1">
-            <a:schemeClr val="accent1"/>
-          </a:lnRef>
-          <a:fillRef idx="3">
-            <a:schemeClr val="accent1"/>
-          </a:fillRef>
-          <a:effectRef idx="2">
-            <a:schemeClr val="accent1"/>
-          </a:effectRef>
-          <a:fontRef idx="minor">
-            <a:schemeClr val="lt1"/>
-          </a:fontRef>
-        </p:style>
-        <p:txBody>
-          <a:bodyPr rtlCol="0" anchor="ctr"/>
-          <a:lstStyle/>
-          <a:p>
-            <a:pPr algn="ctr"/>
-          </a:p>
-        </p:txBody>
-      </p:sp>
-      <p:sp>
-        <p:nvSpPr>
-          <p:cNvPr id="4" name="Rectangle 3"/>
-          <p:cNvSpPr/>
-          <p:nvPr/>
-        </p:nvSpPr>
-        <p:spPr>
-          <a:xfrm>
-            <a:off x="0" y="0"/>
-            <a:ext cx="274320" cy="6858000"/>
-          </a:xfrm>
-          <a:prstGeom prst="rect">
-            <a:avLst/>
-          </a:prstGeom>
-          <a:solidFill>
-            <a:srgbClr val="DC756A"/>
-          </a:solidFill>
-          <a:ln>
-            <a:noFill/>
-          </a:ln>
-          <a:effectLst/>
-        </p:spPr>
-        <p:style>
-          <a:lnRef idx="1">
-            <a:schemeClr val="accent1"/>
-          </a:lnRef>
-          <a:fillRef idx="3">
-            <a:schemeClr val="accent1"/>
-          </a:fillRef>
-          <a:effectRef idx="2">
-            <a:schemeClr val="accent1"/>
-          </a:effectRef>
-          <a:fontRef idx="minor">
-            <a:schemeClr val="lt1"/>
-          </a:fontRef>
-        </p:style>
-        <p:txBody>
-          <a:bodyPr rtlCol="0" anchor="ctr"/>
-          <a:lstStyle/>
-          <a:p>
-            <a:pPr algn="ctr"/>
-          </a:p>
-        </p:txBody>
-      </p:sp>
-      <p:sp>
-        <p:nvSpPr>
-          <p:cNvPr id="5" name="TextBox 4"/>
-          <p:cNvSpPr txBox="1"/>
-          <p:nvPr/>
-        </p:nvSpPr>
-        <p:spPr>
-          <a:xfrm>
-            <a:off x="1280160" y="2377440"/>
-            <a:ext cx="9692640" cy="411480"/>
-          </a:xfrm>
-          <a:prstGeom prst="rect">
-            <a:avLst/>
-          </a:prstGeom>
-          <a:noFill/>
-        </p:spPr>
-        <p:txBody>
-          <a:bodyPr wrap="none">
-            <a:spAutoFit/>
-          </a:bodyPr>
-          <a:lstStyle/>
-          <a:p>
-            <a:r>
-              <a:rPr sz="1500" b="1">
-                <a:solidFill>
-                  <a:srgbClr val="DC756A"/>
-                </a:solidFill>
-                <a:latin typeface="Calibri"/>
-              </a:rPr>
-              <a:t>MỤC 3.2</a:t>
-            </a:r>
-          </a:p>
-        </p:txBody>
-      </p:sp>
-      <p:sp>
-        <p:nvSpPr>
-          <p:cNvPr id="6" name="TextBox 5"/>
-          <p:cNvSpPr txBox="1"/>
-          <p:nvPr/>
-        </p:nvSpPr>
-        <p:spPr>
-          <a:xfrm>
-            <a:off x="1280160" y="2788920"/>
-            <a:ext cx="9601200" cy="1371600"/>
-          </a:xfrm>
-          <a:prstGeom prst="rect">
-            <a:avLst/>
-          </a:prstGeom>
-          <a:noFill/>
-        </p:spPr>
-        <p:txBody>
-          <a:bodyPr wrap="square">
-            <a:spAutoFit/>
-          </a:bodyPr>
-          <a:lstStyle/>
-          <a:p>
-            <a:r>
-              <a:rPr sz="3800" b="1">
-                <a:solidFill>
-                  <a:srgbClr val="AC4D33"/>
-                </a:solidFill>
-                <a:latin typeface="Cambria"/>
-              </a:rPr>
-              <a:t>Giao tiếp với bên ngoài tổ chức</a:t>
-            </a:r>
-          </a:p>
-        </p:txBody>
-      </p:sp>
-      <p:sp>
-        <p:nvSpPr>
-          <p:cNvPr id="7" name="TextBox 6"/>
-          <p:cNvSpPr txBox="1"/>
-          <p:nvPr/>
-        </p:nvSpPr>
-        <p:spPr>
-          <a:xfrm>
-            <a:off x="1280160" y="4224528"/>
-            <a:ext cx="9418320" cy="640080"/>
-          </a:xfrm>
-          <a:prstGeom prst="rect">
-            <a:avLst/>
-          </a:prstGeom>
-          <a:noFill/>
-        </p:spPr>
-        <p:txBody>
-          <a:bodyPr wrap="square">
-            <a:spAutoFit/>
-          </a:bodyPr>
-          <a:lstStyle/>
-          <a:p>
-            <a:r>
-              <a:rPr sz="1450" i="1">
-                <a:solidFill>
-                  <a:srgbClr val="8A7A76"/>
-                </a:solidFill>
-                <a:latin typeface="Calibri"/>
-              </a:rPr>
-              <a:t>Khách hàng, đối tác, cơ quan nhà nước và truyền thông — bốn nhóm, bốn luật chơi.</a:t>
-            </a:r>
-          </a:p>
-        </p:txBody>
-      </p:sp>
-      <p:sp>
-        <p:nvSpPr>
-          <p:cNvPr id="8" name="TextBox 7"/>
-          <p:cNvSpPr txBox="1"/>
-          <p:nvPr/>
-        </p:nvSpPr>
-        <p:spPr>
-          <a:xfrm>
-            <a:off x="502920" y="6419088"/>
-            <a:ext cx="7772400" cy="292608"/>
-          </a:xfrm>
-          <a:prstGeom prst="rect">
-            <a:avLst/>
-          </a:prstGeom>
-          <a:noFill/>
-        </p:spPr>
-        <p:txBody>
-          <a:bodyPr wrap="none">
-            <a:spAutoFit/>
-          </a:bodyPr>
-          <a:lstStyle/>
-          <a:p>
-            <a:r>
-              <a:rPr sz="900">
-                <a:solidFill>
-                  <a:srgbClr val="8A7A76"/>
-                </a:solidFill>
-                <a:latin typeface="Calibri"/>
-              </a:rPr>
-              <a:t>Je m'appelle Huong  •  GV. Đỗ Thùy Hương  •  EC1103</a:t>
-            </a:r>
-          </a:p>
-        </p:txBody>
-      </p:sp>
-      <p:sp>
-        <p:nvSpPr>
-          <p:cNvPr id="9" name="TextBox 8"/>
-          <p:cNvSpPr txBox="1"/>
-          <p:nvPr/>
-        </p:nvSpPr>
-        <p:spPr>
-          <a:xfrm>
-            <a:off x="9326880" y="6419088"/>
-            <a:ext cx="1920240" cy="292608"/>
-          </a:xfrm>
-          <a:prstGeom prst="rect">
-            <a:avLst/>
-          </a:prstGeom>
-          <a:noFill/>
-        </p:spPr>
-        <p:txBody>
-          <a:bodyPr wrap="none">
-            <a:spAutoFit/>
-          </a:bodyPr>
-          <a:lstStyle/>
-          <a:p>
-            <a:pPr algn="r"/>
-            <a:r>
-              <a:rPr sz="900">
-                <a:solidFill>
-                  <a:srgbClr val="8A7A76"/>
-                </a:solidFill>
-                <a:latin typeface="Calibri"/>
-              </a:rPr>
-              <a:t>Chương 3</a:t>
-            </a:r>
-          </a:p>
-        </p:txBody>
-      </p:sp>
-    </p:spTree>
-  </p:cSld>
-  <p:clrMapOvr>
-    <a:masterClrMapping/>
-  </p:clrMapOvr>
-</p:sld>
-</file>
-
-<file path=ppt/slides/slide18.xml><?xml version="1.0" encoding="utf-8"?>
-<p:sld xmlns:a="http://schemas.openxmlformats.org/drawingml/2006/main" xmlns:p="http://schemas.openxmlformats.org/presentationml/2006/main" xmlns:r="http://schemas.openxmlformats.org/officeDocument/2006/relationships">
-  <p:cSld>
-    <p:spTree>
-      <p:nvGrpSpPr>
-        <p:cNvPr id="1" name=""/>
-        <p:cNvGrpSpPr/>
-        <p:nvPr/>
-      </p:nvGrpSpPr>
-      <p:grpSpPr/>
-      <p:sp>
-        <p:nvSpPr>
-          <p:cNvPr id="2" name="Rectangle 1"/>
-          <p:cNvSpPr/>
-          <p:nvPr/>
-        </p:nvSpPr>
-        <p:spPr>
-          <a:xfrm>
-            <a:off x="0" y="0"/>
-            <a:ext cx="12191695" cy="6858000"/>
-          </a:xfrm>
-          <a:prstGeom prst="rect">
-            <a:avLst/>
-          </a:prstGeom>
-          <a:solidFill>
-            <a:srgbClr val="FDFBF8"/>
-          </a:solidFill>
-          <a:ln>
-            <a:noFill/>
-          </a:ln>
-          <a:effectLst/>
-        </p:spPr>
-        <p:style>
-          <a:lnRef idx="1">
-            <a:schemeClr val="accent1"/>
-          </a:lnRef>
-          <a:fillRef idx="3">
-            <a:schemeClr val="accent1"/>
-          </a:fillRef>
-          <a:effectRef idx="2">
-            <a:schemeClr val="accent1"/>
-          </a:effectRef>
-          <a:fontRef idx="minor">
-            <a:schemeClr val="lt1"/>
-          </a:fontRef>
-        </p:style>
-        <p:txBody>
-          <a:bodyPr rtlCol="0" anchor="ctr"/>
-          <a:lstStyle/>
-          <a:p>
-            <a:pPr algn="ctr"/>
-          </a:p>
-        </p:txBody>
-      </p:sp>
-      <p:sp>
-        <p:nvSpPr>
-          <p:cNvPr id="3" name="Rectangle 2"/>
-          <p:cNvSpPr/>
-          <p:nvPr/>
-        </p:nvSpPr>
-        <p:spPr>
-          <a:xfrm>
-            <a:off x="0" y="2103120"/>
-            <a:ext cx="12191695" cy="2743200"/>
-          </a:xfrm>
-          <a:prstGeom prst="rect">
-            <a:avLst/>
-          </a:prstGeom>
-          <a:solidFill>
-            <a:srgbClr val="FDF1EF"/>
-          </a:solidFill>
-          <a:ln>
-            <a:noFill/>
-          </a:ln>
-          <a:effectLst/>
-        </p:spPr>
-        <p:style>
-          <a:lnRef idx="1">
-            <a:schemeClr val="accent1"/>
-          </a:lnRef>
-          <a:fillRef idx="3">
-            <a:schemeClr val="accent1"/>
-          </a:fillRef>
-          <a:effectRef idx="2">
-            <a:schemeClr val="accent1"/>
-          </a:effectRef>
-          <a:fontRef idx="minor">
-            <a:schemeClr val="lt1"/>
-          </a:fontRef>
-        </p:style>
-        <p:txBody>
-          <a:bodyPr rtlCol="0" anchor="ctr"/>
-          <a:lstStyle/>
-          <a:p>
-            <a:pPr algn="ctr"/>
-          </a:p>
-        </p:txBody>
-      </p:sp>
-      <p:sp>
-        <p:nvSpPr>
-          <p:cNvPr id="4" name="Rectangle 3"/>
-          <p:cNvSpPr/>
-          <p:nvPr/>
-        </p:nvSpPr>
-        <p:spPr>
-          <a:xfrm>
-            <a:off x="0" y="0"/>
-            <a:ext cx="274320" cy="6858000"/>
-          </a:xfrm>
-          <a:prstGeom prst="rect">
-            <a:avLst/>
-          </a:prstGeom>
-          <a:solidFill>
-            <a:srgbClr val="DC756A"/>
-          </a:solidFill>
-          <a:ln>
-            <a:noFill/>
-          </a:ln>
-          <a:effectLst/>
-        </p:spPr>
-        <p:style>
-          <a:lnRef idx="1">
-            <a:schemeClr val="accent1"/>
-          </a:lnRef>
-          <a:fillRef idx="3">
-            <a:schemeClr val="accent1"/>
-          </a:fillRef>
-          <a:effectRef idx="2">
-            <a:schemeClr val="accent1"/>
-          </a:effectRef>
-          <a:fontRef idx="minor">
-            <a:schemeClr val="lt1"/>
-          </a:fontRef>
-        </p:style>
-        <p:txBody>
-          <a:bodyPr rtlCol="0" anchor="ctr"/>
-          <a:lstStyle/>
-          <a:p>
-            <a:pPr algn="ctr"/>
-          </a:p>
-        </p:txBody>
-      </p:sp>
-      <p:sp>
-        <p:nvSpPr>
-          <p:cNvPr id="5" name="TextBox 4"/>
-          <p:cNvSpPr txBox="1"/>
-          <p:nvPr/>
-        </p:nvSpPr>
-        <p:spPr>
-          <a:xfrm>
-            <a:off x="1280160" y="2377440"/>
-            <a:ext cx="9692640" cy="411480"/>
-          </a:xfrm>
-          <a:prstGeom prst="rect">
-            <a:avLst/>
-          </a:prstGeom>
-          <a:noFill/>
-        </p:spPr>
-        <p:txBody>
-          <a:bodyPr wrap="none">
-            <a:spAutoFit/>
-          </a:bodyPr>
-          <a:lstStyle/>
-          <a:p>
-            <a:r>
-              <a:rPr sz="1500" b="1">
-                <a:solidFill>
-                  <a:srgbClr val="DC756A"/>
-                </a:solidFill>
-                <a:latin typeface="Calibri"/>
-              </a:rPr>
-              <a:t>MỤC 3.3 – 3.4</a:t>
-            </a:r>
-          </a:p>
-        </p:txBody>
-      </p:sp>
-      <p:sp>
-        <p:nvSpPr>
-          <p:cNvPr id="6" name="TextBox 5"/>
-          <p:cNvSpPr txBox="1"/>
-          <p:nvPr/>
-        </p:nvSpPr>
-        <p:spPr>
-          <a:xfrm>
-            <a:off x="1280160" y="2788920"/>
-            <a:ext cx="9601200" cy="1371600"/>
-          </a:xfrm>
-          <a:prstGeom prst="rect">
-            <a:avLst/>
-          </a:prstGeom>
-          <a:noFill/>
-        </p:spPr>
-        <p:txBody>
-          <a:bodyPr wrap="square">
-            <a:spAutoFit/>
-          </a:bodyPr>
-          <a:lstStyle/>
-          <a:p>
-            <a:r>
-              <a:rPr sz="3800" b="1">
-                <a:solidFill>
-                  <a:srgbClr val="AC4D33"/>
-                </a:solidFill>
-                <a:latin typeface="Cambria"/>
-              </a:rPr>
-              <a:t>Bàn tiệc và môi trường đa văn hóa</a:t>
-            </a:r>
-          </a:p>
-        </p:txBody>
-      </p:sp>
-      <p:sp>
-        <p:nvSpPr>
-          <p:cNvPr id="7" name="TextBox 6"/>
-          <p:cNvSpPr txBox="1"/>
-          <p:nvPr/>
-        </p:nvSpPr>
-        <p:spPr>
-          <a:xfrm>
-            <a:off x="1280160" y="4224528"/>
-            <a:ext cx="9418320" cy="640080"/>
-          </a:xfrm>
-          <a:prstGeom prst="rect">
-            <a:avLst/>
-          </a:prstGeom>
-          <a:noFill/>
-        </p:spPr>
-        <p:txBody>
-          <a:bodyPr wrap="square">
-            <a:spAutoFit/>
-          </a:bodyPr>
-          <a:lstStyle/>
-          <a:p>
-            <a:r>
-              <a:rPr sz="1450" i="1">
-                <a:solidFill>
-                  <a:srgbClr val="8A7A76"/>
-                </a:solidFill>
-                <a:latin typeface="Calibri"/>
-              </a:rPr>
-              <a:t>Nơi công việc vẫn tiếp diễn dù không ai nhắc đến công việc.</a:t>
-            </a:r>
-          </a:p>
-        </p:txBody>
-      </p:sp>
-      <p:sp>
-        <p:nvSpPr>
-          <p:cNvPr id="8" name="TextBox 7"/>
-          <p:cNvSpPr txBox="1"/>
-          <p:nvPr/>
-        </p:nvSpPr>
-        <p:spPr>
-          <a:xfrm>
-            <a:off x="502920" y="6419088"/>
-            <a:ext cx="7772400" cy="292608"/>
-          </a:xfrm>
-          <a:prstGeom prst="rect">
-            <a:avLst/>
-          </a:prstGeom>
-          <a:noFill/>
-        </p:spPr>
-        <p:txBody>
-          <a:bodyPr wrap="none">
-            <a:spAutoFit/>
-          </a:bodyPr>
-          <a:lstStyle/>
-          <a:p>
-            <a:r>
-              <a:rPr sz="900">
-                <a:solidFill>
-                  <a:srgbClr val="8A7A76"/>
-                </a:solidFill>
-                <a:latin typeface="Calibri"/>
-              </a:rPr>
-              <a:t>Je m'appelle Huong  •  GV. Đỗ Thùy Hương  •  EC1103</a:t>
-            </a:r>
-          </a:p>
-        </p:txBody>
-      </p:sp>
-      <p:sp>
-        <p:nvSpPr>
-          <p:cNvPr id="9" name="TextBox 8"/>
-          <p:cNvSpPr txBox="1"/>
-          <p:nvPr/>
-        </p:nvSpPr>
-        <p:spPr>
-          <a:xfrm>
-            <a:off x="9326880" y="6419088"/>
-            <a:ext cx="1920240" cy="292608"/>
-          </a:xfrm>
-          <a:prstGeom prst="rect">
-            <a:avLst/>
-          </a:prstGeom>
-          <a:noFill/>
-        </p:spPr>
-        <p:txBody>
-          <a:bodyPr wrap="none">
-            <a:spAutoFit/>
-          </a:bodyPr>
-          <a:lstStyle/>
-          <a:p>
-            <a:pPr algn="r"/>
-            <a:r>
-              <a:rPr sz="900">
-                <a:solidFill>
-                  <a:srgbClr val="8A7A76"/>
-                </a:solidFill>
-                <a:latin typeface="Calibri"/>
-              </a:rPr>
-              <a:t>Chương 3</a:t>
-            </a:r>
           </a:p>
         </p:txBody>
       </p:sp>
@@ -7904,7 +8132,7 @@
       </p:grpSpPr>
       <p:pic>
         <p:nvPicPr>
-          <p:cNvPr id="2" name="Image 0" descr="assets/logo_tron.png">    </p:cNvPr>
+          <p:cNvPr id="2" name="Image 0" descr="/home/user/comdraft/assets/img/dau-huong.png">    </p:cNvPr>
           <p:cNvPicPr>
             <a:picLocks noChangeAspect="1"/>
           </p:cNvPicPr>
@@ -8643,7 +8871,7 @@
       </p:grpSpPr>
       <p:pic>
         <p:nvPicPr>
-          <p:cNvPr id="2" name="Image 0" descr="assets/logo_tron.png">    </p:cNvPr>
+          <p:cNvPr id="2" name="Image 0" descr="/home/user/comdraft/assets/img/dau-huong.png">    </p:cNvPr>
           <p:cNvPicPr>
             <a:picLocks noChangeAspect="1"/>
           </p:cNvPicPr>
@@ -9357,6 +9585,327 @@
 </file>
 
 <file path=ppt/slides/slide4.xml><?xml version="1.0" encoding="utf-8"?>
+<p:sld xmlns:a="http://schemas.openxmlformats.org/drawingml/2006/main" xmlns:p="http://schemas.openxmlformats.org/presentationml/2006/main" xmlns:r="http://schemas.openxmlformats.org/officeDocument/2006/relationships">
+  <p:cSld>
+    <p:spTree>
+      <p:nvGrpSpPr>
+        <p:cNvPr id="1" name=""/>
+        <p:cNvGrpSpPr/>
+        <p:nvPr/>
+      </p:nvGrpSpPr>
+      <p:grpSpPr/>
+      <p:sp>
+        <p:nvSpPr>
+          <p:cNvPr id="2" name="Rectangle 1"/>
+          <p:cNvSpPr/>
+          <p:nvPr/>
+        </p:nvSpPr>
+        <p:spPr>
+          <a:xfrm>
+            <a:off x="0" y="0"/>
+            <a:ext cx="12191695" cy="6858000"/>
+          </a:xfrm>
+          <a:prstGeom prst="rect">
+            <a:avLst/>
+          </a:prstGeom>
+          <a:solidFill>
+            <a:srgbClr val="FDFBF8"/>
+          </a:solidFill>
+          <a:ln>
+            <a:noFill/>
+          </a:ln>
+          <a:effectLst/>
+        </p:spPr>
+        <p:style>
+          <a:lnRef idx="1">
+            <a:schemeClr val="accent1"/>
+          </a:lnRef>
+          <a:fillRef idx="3">
+            <a:schemeClr val="accent1"/>
+          </a:fillRef>
+          <a:effectRef idx="2">
+            <a:schemeClr val="accent1"/>
+          </a:effectRef>
+          <a:fontRef idx="minor">
+            <a:schemeClr val="lt1"/>
+          </a:fontRef>
+        </p:style>
+        <p:txBody>
+          <a:bodyPr rtlCol="0" anchor="ctr"/>
+          <a:lstStyle/>
+          <a:p>
+            <a:pPr algn="ctr"/>
+          </a:p>
+        </p:txBody>
+      </p:sp>
+      <p:sp>
+        <p:nvSpPr>
+          <p:cNvPr id="3" name="Rectangle 2"/>
+          <p:cNvSpPr/>
+          <p:nvPr/>
+        </p:nvSpPr>
+        <p:spPr>
+          <a:xfrm>
+            <a:off x="0" y="2103120"/>
+            <a:ext cx="12191695" cy="2743200"/>
+          </a:xfrm>
+          <a:prstGeom prst="rect">
+            <a:avLst/>
+          </a:prstGeom>
+          <a:solidFill>
+            <a:srgbClr val="FDF1EF"/>
+          </a:solidFill>
+          <a:ln>
+            <a:noFill/>
+          </a:ln>
+          <a:effectLst/>
+        </p:spPr>
+        <p:style>
+          <a:lnRef idx="1">
+            <a:schemeClr val="accent1"/>
+          </a:lnRef>
+          <a:fillRef idx="3">
+            <a:schemeClr val="accent1"/>
+          </a:fillRef>
+          <a:effectRef idx="2">
+            <a:schemeClr val="accent1"/>
+          </a:effectRef>
+          <a:fontRef idx="minor">
+            <a:schemeClr val="lt1"/>
+          </a:fontRef>
+        </p:style>
+        <p:txBody>
+          <a:bodyPr rtlCol="0" anchor="ctr"/>
+          <a:lstStyle/>
+          <a:p>
+            <a:pPr algn="ctr"/>
+          </a:p>
+        </p:txBody>
+      </p:sp>
+      <p:sp>
+        <p:nvSpPr>
+          <p:cNvPr id="4" name="Rectangle 3"/>
+          <p:cNvSpPr/>
+          <p:nvPr/>
+        </p:nvSpPr>
+        <p:spPr>
+          <a:xfrm>
+            <a:off x="0" y="0"/>
+            <a:ext cx="274320" cy="6858000"/>
+          </a:xfrm>
+          <a:prstGeom prst="rect">
+            <a:avLst/>
+          </a:prstGeom>
+          <a:solidFill>
+            <a:srgbClr val="DC756A"/>
+          </a:solidFill>
+          <a:ln>
+            <a:noFill/>
+          </a:ln>
+          <a:effectLst/>
+        </p:spPr>
+        <p:style>
+          <a:lnRef idx="1">
+            <a:schemeClr val="accent1"/>
+          </a:lnRef>
+          <a:fillRef idx="3">
+            <a:schemeClr val="accent1"/>
+          </a:fillRef>
+          <a:effectRef idx="2">
+            <a:schemeClr val="accent1"/>
+          </a:effectRef>
+          <a:fontRef idx="minor">
+            <a:schemeClr val="lt1"/>
+          </a:fontRef>
+        </p:style>
+        <p:txBody>
+          <a:bodyPr rtlCol="0" anchor="ctr"/>
+          <a:lstStyle/>
+          <a:p>
+            <a:pPr algn="ctr"/>
+          </a:p>
+        </p:txBody>
+      </p:sp>
+      <p:sp>
+        <p:nvSpPr>
+          <p:cNvPr id="5" name="TextBox 4"/>
+          <p:cNvSpPr txBox="1"/>
+          <p:nvPr/>
+        </p:nvSpPr>
+        <p:spPr>
+          <a:xfrm>
+            <a:off x="1280160" y="2377440"/>
+            <a:ext cx="9692640" cy="411480"/>
+          </a:xfrm>
+          <a:prstGeom prst="rect">
+            <a:avLst/>
+          </a:prstGeom>
+          <a:noFill/>
+        </p:spPr>
+        <p:txBody>
+          <a:bodyPr wrap="none">
+            <a:spAutoFit/>
+          </a:bodyPr>
+          <a:lstStyle/>
+          <a:p>
+            <a:r>
+              <a:rPr sz="1500" b="1">
+                <a:solidFill>
+                  <a:srgbClr val="DC756A"/>
+                </a:solidFill>
+                <a:latin typeface="Calibri"/>
+              </a:rPr>
+              <a:t>MỤC 3.1</a:t>
+            </a:r>
+          </a:p>
+        </p:txBody>
+      </p:sp>
+      <p:sp>
+        <p:nvSpPr>
+          <p:cNvPr id="6" name="TextBox 5"/>
+          <p:cNvSpPr txBox="1"/>
+          <p:nvPr/>
+        </p:nvSpPr>
+        <p:spPr>
+          <a:xfrm>
+            <a:off x="1280160" y="2788920"/>
+            <a:ext cx="9601200" cy="1371600"/>
+          </a:xfrm>
+          <a:prstGeom prst="rect">
+            <a:avLst/>
+          </a:prstGeom>
+          <a:noFill/>
+        </p:spPr>
+        <p:txBody>
+          <a:bodyPr wrap="square">
+            <a:spAutoFit/>
+          </a:bodyPr>
+          <a:lstStyle/>
+          <a:p>
+            <a:r>
+              <a:rPr sz="3800" b="1">
+                <a:solidFill>
+                  <a:srgbClr val="AC4D33"/>
+                </a:solidFill>
+                <a:latin typeface="Cambria"/>
+              </a:rPr>
+              <a:t>Giao tiếp trong nội bộ tổ chức</a:t>
+            </a:r>
+          </a:p>
+        </p:txBody>
+      </p:sp>
+      <p:sp>
+        <p:nvSpPr>
+          <p:cNvPr id="7" name="TextBox 6"/>
+          <p:cNvSpPr txBox="1"/>
+          <p:nvPr/>
+        </p:nvSpPr>
+        <p:spPr>
+          <a:xfrm>
+            <a:off x="1280160" y="4224528"/>
+            <a:ext cx="9418320" cy="640080"/>
+          </a:xfrm>
+          <a:prstGeom prst="rect">
+            <a:avLst/>
+          </a:prstGeom>
+          <a:noFill/>
+        </p:spPr>
+        <p:txBody>
+          <a:bodyPr wrap="square">
+            <a:spAutoFit/>
+          </a:bodyPr>
+          <a:lstStyle/>
+          <a:p>
+            <a:r>
+              <a:rPr sz="1450" i="1">
+                <a:solidFill>
+                  <a:srgbClr val="8A7A76"/>
+                </a:solidFill>
+                <a:latin typeface="Calibri"/>
+              </a:rPr>
+              <a:t>Với cấp trên, cấp dưới và đồng nghiệp — mỗi mối quan hệ một cách ứng xử.</a:t>
+            </a:r>
+          </a:p>
+        </p:txBody>
+      </p:sp>
+      <p:sp>
+        <p:nvSpPr>
+          <p:cNvPr id="8" name="TextBox 7"/>
+          <p:cNvSpPr txBox="1"/>
+          <p:nvPr/>
+        </p:nvSpPr>
+        <p:spPr>
+          <a:xfrm>
+            <a:off x="502920" y="6419088"/>
+            <a:ext cx="7772400" cy="292608"/>
+          </a:xfrm>
+          <a:prstGeom prst="rect">
+            <a:avLst/>
+          </a:prstGeom>
+          <a:noFill/>
+        </p:spPr>
+        <p:txBody>
+          <a:bodyPr wrap="none">
+            <a:spAutoFit/>
+          </a:bodyPr>
+          <a:lstStyle/>
+          <a:p>
+            <a:r>
+              <a:rPr sz="900">
+                <a:solidFill>
+                  <a:srgbClr val="8A7A76"/>
+                </a:solidFill>
+                <a:latin typeface="Calibri"/>
+              </a:rPr>
+              <a:t>Je m'appelle Huong  •  GV. Đỗ Thùy Hương  •  EC1103</a:t>
+            </a:r>
+          </a:p>
+        </p:txBody>
+      </p:sp>
+      <p:sp>
+        <p:nvSpPr>
+          <p:cNvPr id="9" name="TextBox 8"/>
+          <p:cNvSpPr txBox="1"/>
+          <p:nvPr/>
+        </p:nvSpPr>
+        <p:spPr>
+          <a:xfrm>
+            <a:off x="9326880" y="6419088"/>
+            <a:ext cx="1920240" cy="292608"/>
+          </a:xfrm>
+          <a:prstGeom prst="rect">
+            <a:avLst/>
+          </a:prstGeom>
+          <a:noFill/>
+        </p:spPr>
+        <p:txBody>
+          <a:bodyPr wrap="none">
+            <a:spAutoFit/>
+          </a:bodyPr>
+          <a:lstStyle/>
+          <a:p>
+            <a:pPr algn="r"/>
+            <a:r>
+              <a:rPr sz="900">
+                <a:solidFill>
+                  <a:srgbClr val="8A7A76"/>
+                </a:solidFill>
+                <a:latin typeface="Calibri"/>
+              </a:rPr>
+              <a:t>Chương 3</a:t>
+            </a:r>
+          </a:p>
+        </p:txBody>
+      </p:sp>
+    </p:spTree>
+  </p:cSld>
+  <p:clrMapOvr>
+    <a:masterClrMapping/>
+  </p:clrMapOvr>
+</p:sld>
+</file>
+
+<file path=ppt/slides/slide5.xml><?xml version="1.0" encoding="utf-8"?>
 <p:sld xmlns:a="http://schemas.openxmlformats.org/drawingml/2006/main" xmlns:r="http://schemas.openxmlformats.org/officeDocument/2006/relationships" xmlns:p="http://schemas.openxmlformats.org/presentationml/2006/main">
   <p:cSld name="Slide 4">
     <p:bg>
@@ -9382,7 +9931,7 @@
       </p:grpSpPr>
       <p:pic>
         <p:nvPicPr>
-          <p:cNvPr id="2" name="Image 0" descr="assets/logo_tron.png">    </p:cNvPr>
+          <p:cNvPr id="2" name="Image 0" descr="/home/user/comdraft/assets/img/dau-huong.png">    </p:cNvPr>
           <p:cNvPicPr>
             <a:picLocks noChangeAspect="1"/>
           </p:cNvPicPr>
@@ -9892,7 +10441,7 @@
 </p:sld>
 </file>
 
-<file path=ppt/slides/slide5.xml><?xml version="1.0" encoding="utf-8"?>
+<file path=ppt/slides/slide6.xml><?xml version="1.0" encoding="utf-8"?>
 <p:sld xmlns:a="http://schemas.openxmlformats.org/drawingml/2006/main" xmlns:r="http://schemas.openxmlformats.org/officeDocument/2006/relationships" xmlns:p="http://schemas.openxmlformats.org/presentationml/2006/main">
   <p:cSld name="Slide 5">
     <p:bg>
@@ -9918,7 +10467,7 @@
       </p:grpSpPr>
       <p:pic>
         <p:nvPicPr>
-          <p:cNvPr id="2" name="Image 0" descr="assets/logo_tron.png">    </p:cNvPr>
+          <p:cNvPr id="2" name="Image 0" descr="/home/user/comdraft/assets/img/dau-huong.png">    </p:cNvPr>
           <p:cNvPicPr>
             <a:picLocks noChangeAspect="1"/>
           </p:cNvPicPr>
@@ -10515,7 +11064,328 @@
 </p:sld>
 </file>
 
-<file path=ppt/slides/slide6.xml><?xml version="1.0" encoding="utf-8"?>
+<file path=ppt/slides/slide7.xml><?xml version="1.0" encoding="utf-8"?>
+<p:sld xmlns:a="http://schemas.openxmlformats.org/drawingml/2006/main" xmlns:p="http://schemas.openxmlformats.org/presentationml/2006/main" xmlns:r="http://schemas.openxmlformats.org/officeDocument/2006/relationships">
+  <p:cSld>
+    <p:spTree>
+      <p:nvGrpSpPr>
+        <p:cNvPr id="1" name=""/>
+        <p:cNvGrpSpPr/>
+        <p:nvPr/>
+      </p:nvGrpSpPr>
+      <p:grpSpPr/>
+      <p:sp>
+        <p:nvSpPr>
+          <p:cNvPr id="2" name="Rectangle 1"/>
+          <p:cNvSpPr/>
+          <p:nvPr/>
+        </p:nvSpPr>
+        <p:spPr>
+          <a:xfrm>
+            <a:off x="0" y="0"/>
+            <a:ext cx="12191695" cy="6858000"/>
+          </a:xfrm>
+          <a:prstGeom prst="rect">
+            <a:avLst/>
+          </a:prstGeom>
+          <a:solidFill>
+            <a:srgbClr val="FDFBF8"/>
+          </a:solidFill>
+          <a:ln>
+            <a:noFill/>
+          </a:ln>
+          <a:effectLst/>
+        </p:spPr>
+        <p:style>
+          <a:lnRef idx="1">
+            <a:schemeClr val="accent1"/>
+          </a:lnRef>
+          <a:fillRef idx="3">
+            <a:schemeClr val="accent1"/>
+          </a:fillRef>
+          <a:effectRef idx="2">
+            <a:schemeClr val="accent1"/>
+          </a:effectRef>
+          <a:fontRef idx="minor">
+            <a:schemeClr val="lt1"/>
+          </a:fontRef>
+        </p:style>
+        <p:txBody>
+          <a:bodyPr rtlCol="0" anchor="ctr"/>
+          <a:lstStyle/>
+          <a:p>
+            <a:pPr algn="ctr"/>
+          </a:p>
+        </p:txBody>
+      </p:sp>
+      <p:sp>
+        <p:nvSpPr>
+          <p:cNvPr id="3" name="Rectangle 2"/>
+          <p:cNvSpPr/>
+          <p:nvPr/>
+        </p:nvSpPr>
+        <p:spPr>
+          <a:xfrm>
+            <a:off x="0" y="2103120"/>
+            <a:ext cx="12191695" cy="2743200"/>
+          </a:xfrm>
+          <a:prstGeom prst="rect">
+            <a:avLst/>
+          </a:prstGeom>
+          <a:solidFill>
+            <a:srgbClr val="FDF1EF"/>
+          </a:solidFill>
+          <a:ln>
+            <a:noFill/>
+          </a:ln>
+          <a:effectLst/>
+        </p:spPr>
+        <p:style>
+          <a:lnRef idx="1">
+            <a:schemeClr val="accent1"/>
+          </a:lnRef>
+          <a:fillRef idx="3">
+            <a:schemeClr val="accent1"/>
+          </a:fillRef>
+          <a:effectRef idx="2">
+            <a:schemeClr val="accent1"/>
+          </a:effectRef>
+          <a:fontRef idx="minor">
+            <a:schemeClr val="lt1"/>
+          </a:fontRef>
+        </p:style>
+        <p:txBody>
+          <a:bodyPr rtlCol="0" anchor="ctr"/>
+          <a:lstStyle/>
+          <a:p>
+            <a:pPr algn="ctr"/>
+          </a:p>
+        </p:txBody>
+      </p:sp>
+      <p:sp>
+        <p:nvSpPr>
+          <p:cNvPr id="4" name="Rectangle 3"/>
+          <p:cNvSpPr/>
+          <p:nvPr/>
+        </p:nvSpPr>
+        <p:spPr>
+          <a:xfrm>
+            <a:off x="0" y="0"/>
+            <a:ext cx="274320" cy="6858000"/>
+          </a:xfrm>
+          <a:prstGeom prst="rect">
+            <a:avLst/>
+          </a:prstGeom>
+          <a:solidFill>
+            <a:srgbClr val="DC756A"/>
+          </a:solidFill>
+          <a:ln>
+            <a:noFill/>
+          </a:ln>
+          <a:effectLst/>
+        </p:spPr>
+        <p:style>
+          <a:lnRef idx="1">
+            <a:schemeClr val="accent1"/>
+          </a:lnRef>
+          <a:fillRef idx="3">
+            <a:schemeClr val="accent1"/>
+          </a:fillRef>
+          <a:effectRef idx="2">
+            <a:schemeClr val="accent1"/>
+          </a:effectRef>
+          <a:fontRef idx="minor">
+            <a:schemeClr val="lt1"/>
+          </a:fontRef>
+        </p:style>
+        <p:txBody>
+          <a:bodyPr rtlCol="0" anchor="ctr"/>
+          <a:lstStyle/>
+          <a:p>
+            <a:pPr algn="ctr"/>
+          </a:p>
+        </p:txBody>
+      </p:sp>
+      <p:sp>
+        <p:nvSpPr>
+          <p:cNvPr id="5" name="TextBox 4"/>
+          <p:cNvSpPr txBox="1"/>
+          <p:nvPr/>
+        </p:nvSpPr>
+        <p:spPr>
+          <a:xfrm>
+            <a:off x="1280160" y="2377440"/>
+            <a:ext cx="9692640" cy="411480"/>
+          </a:xfrm>
+          <a:prstGeom prst="rect">
+            <a:avLst/>
+          </a:prstGeom>
+          <a:noFill/>
+        </p:spPr>
+        <p:txBody>
+          <a:bodyPr wrap="none">
+            <a:spAutoFit/>
+          </a:bodyPr>
+          <a:lstStyle/>
+          <a:p>
+            <a:r>
+              <a:rPr sz="1500" b="1">
+                <a:solidFill>
+                  <a:srgbClr val="DC756A"/>
+                </a:solidFill>
+                <a:latin typeface="Calibri"/>
+              </a:rPr>
+              <a:t>MỤC 3.2</a:t>
+            </a:r>
+          </a:p>
+        </p:txBody>
+      </p:sp>
+      <p:sp>
+        <p:nvSpPr>
+          <p:cNvPr id="6" name="TextBox 5"/>
+          <p:cNvSpPr txBox="1"/>
+          <p:nvPr/>
+        </p:nvSpPr>
+        <p:spPr>
+          <a:xfrm>
+            <a:off x="1280160" y="2788920"/>
+            <a:ext cx="9601200" cy="1371600"/>
+          </a:xfrm>
+          <a:prstGeom prst="rect">
+            <a:avLst/>
+          </a:prstGeom>
+          <a:noFill/>
+        </p:spPr>
+        <p:txBody>
+          <a:bodyPr wrap="square">
+            <a:spAutoFit/>
+          </a:bodyPr>
+          <a:lstStyle/>
+          <a:p>
+            <a:r>
+              <a:rPr sz="3800" b="1">
+                <a:solidFill>
+                  <a:srgbClr val="AC4D33"/>
+                </a:solidFill>
+                <a:latin typeface="Cambria"/>
+              </a:rPr>
+              <a:t>Giao tiếp với bên ngoài tổ chức</a:t>
+            </a:r>
+          </a:p>
+        </p:txBody>
+      </p:sp>
+      <p:sp>
+        <p:nvSpPr>
+          <p:cNvPr id="7" name="TextBox 6"/>
+          <p:cNvSpPr txBox="1"/>
+          <p:nvPr/>
+        </p:nvSpPr>
+        <p:spPr>
+          <a:xfrm>
+            <a:off x="1280160" y="4224528"/>
+            <a:ext cx="9418320" cy="640080"/>
+          </a:xfrm>
+          <a:prstGeom prst="rect">
+            <a:avLst/>
+          </a:prstGeom>
+          <a:noFill/>
+        </p:spPr>
+        <p:txBody>
+          <a:bodyPr wrap="square">
+            <a:spAutoFit/>
+          </a:bodyPr>
+          <a:lstStyle/>
+          <a:p>
+            <a:r>
+              <a:rPr sz="1450" i="1">
+                <a:solidFill>
+                  <a:srgbClr val="8A7A76"/>
+                </a:solidFill>
+                <a:latin typeface="Calibri"/>
+              </a:rPr>
+              <a:t>Khách hàng, đối tác, cơ quan nhà nước và truyền thông — bốn nhóm, bốn luật chơi.</a:t>
+            </a:r>
+          </a:p>
+        </p:txBody>
+      </p:sp>
+      <p:sp>
+        <p:nvSpPr>
+          <p:cNvPr id="8" name="TextBox 7"/>
+          <p:cNvSpPr txBox="1"/>
+          <p:nvPr/>
+        </p:nvSpPr>
+        <p:spPr>
+          <a:xfrm>
+            <a:off x="502920" y="6419088"/>
+            <a:ext cx="7772400" cy="292608"/>
+          </a:xfrm>
+          <a:prstGeom prst="rect">
+            <a:avLst/>
+          </a:prstGeom>
+          <a:noFill/>
+        </p:spPr>
+        <p:txBody>
+          <a:bodyPr wrap="none">
+            <a:spAutoFit/>
+          </a:bodyPr>
+          <a:lstStyle/>
+          <a:p>
+            <a:r>
+              <a:rPr sz="900">
+                <a:solidFill>
+                  <a:srgbClr val="8A7A76"/>
+                </a:solidFill>
+                <a:latin typeface="Calibri"/>
+              </a:rPr>
+              <a:t>Je m'appelle Huong  •  GV. Đỗ Thùy Hương  •  EC1103</a:t>
+            </a:r>
+          </a:p>
+        </p:txBody>
+      </p:sp>
+      <p:sp>
+        <p:nvSpPr>
+          <p:cNvPr id="9" name="TextBox 8"/>
+          <p:cNvSpPr txBox="1"/>
+          <p:nvPr/>
+        </p:nvSpPr>
+        <p:spPr>
+          <a:xfrm>
+            <a:off x="9326880" y="6419088"/>
+            <a:ext cx="1920240" cy="292608"/>
+          </a:xfrm>
+          <a:prstGeom prst="rect">
+            <a:avLst/>
+          </a:prstGeom>
+          <a:noFill/>
+        </p:spPr>
+        <p:txBody>
+          <a:bodyPr wrap="none">
+            <a:spAutoFit/>
+          </a:bodyPr>
+          <a:lstStyle/>
+          <a:p>
+            <a:pPr algn="r"/>
+            <a:r>
+              <a:rPr sz="900">
+                <a:solidFill>
+                  <a:srgbClr val="8A7A76"/>
+                </a:solidFill>
+                <a:latin typeface="Calibri"/>
+              </a:rPr>
+              <a:t>Chương 3</a:t>
+            </a:r>
+          </a:p>
+        </p:txBody>
+      </p:sp>
+    </p:spTree>
+  </p:cSld>
+  <p:clrMapOvr>
+    <a:masterClrMapping/>
+  </p:clrMapOvr>
+</p:sld>
+</file>
+
+<file path=ppt/slides/slide8.xml><?xml version="1.0" encoding="utf-8"?>
 <p:sld xmlns:a="http://schemas.openxmlformats.org/drawingml/2006/main" xmlns:r="http://schemas.openxmlformats.org/officeDocument/2006/relationships" xmlns:p="http://schemas.openxmlformats.org/presentationml/2006/main">
   <p:cSld name="Slide 6">
     <p:bg>
@@ -10541,7 +11411,7 @@
       </p:grpSpPr>
       <p:pic>
         <p:nvPicPr>
-          <p:cNvPr id="2" name="Image 0" descr="assets/logo_tron.png">    </p:cNvPr>
+          <p:cNvPr id="2" name="Image 0" descr="/home/user/comdraft/assets/img/dau-huong.png">    </p:cNvPr>
           <p:cNvPicPr>
             <a:picLocks noChangeAspect="1"/>
           </p:cNvPicPr>
@@ -11051,7 +11921,7 @@
 </p:sld>
 </file>
 
-<file path=ppt/slides/slide7.xml><?xml version="1.0" encoding="utf-8"?>
+<file path=ppt/slides/slide9.xml><?xml version="1.0" encoding="utf-8"?>
 <p:sld xmlns:a="http://schemas.openxmlformats.org/drawingml/2006/main" xmlns:r="http://schemas.openxmlformats.org/officeDocument/2006/relationships" xmlns:p="http://schemas.openxmlformats.org/presentationml/2006/main">
   <p:cSld name="Slide 7">
     <p:bg>
@@ -11077,7 +11947,7 @@
       </p:grpSpPr>
       <p:pic>
         <p:nvPicPr>
-          <p:cNvPr id="2" name="Image 0" descr="assets/logo_tron.png">    </p:cNvPr>
+          <p:cNvPr id="2" name="Image 0" descr="/home/user/comdraft/assets/img/dau-huong.png">    </p:cNvPr>
           <p:cNvPicPr>
             <a:picLocks noChangeAspect="1"/>
           </p:cNvPicPr>
@@ -11334,7 +12204,7 @@
         </p:blipFill>
         <p:spPr>
           <a:xfrm>
-            <a:off x="472287" y="1481328"/>
+            <a:off x="472287" y="1939147"/>
             <a:ext cx="11247120" cy="3793520"/>
           </a:xfrm>
           <a:prstGeom prst="rect">
@@ -11342,1165 +12212,6 @@
           </a:prstGeom>
         </p:spPr>
       </p:pic>
-    </p:spTree>
-  </p:cSld>
-  <p:clrMapOvr>
-    <a:masterClrMapping/>
-  </p:clrMapOvr>
-</p:sld>
-</file>
-
-<file path=ppt/slides/slide8.xml><?xml version="1.0" encoding="utf-8"?>
-<p:sld xmlns:a="http://schemas.openxmlformats.org/drawingml/2006/main" xmlns:r="http://schemas.openxmlformats.org/officeDocument/2006/relationships" xmlns:p="http://schemas.openxmlformats.org/presentationml/2006/main">
-  <p:cSld name="Slide 8">
-    <p:bg>
-      <p:bgPr>
-        <a:solidFill>
-          <a:srgbClr val="FDFBF8"/>
-        </a:solidFill>
-      </p:bgPr>
-    </p:bg>
-    <p:spTree>
-      <p:nvGrpSpPr>
-        <p:cNvPr id="1" name=""/>
-        <p:cNvGrpSpPr/>
-        <p:nvPr/>
-      </p:nvGrpSpPr>
-      <p:grpSpPr>
-        <a:xfrm>
-          <a:off x="0" y="0"/>
-          <a:ext cx="0" cy="0"/>
-          <a:chOff x="0" y="0"/>
-          <a:chExt cx="0" cy="0"/>
-        </a:xfrm>
-      </p:grpSpPr>
-      <p:pic>
-        <p:nvPicPr>
-          <p:cNvPr id="2" name="Image 0" descr="assets/logo_tron.png">    </p:cNvPr>
-          <p:cNvPicPr>
-            <a:picLocks noChangeAspect="1"/>
-          </p:cNvPicPr>
-          <p:nvPr/>
-        </p:nvPicPr>
-        <p:blipFill>
-          <a:blip r:embed="rId1"/>
-          <a:stretch>
-            <a:fillRect/>
-          </a:stretch>
-        </p:blipFill>
-        <p:spPr>
-          <a:xfrm>
-            <a:off x="411480" y="6327648"/>
-            <a:ext cx="384048" cy="384048"/>
-          </a:xfrm>
-          <a:prstGeom prst="rect">
-            <a:avLst/>
-          </a:prstGeom>
-        </p:spPr>
-      </p:pic>
-      <p:sp>
-        <p:nvSpPr>
-          <p:cNvPr id="3" name="Text 0"/>
-          <p:cNvSpPr/>
-          <p:nvPr/>
-        </p:nvSpPr>
-        <p:spPr>
-          <a:xfrm>
-            <a:off x="868680" y="6355080"/>
-            <a:ext cx="7498080" cy="310896"/>
-          </a:xfrm>
-          <a:prstGeom prst="rect">
-            <a:avLst/>
-          </a:prstGeom>
-          <a:noFill/>
-          <a:ln/>
-        </p:spPr>
-        <p:txBody>
-          <a:bodyPr wrap="square" lIns="0" tIns="0" rIns="0" bIns="0" rtlCol="0" anchor="ctr"/>
-          <a:lstStyle/>
-          <a:p>
-            <a:pPr indent="0" marL="0">
-              <a:buNone/>
-            </a:pPr>
-            <a:r>
-              <a:rPr lang="en-US" sz="900" dirty="0">
-                <a:solidFill>
-                  <a:srgbClr val="8A7A76"/>
-                </a:solidFill>
-                <a:latin typeface="Calibri" pitchFamily="34" charset="0"/>
-                <a:ea typeface="Calibri" pitchFamily="34" charset="-122"/>
-                <a:cs typeface="Calibri" pitchFamily="34" charset="-120"/>
-              </a:rPr>
-              <a:t>Je m'appelle Huong  •  GV. Đỗ Thùy Hương  •  EC1103</a:t>
-            </a:r>
-            <a:endParaRPr lang="en-US" sz="900" dirty="0"/>
-          </a:p>
-        </p:txBody>
-      </p:sp>
-      <p:sp>
-        <p:nvSpPr>
-          <p:cNvPr id="4" name="Text 1"/>
-          <p:cNvSpPr/>
-          <p:nvPr/>
-        </p:nvSpPr>
-        <p:spPr>
-          <a:xfrm>
-            <a:off x="8503920" y="6355080"/>
-            <a:ext cx="2743200" cy="310896"/>
-          </a:xfrm>
-          <a:prstGeom prst="rect">
-            <a:avLst/>
-          </a:prstGeom>
-          <a:noFill/>
-          <a:ln/>
-        </p:spPr>
-        <p:txBody>
-          <a:bodyPr wrap="square" lIns="0" tIns="0" rIns="0" bIns="0" rtlCol="0" anchor="ctr"/>
-          <a:lstStyle/>
-          <a:p>
-            <a:pPr algn="r" indent="0" marL="0">
-              <a:buNone/>
-            </a:pPr>
-            <a:r>
-              <a:rPr lang="en-US" sz="900" dirty="0">
-                <a:solidFill>
-                  <a:srgbClr val="8A7A76"/>
-                </a:solidFill>
-                <a:latin typeface="Calibri" pitchFamily="34" charset="0"/>
-                <a:ea typeface="Calibri" pitchFamily="34" charset="-122"/>
-                <a:cs typeface="Calibri" pitchFamily="34" charset="-120"/>
-              </a:rPr>
-              <a:t>Chương 3</a:t>
-            </a:r>
-            <a:endParaRPr lang="en-US" sz="900" dirty="0"/>
-          </a:p>
-        </p:txBody>
-      </p:sp>
-      <p:sp>
-        <p:nvSpPr>
-          <p:cNvPr id="5" name="Shape 2"/>
-          <p:cNvSpPr/>
-          <p:nvPr/>
-        </p:nvSpPr>
-        <p:spPr>
-          <a:xfrm>
-            <a:off x="11430000" y="6327648"/>
-            <a:ext cx="365760" cy="365760"/>
-          </a:xfrm>
-          <a:prstGeom prst="ellipse">
-            <a:avLst/>
-          </a:prstGeom>
-          <a:solidFill>
-            <a:srgbClr val="DC756A"/>
-          </a:solidFill>
-          <a:ln/>
-        </p:spPr>
-        <p:txBody>
-          <a:bodyPr/>
-          <a:p/>
-        </p:txBody>
-      </p:sp>
-      <p:sp>
-        <p:nvSpPr>
-          <p:cNvPr id="6" name="Text 3"/>
-          <p:cNvSpPr/>
-          <p:nvPr/>
-        </p:nvSpPr>
-        <p:spPr>
-          <a:xfrm>
-            <a:off x="11430000" y="6327648"/>
-            <a:ext cx="365760" cy="365760"/>
-          </a:xfrm>
-          <a:prstGeom prst="rect">
-            <a:avLst/>
-          </a:prstGeom>
-          <a:noFill/>
-          <a:ln/>
-        </p:spPr>
-        <p:txBody>
-          <a:bodyPr wrap="square" lIns="0" tIns="0" rIns="0" bIns="0" rtlCol="0" anchor="ctr"/>
-          <a:lstStyle/>
-          <a:p>
-            <a:pPr algn="ctr" indent="0" marL="0">
-              <a:buNone/>
-            </a:pPr>
-            <a:r>
-              <a:rPr lang="en-US" sz="1000" b="1" dirty="0">
-                <a:solidFill>
-                  <a:srgbClr val="FFFFFF"/>
-                </a:solidFill>
-                <a:latin typeface="Calibri" pitchFamily="34" charset="0"/>
-                <a:ea typeface="Calibri" pitchFamily="34" charset="-122"/>
-                <a:cs typeface="Calibri" pitchFamily="34" charset="-120"/>
-              </a:rPr>
-              <a:t>8</a:t>
-            </a:r>
-            <a:endParaRPr lang="en-US" sz="1000" dirty="0"/>
-          </a:p>
-        </p:txBody>
-      </p:sp>
-      <p:sp>
-        <p:nvSpPr>
-          <p:cNvPr id="7" name="Text 4"/>
-          <p:cNvSpPr/>
-          <p:nvPr/>
-        </p:nvSpPr>
-        <p:spPr>
-          <a:xfrm>
-            <a:off x="502920" y="310896"/>
-            <a:ext cx="11155680" cy="274320"/>
-          </a:xfrm>
-          <a:prstGeom prst="rect">
-            <a:avLst/>
-          </a:prstGeom>
-          <a:noFill/>
-          <a:ln/>
-        </p:spPr>
-        <p:txBody>
-          <a:bodyPr wrap="square" lIns="0" tIns="0" rIns="0" bIns="0" rtlCol="0" anchor="ctr"/>
-          <a:lstStyle/>
-          <a:p>
-            <a:pPr indent="0" marL="0">
-              <a:buNone/>
-            </a:pPr>
-            <a:r>
-              <a:rPr lang="en-US" sz="1100" b="1" spc="300" kern="0" dirty="0">
-                <a:solidFill>
-                  <a:srgbClr val="DC756A"/>
-                </a:solidFill>
-                <a:latin typeface="Calibri" pitchFamily="34" charset="0"/>
-                <a:ea typeface="Calibri" pitchFamily="34" charset="-122"/>
-                <a:cs typeface="Calibri" pitchFamily="34" charset="-120"/>
-              </a:rPr>
-              <a:t>3.2</a:t>
-            </a:r>
-            <a:endParaRPr lang="en-US" sz="1100" dirty="0"/>
-          </a:p>
-        </p:txBody>
-      </p:sp>
-      <p:sp>
-        <p:nvSpPr>
-          <p:cNvPr id="8" name="Text 5"/>
-          <p:cNvSpPr/>
-          <p:nvPr/>
-        </p:nvSpPr>
-        <p:spPr>
-          <a:xfrm>
-            <a:off x="502920" y="576072"/>
-            <a:ext cx="11155680" cy="713232"/>
-          </a:xfrm>
-          <a:prstGeom prst="rect">
-            <a:avLst/>
-          </a:prstGeom>
-          <a:noFill/>
-          <a:ln/>
-        </p:spPr>
-        <p:txBody>
-          <a:bodyPr wrap="square" lIns="0" tIns="0" rIns="0" bIns="0" rtlCol="0" anchor="ctr"/>
-          <a:lstStyle/>
-          <a:p>
-            <a:pPr indent="0" marL="0">
-              <a:buNone/>
-            </a:pPr>
-            <a:r>
-              <a:rPr lang="en-US" sz="2700" b="1" dirty="0">
-                <a:solidFill>
-                  <a:srgbClr val="AC4D33"/>
-                </a:solidFill>
-                <a:latin typeface="Cambria" pitchFamily="34" charset="0"/>
-                <a:ea typeface="Cambria" pitchFamily="34" charset="-122"/>
-                <a:cs typeface="Cambria" pitchFamily="34" charset="-120"/>
-              </a:rPr>
-              <a:t>Với đối tác, cơ quan nhà nước và truyền thông</a:t>
-            </a:r>
-            <a:endParaRPr lang="en-US" sz="2700" dirty="0"/>
-          </a:p>
-        </p:txBody>
-      </p:sp>
-      <p:sp>
-        <p:nvSpPr>
-          <p:cNvPr id="9" name="Shape 6"/>
-          <p:cNvSpPr/>
-          <p:nvPr/>
-        </p:nvSpPr>
-        <p:spPr>
-          <a:xfrm>
-            <a:off x="502920" y="1417320"/>
-            <a:ext cx="11201400" cy="1490472"/>
-          </a:xfrm>
-          <a:prstGeom prst="roundRect">
-            <a:avLst>
-              <a:gd name="adj" fmla="val 5521"/>
-            </a:avLst>
-          </a:prstGeom>
-          <a:solidFill>
-            <a:srgbClr val="FDF1EF"/>
-          </a:solidFill>
-          <a:ln w="15875">
-            <a:solidFill>
-              <a:srgbClr val="FBCEC9"/>
-            </a:solidFill>
-            <a:prstDash val="solid"/>
-          </a:ln>
-        </p:spPr>
-        <p:txBody>
-          <a:bodyPr/>
-          <a:p/>
-        </p:txBody>
-      </p:sp>
-      <p:sp>
-        <p:nvSpPr>
-          <p:cNvPr id="10" name="Text 7"/>
-          <p:cNvSpPr/>
-          <p:nvPr/>
-        </p:nvSpPr>
-        <p:spPr>
-          <a:xfrm>
-            <a:off x="722376" y="1472184"/>
-            <a:ext cx="10762488" cy="1380744"/>
-          </a:xfrm>
-          <a:prstGeom prst="rect">
-            <a:avLst/>
-          </a:prstGeom>
-          <a:noFill/>
-          <a:ln/>
-        </p:spPr>
-        <p:txBody>
-          <a:bodyPr wrap="square" lIns="0" tIns="0" rIns="0" bIns="0" rtlCol="0" anchor="ctr"/>
-          <a:lstStyle/>
-          <a:p>
-            <a:pPr indent="0" marL="0">
-              <a:buNone/>
-            </a:pPr>
-            <a:r>
-              <a:rPr lang="en-US" sz="1500" b="1" dirty="0">
-                <a:solidFill>
-                  <a:srgbClr val="AC4D33"/>
-                </a:solidFill>
-                <a:latin typeface="Calibri" pitchFamily="34" charset="0"/>
-                <a:ea typeface="Calibri" pitchFamily="34" charset="-122"/>
-                <a:cs typeface="Calibri" pitchFamily="34" charset="-120"/>
-              </a:rPr>
-              <a:t>Đối tác kinh doanh</a:t>
-            </a:r>
-            <a:endParaRPr lang="en-US" sz="1500" dirty="0"/>
-          </a:p>
-          <a:p>
-            <a:pPr indent="0" marL="0">
-              <a:buNone/>
-            </a:pPr>
-            <a:r>
-              <a:rPr lang="en-US" sz="1300" dirty="0">
-                <a:solidFill>
-                  <a:srgbClr val="3A2B28"/>
-                </a:solidFill>
-                <a:latin typeface="Calibri" pitchFamily="34" charset="0"/>
-                <a:ea typeface="Calibri" pitchFamily="34" charset="-122"/>
-                <a:cs typeface="Calibri" pitchFamily="34" charset="-120"/>
-              </a:rPr>
-              <a:t>Bình đẳng, giữ chữ tín, minh bạch thông tin; quan hệ lâu dài quan trọng hơn lợi thế ngắn hạn — nền tảng cho đàm phán ở Chương 4.</a:t>
-            </a:r>
-            <a:endParaRPr lang="en-US" sz="1500" dirty="0"/>
-          </a:p>
-        </p:txBody>
-      </p:sp>
-      <p:sp>
-        <p:nvSpPr>
-          <p:cNvPr id="11" name="Shape 8"/>
-          <p:cNvSpPr/>
-          <p:nvPr/>
-        </p:nvSpPr>
-        <p:spPr>
-          <a:xfrm>
-            <a:off x="502920" y="3072384"/>
-            <a:ext cx="11201400" cy="1490472"/>
-          </a:xfrm>
-          <a:prstGeom prst="roundRect">
-            <a:avLst>
-              <a:gd name="adj" fmla="val 5521"/>
-            </a:avLst>
-          </a:prstGeom>
-          <a:solidFill>
-            <a:srgbClr val="FDF1EF"/>
-          </a:solidFill>
-          <a:ln w="15875">
-            <a:solidFill>
-              <a:srgbClr val="FBCEC9"/>
-            </a:solidFill>
-            <a:prstDash val="solid"/>
-          </a:ln>
-        </p:spPr>
-        <p:txBody>
-          <a:bodyPr/>
-          <a:p/>
-        </p:txBody>
-      </p:sp>
-      <p:sp>
-        <p:nvSpPr>
-          <p:cNvPr id="12" name="Text 9"/>
-          <p:cNvSpPr/>
-          <p:nvPr/>
-        </p:nvSpPr>
-        <p:spPr>
-          <a:xfrm>
-            <a:off x="722376" y="3127248"/>
-            <a:ext cx="10762488" cy="1380744"/>
-          </a:xfrm>
-          <a:prstGeom prst="rect">
-            <a:avLst/>
-          </a:prstGeom>
-          <a:noFill/>
-          <a:ln/>
-        </p:spPr>
-        <p:txBody>
-          <a:bodyPr wrap="square" lIns="0" tIns="0" rIns="0" bIns="0" rtlCol="0" anchor="ctr"/>
-          <a:lstStyle/>
-          <a:p>
-            <a:pPr indent="0" marL="0">
-              <a:buNone/>
-            </a:pPr>
-            <a:r>
-              <a:rPr lang="en-US" sz="1500" b="1" dirty="0">
-                <a:solidFill>
-                  <a:srgbClr val="AC4D33"/>
-                </a:solidFill>
-                <a:latin typeface="Calibri" pitchFamily="34" charset="0"/>
-                <a:ea typeface="Calibri" pitchFamily="34" charset="-122"/>
-                <a:cs typeface="Calibri" pitchFamily="34" charset="-120"/>
-              </a:rPr>
-              <a:t>Cơ quan nhà nước</a:t>
-            </a:r>
-            <a:endParaRPr lang="en-US" sz="1500" dirty="0"/>
-          </a:p>
-          <a:p>
-            <a:pPr indent="0" marL="0">
-              <a:buNone/>
-            </a:pPr>
-            <a:r>
-              <a:rPr lang="en-US" sz="1300" dirty="0">
-                <a:solidFill>
-                  <a:srgbClr val="3A2B28"/>
-                </a:solidFill>
-                <a:latin typeface="Calibri" pitchFamily="34" charset="0"/>
-                <a:ea typeface="Calibri" pitchFamily="34" charset="-122"/>
-                <a:cs typeface="Calibri" pitchFamily="34" charset="-120"/>
-              </a:rPr>
-              <a:t>Đúng thủ tục, đúng thẩm quyền, hồ sơ – văn bản chuẩn thể thức (Chương 5); tác phong nghiêm túc, đúng hẹn; tuyệt đối không “đi tắt” trái quy định.</a:t>
-            </a:r>
-            <a:endParaRPr lang="en-US" sz="1500" dirty="0"/>
-          </a:p>
-        </p:txBody>
-      </p:sp>
-      <p:sp>
-        <p:nvSpPr>
-          <p:cNvPr id="13" name="Shape 10"/>
-          <p:cNvSpPr/>
-          <p:nvPr/>
-        </p:nvSpPr>
-        <p:spPr>
-          <a:xfrm>
-            <a:off x="502920" y="4727448"/>
-            <a:ext cx="11201400" cy="1490472"/>
-          </a:xfrm>
-          <a:prstGeom prst="roundRect">
-            <a:avLst>
-              <a:gd name="adj" fmla="val 5521"/>
-            </a:avLst>
-          </a:prstGeom>
-          <a:solidFill>
-            <a:srgbClr val="FDF1EF"/>
-          </a:solidFill>
-          <a:ln w="15875">
-            <a:solidFill>
-              <a:srgbClr val="FBCEC9"/>
-            </a:solidFill>
-            <a:prstDash val="solid"/>
-          </a:ln>
-        </p:spPr>
-        <p:txBody>
-          <a:bodyPr/>
-          <a:p/>
-        </p:txBody>
-      </p:sp>
-      <p:sp>
-        <p:nvSpPr>
-          <p:cNvPr id="14" name="Text 11"/>
-          <p:cNvSpPr/>
-          <p:nvPr/>
-        </p:nvSpPr>
-        <p:spPr>
-          <a:xfrm>
-            <a:off x="722376" y="4782312"/>
-            <a:ext cx="10762488" cy="1380744"/>
-          </a:xfrm>
-          <a:prstGeom prst="rect">
-            <a:avLst/>
-          </a:prstGeom>
-          <a:noFill/>
-          <a:ln/>
-        </p:spPr>
-        <p:txBody>
-          <a:bodyPr wrap="square" lIns="0" tIns="0" rIns="0" bIns="0" rtlCol="0" anchor="ctr"/>
-          <a:lstStyle/>
-          <a:p>
-            <a:pPr indent="0" marL="0">
-              <a:buNone/>
-            </a:pPr>
-            <a:r>
-              <a:rPr lang="en-US" sz="1500" b="1" dirty="0">
-                <a:solidFill>
-                  <a:srgbClr val="AC4D33"/>
-                </a:solidFill>
-                <a:latin typeface="Calibri" pitchFamily="34" charset="0"/>
-                <a:ea typeface="Calibri" pitchFamily="34" charset="-122"/>
-                <a:cs typeface="Calibri" pitchFamily="34" charset="-120"/>
-              </a:rPr>
-              <a:t>Truyền thông – báo chí</a:t>
-            </a:r>
-            <a:endParaRPr lang="en-US" sz="1500" dirty="0"/>
-          </a:p>
-          <a:p>
-            <a:pPr indent="0" marL="0">
-              <a:buNone/>
-            </a:pPr>
-            <a:r>
-              <a:rPr lang="en-US" sz="1300" dirty="0">
-                <a:solidFill>
-                  <a:srgbClr val="3A2B28"/>
-                </a:solidFill>
-                <a:latin typeface="Calibri" pitchFamily="34" charset="0"/>
-                <a:ea typeface="Calibri" pitchFamily="34" charset="-122"/>
-                <a:cs typeface="Calibri" pitchFamily="34" charset="-120"/>
-              </a:rPr>
-              <a:t>Chỉ người được ủy quyền phát ngôn; thông tin nhất quán, trung thực; khi có khủng hoảng: phản hồi nhanh, nhận trách nhiệm đúng phần của mình, không né tránh.</a:t>
-            </a:r>
-            <a:endParaRPr lang="en-US" sz="1500" dirty="0"/>
-          </a:p>
-        </p:txBody>
-      </p:sp>
-    </p:spTree>
-  </p:cSld>
-  <p:clrMapOvr>
-    <a:masterClrMapping/>
-  </p:clrMapOvr>
-</p:sld>
-</file>
-
-<file path=ppt/slides/slide9.xml><?xml version="1.0" encoding="utf-8"?>
-<p:sld xmlns:a="http://schemas.openxmlformats.org/drawingml/2006/main" xmlns:r="http://schemas.openxmlformats.org/officeDocument/2006/relationships" xmlns:p="http://schemas.openxmlformats.org/presentationml/2006/main">
-  <p:cSld name="Slide 9">
-    <p:bg>
-      <p:bgPr>
-        <a:solidFill>
-          <a:srgbClr val="FDFBF8"/>
-        </a:solidFill>
-      </p:bgPr>
-    </p:bg>
-    <p:spTree>
-      <p:nvGrpSpPr>
-        <p:cNvPr id="1" name=""/>
-        <p:cNvGrpSpPr/>
-        <p:nvPr/>
-      </p:nvGrpSpPr>
-      <p:grpSpPr>
-        <a:xfrm>
-          <a:off x="0" y="0"/>
-          <a:ext cx="0" cy="0"/>
-          <a:chOff x="0" y="0"/>
-          <a:chExt cx="0" cy="0"/>
-        </a:xfrm>
-      </p:grpSpPr>
-      <p:pic>
-        <p:nvPicPr>
-          <p:cNvPr id="2" name="Image 0" descr="assets/logo_tron.png">    </p:cNvPr>
-          <p:cNvPicPr>
-            <a:picLocks noChangeAspect="1"/>
-          </p:cNvPicPr>
-          <p:nvPr/>
-        </p:nvPicPr>
-        <p:blipFill>
-          <a:blip r:embed="rId1"/>
-          <a:stretch>
-            <a:fillRect/>
-          </a:stretch>
-        </p:blipFill>
-        <p:spPr>
-          <a:xfrm>
-            <a:off x="411480" y="6327648"/>
-            <a:ext cx="384048" cy="384048"/>
-          </a:xfrm>
-          <a:prstGeom prst="rect">
-            <a:avLst/>
-          </a:prstGeom>
-        </p:spPr>
-      </p:pic>
-      <p:sp>
-        <p:nvSpPr>
-          <p:cNvPr id="3" name="Text 0"/>
-          <p:cNvSpPr/>
-          <p:nvPr/>
-        </p:nvSpPr>
-        <p:spPr>
-          <a:xfrm>
-            <a:off x="868680" y="6355080"/>
-            <a:ext cx="7498080" cy="310896"/>
-          </a:xfrm>
-          <a:prstGeom prst="rect">
-            <a:avLst/>
-          </a:prstGeom>
-          <a:noFill/>
-          <a:ln/>
-        </p:spPr>
-        <p:txBody>
-          <a:bodyPr wrap="square" lIns="0" tIns="0" rIns="0" bIns="0" rtlCol="0" anchor="ctr"/>
-          <a:lstStyle/>
-          <a:p>
-            <a:pPr indent="0" marL="0">
-              <a:buNone/>
-            </a:pPr>
-            <a:r>
-              <a:rPr lang="en-US" sz="900" dirty="0">
-                <a:solidFill>
-                  <a:srgbClr val="8A7A76"/>
-                </a:solidFill>
-                <a:latin typeface="Calibri" pitchFamily="34" charset="0"/>
-                <a:ea typeface="Calibri" pitchFamily="34" charset="-122"/>
-                <a:cs typeface="Calibri" pitchFamily="34" charset="-120"/>
-              </a:rPr>
-              <a:t>Je m'appelle Huong  •  GV. Đỗ Thùy Hương  •  EC1103</a:t>
-            </a:r>
-            <a:endParaRPr lang="en-US" sz="900" dirty="0"/>
-          </a:p>
-        </p:txBody>
-      </p:sp>
-      <p:sp>
-        <p:nvSpPr>
-          <p:cNvPr id="4" name="Text 1"/>
-          <p:cNvSpPr/>
-          <p:nvPr/>
-        </p:nvSpPr>
-        <p:spPr>
-          <a:xfrm>
-            <a:off x="8503920" y="6355080"/>
-            <a:ext cx="2743200" cy="310896"/>
-          </a:xfrm>
-          <a:prstGeom prst="rect">
-            <a:avLst/>
-          </a:prstGeom>
-          <a:noFill/>
-          <a:ln/>
-        </p:spPr>
-        <p:txBody>
-          <a:bodyPr wrap="square" lIns="0" tIns="0" rIns="0" bIns="0" rtlCol="0" anchor="ctr"/>
-          <a:lstStyle/>
-          <a:p>
-            <a:pPr algn="r" indent="0" marL="0">
-              <a:buNone/>
-            </a:pPr>
-            <a:r>
-              <a:rPr lang="en-US" sz="900" dirty="0">
-                <a:solidFill>
-                  <a:srgbClr val="8A7A76"/>
-                </a:solidFill>
-                <a:latin typeface="Calibri" pitchFamily="34" charset="0"/>
-                <a:ea typeface="Calibri" pitchFamily="34" charset="-122"/>
-                <a:cs typeface="Calibri" pitchFamily="34" charset="-120"/>
-              </a:rPr>
-              <a:t>Chương 3</a:t>
-            </a:r>
-            <a:endParaRPr lang="en-US" sz="900" dirty="0"/>
-          </a:p>
-        </p:txBody>
-      </p:sp>
-      <p:sp>
-        <p:nvSpPr>
-          <p:cNvPr id="5" name="Shape 2"/>
-          <p:cNvSpPr/>
-          <p:nvPr/>
-        </p:nvSpPr>
-        <p:spPr>
-          <a:xfrm>
-            <a:off x="11430000" y="6327648"/>
-            <a:ext cx="365760" cy="365760"/>
-          </a:xfrm>
-          <a:prstGeom prst="ellipse">
-            <a:avLst/>
-          </a:prstGeom>
-          <a:solidFill>
-            <a:srgbClr val="DC756A"/>
-          </a:solidFill>
-          <a:ln/>
-        </p:spPr>
-        <p:txBody>
-          <a:bodyPr/>
-          <a:p/>
-        </p:txBody>
-      </p:sp>
-      <p:sp>
-        <p:nvSpPr>
-          <p:cNvPr id="6" name="Text 3"/>
-          <p:cNvSpPr/>
-          <p:nvPr/>
-        </p:nvSpPr>
-        <p:spPr>
-          <a:xfrm>
-            <a:off x="11430000" y="6327648"/>
-            <a:ext cx="365760" cy="365760"/>
-          </a:xfrm>
-          <a:prstGeom prst="rect">
-            <a:avLst/>
-          </a:prstGeom>
-          <a:noFill/>
-          <a:ln/>
-        </p:spPr>
-        <p:txBody>
-          <a:bodyPr wrap="square" lIns="0" tIns="0" rIns="0" bIns="0" rtlCol="0" anchor="ctr"/>
-          <a:lstStyle/>
-          <a:p>
-            <a:pPr algn="ctr" indent="0" marL="0">
-              <a:buNone/>
-            </a:pPr>
-            <a:r>
-              <a:rPr lang="en-US" sz="1000" b="1" dirty="0">
-                <a:solidFill>
-                  <a:srgbClr val="FFFFFF"/>
-                </a:solidFill>
-                <a:latin typeface="Calibri" pitchFamily="34" charset="0"/>
-                <a:ea typeface="Calibri" pitchFamily="34" charset="-122"/>
-                <a:cs typeface="Calibri" pitchFamily="34" charset="-120"/>
-              </a:rPr>
-              <a:t>9</a:t>
-            </a:r>
-            <a:endParaRPr lang="en-US" sz="1000" dirty="0"/>
-          </a:p>
-        </p:txBody>
-      </p:sp>
-      <p:sp>
-        <p:nvSpPr>
-          <p:cNvPr id="7" name="Text 4"/>
-          <p:cNvSpPr/>
-          <p:nvPr/>
-        </p:nvSpPr>
-        <p:spPr>
-          <a:xfrm>
-            <a:off x="502920" y="310896"/>
-            <a:ext cx="11155680" cy="274320"/>
-          </a:xfrm>
-          <a:prstGeom prst="rect">
-            <a:avLst/>
-          </a:prstGeom>
-          <a:noFill/>
-          <a:ln/>
-        </p:spPr>
-        <p:txBody>
-          <a:bodyPr wrap="square" lIns="0" tIns="0" rIns="0" bIns="0" rtlCol="0" anchor="ctr"/>
-          <a:lstStyle/>
-          <a:p>
-            <a:pPr indent="0" marL="0">
-              <a:buNone/>
-            </a:pPr>
-            <a:r>
-              <a:rPr lang="en-US" sz="1100" b="1" spc="300" kern="0" dirty="0">
-                <a:solidFill>
-                  <a:srgbClr val="DC756A"/>
-                </a:solidFill>
-                <a:latin typeface="Calibri" pitchFamily="34" charset="0"/>
-                <a:ea typeface="Calibri" pitchFamily="34" charset="-122"/>
-                <a:cs typeface="Calibri" pitchFamily="34" charset="-120"/>
-              </a:rPr>
-              <a:t>3.3</a:t>
-            </a:r>
-            <a:endParaRPr lang="en-US" sz="1100" dirty="0"/>
-          </a:p>
-        </p:txBody>
-      </p:sp>
-      <p:sp>
-        <p:nvSpPr>
-          <p:cNvPr id="8" name="Text 5"/>
-          <p:cNvSpPr/>
-          <p:nvPr/>
-        </p:nvSpPr>
-        <p:spPr>
-          <a:xfrm>
-            <a:off x="502920" y="576072"/>
-            <a:ext cx="11155680" cy="713232"/>
-          </a:xfrm>
-          <a:prstGeom prst="rect">
-            <a:avLst/>
-          </a:prstGeom>
-          <a:noFill/>
-          <a:ln/>
-        </p:spPr>
-        <p:txBody>
-          <a:bodyPr wrap="square" lIns="0" tIns="0" rIns="0" bIns="0" rtlCol="0" anchor="ctr"/>
-          <a:lstStyle/>
-          <a:p>
-            <a:pPr indent="0" marL="0">
-              <a:buNone/>
-            </a:pPr>
-            <a:r>
-              <a:rPr lang="en-US" sz="2700" b="1" dirty="0">
-                <a:solidFill>
-                  <a:srgbClr val="AC4D33"/>
-                </a:solidFill>
-                <a:latin typeface="Cambria" pitchFamily="34" charset="0"/>
-                <a:ea typeface="Cambria" pitchFamily="34" charset="-122"/>
-                <a:cs typeface="Cambria" pitchFamily="34" charset="-120"/>
-              </a:rPr>
-              <a:t>Giao tiếp trên bàn tiệc</a:t>
-            </a:r>
-            <a:endParaRPr lang="en-US" sz="2700" dirty="0"/>
-          </a:p>
-        </p:txBody>
-      </p:sp>
-      <p:sp>
-        <p:nvSpPr>
-          <p:cNvPr id="9" name="Shape 6"/>
-          <p:cNvSpPr/>
-          <p:nvPr/>
-        </p:nvSpPr>
-        <p:spPr>
-          <a:xfrm>
-            <a:off x="502920" y="1417320"/>
-            <a:ext cx="5509260" cy="2308860"/>
-          </a:xfrm>
-          <a:prstGeom prst="roundRect">
-            <a:avLst>
-              <a:gd name="adj" fmla="val 3564"/>
-            </a:avLst>
-          </a:prstGeom>
-          <a:solidFill>
-            <a:srgbClr val="FDF1EF"/>
-          </a:solidFill>
-          <a:ln w="15875">
-            <a:solidFill>
-              <a:srgbClr val="FBCEC9"/>
-            </a:solidFill>
-            <a:prstDash val="solid"/>
-          </a:ln>
-        </p:spPr>
-        <p:txBody>
-          <a:bodyPr/>
-          <a:p/>
-        </p:txBody>
-      </p:sp>
-      <p:sp>
-        <p:nvSpPr>
-          <p:cNvPr id="10" name="Text 7"/>
-          <p:cNvSpPr/>
-          <p:nvPr/>
-        </p:nvSpPr>
-        <p:spPr>
-          <a:xfrm>
-            <a:off x="722376" y="1490472"/>
-            <a:ext cx="5070348" cy="2162556"/>
-          </a:xfrm>
-          <a:prstGeom prst="rect">
-            <a:avLst/>
-          </a:prstGeom>
-          <a:noFill/>
-          <a:ln/>
-        </p:spPr>
-        <p:txBody>
-          <a:bodyPr wrap="square" lIns="0" tIns="0" rIns="0" bIns="0" rtlCol="0" anchor="ctr"/>
-          <a:lstStyle/>
-          <a:p>
-            <a:pPr indent="0" marL="0">
-              <a:buNone/>
-            </a:pPr>
-            <a:r>
-              <a:rPr lang="en-US" sz="1500" b="1" dirty="0">
-                <a:solidFill>
-                  <a:srgbClr val="AC4D33"/>
-                </a:solidFill>
-                <a:latin typeface="Calibri" pitchFamily="34" charset="0"/>
-                <a:ea typeface="Calibri" pitchFamily="34" charset="-122"/>
-                <a:cs typeface="Calibri" pitchFamily="34" charset="-120"/>
-              </a:rPr>
-              <a:t>Trước bữa tiệc</a:t>
-            </a:r>
-            <a:endParaRPr lang="en-US" sz="1500" dirty="0"/>
-          </a:p>
-          <a:p>
-            <a:pPr indent="0" marL="0">
-              <a:buNone/>
-            </a:pPr>
-            <a:r>
-              <a:rPr lang="en-US" sz="1250" dirty="0">
-                <a:solidFill>
-                  <a:srgbClr val="3A2B28"/>
-                </a:solidFill>
-                <a:latin typeface="Calibri" pitchFamily="34" charset="0"/>
-                <a:ea typeface="Calibri" pitchFamily="34" charset="-122"/>
-                <a:cs typeface="Calibri" pitchFamily="34" charset="-120"/>
-              </a:rPr>
-              <a:t>Xác nhận tham dự đúng hạn; đến đúng giờ; trang phục theo tính chất tiệc; chờ chủ tiệc mời và xếp chỗ — vị trí ngồi thể hiện thứ bậc.</a:t>
-            </a:r>
-            <a:endParaRPr lang="en-US" sz="1500" dirty="0"/>
-          </a:p>
-        </p:txBody>
-      </p:sp>
-      <p:sp>
-        <p:nvSpPr>
-          <p:cNvPr id="11" name="Shape 8"/>
-          <p:cNvSpPr/>
-          <p:nvPr/>
-        </p:nvSpPr>
-        <p:spPr>
-          <a:xfrm>
-            <a:off x="6195060" y="1417320"/>
-            <a:ext cx="5509260" cy="2308860"/>
-          </a:xfrm>
-          <a:prstGeom prst="roundRect">
-            <a:avLst>
-              <a:gd name="adj" fmla="val 3564"/>
-            </a:avLst>
-          </a:prstGeom>
-          <a:solidFill>
-            <a:srgbClr val="FDF1EF"/>
-          </a:solidFill>
-          <a:ln w="15875">
-            <a:solidFill>
-              <a:srgbClr val="FBCEC9"/>
-            </a:solidFill>
-            <a:prstDash val="solid"/>
-          </a:ln>
-        </p:spPr>
-        <p:txBody>
-          <a:bodyPr/>
-          <a:p/>
-        </p:txBody>
-      </p:sp>
-      <p:sp>
-        <p:nvSpPr>
-          <p:cNvPr id="12" name="Text 9"/>
-          <p:cNvSpPr/>
-          <p:nvPr/>
-        </p:nvSpPr>
-        <p:spPr>
-          <a:xfrm>
-            <a:off x="6414516" y="1490472"/>
-            <a:ext cx="5070348" cy="2162556"/>
-          </a:xfrm>
-          <a:prstGeom prst="rect">
-            <a:avLst/>
-          </a:prstGeom>
-          <a:noFill/>
-          <a:ln/>
-        </p:spPr>
-        <p:txBody>
-          <a:bodyPr wrap="square" lIns="0" tIns="0" rIns="0" bIns="0" rtlCol="0" anchor="ctr"/>
-          <a:lstStyle/>
-          <a:p>
-            <a:pPr indent="0" marL="0">
-              <a:buNone/>
-            </a:pPr>
-            <a:r>
-              <a:rPr lang="en-US" sz="1500" b="1" dirty="0">
-                <a:solidFill>
-                  <a:srgbClr val="AC4D33"/>
-                </a:solidFill>
-                <a:latin typeface="Calibri" pitchFamily="34" charset="0"/>
-                <a:ea typeface="Calibri" pitchFamily="34" charset="-122"/>
-                <a:cs typeface="Calibri" pitchFamily="34" charset="-120"/>
-              </a:rPr>
-              <a:t>Trong bữa ăn</a:t>
-            </a:r>
-            <a:endParaRPr lang="en-US" sz="1500" dirty="0"/>
-          </a:p>
-          <a:p>
-            <a:pPr indent="0" marL="0">
-              <a:buNone/>
-            </a:pPr>
-            <a:r>
-              <a:rPr lang="en-US" sz="1250" dirty="0">
-                <a:solidFill>
-                  <a:srgbClr val="3A2B28"/>
-                </a:solidFill>
-                <a:latin typeface="Calibri" pitchFamily="34" charset="0"/>
-                <a:ea typeface="Calibri" pitchFamily="34" charset="-122"/>
-                <a:cs typeface="Calibri" pitchFamily="34" charset="-120"/>
-              </a:rPr>
-              <a:t>Chủ tiệc bắt đầu trước; dùng dụng cụ từ ngoài vào trong; không nói khi đang nhai, không gõ đũa, không xoay đĩa thức ăn về phía mình liên tục.</a:t>
-            </a:r>
-            <a:endParaRPr lang="en-US" sz="1500" dirty="0"/>
-          </a:p>
-        </p:txBody>
-      </p:sp>
-      <p:sp>
-        <p:nvSpPr>
-          <p:cNvPr id="13" name="Shape 10"/>
-          <p:cNvSpPr/>
-          <p:nvPr/>
-        </p:nvSpPr>
-        <p:spPr>
-          <a:xfrm>
-            <a:off x="502920" y="3909060"/>
-            <a:ext cx="5509260" cy="2308860"/>
-          </a:xfrm>
-          <a:prstGeom prst="roundRect">
-            <a:avLst>
-              <a:gd name="adj" fmla="val 3564"/>
-            </a:avLst>
-          </a:prstGeom>
-          <a:solidFill>
-            <a:srgbClr val="FDF1EF"/>
-          </a:solidFill>
-          <a:ln w="15875">
-            <a:solidFill>
-              <a:srgbClr val="FBCEC9"/>
-            </a:solidFill>
-            <a:prstDash val="solid"/>
-          </a:ln>
-        </p:spPr>
-        <p:txBody>
-          <a:bodyPr/>
-          <a:p/>
-        </p:txBody>
-      </p:sp>
-      <p:sp>
-        <p:nvSpPr>
-          <p:cNvPr id="14" name="Text 11"/>
-          <p:cNvSpPr/>
-          <p:nvPr/>
-        </p:nvSpPr>
-        <p:spPr>
-          <a:xfrm>
-            <a:off x="722376" y="3982212"/>
-            <a:ext cx="5070348" cy="2162556"/>
-          </a:xfrm>
-          <a:prstGeom prst="rect">
-            <a:avLst/>
-          </a:prstGeom>
-          <a:noFill/>
-          <a:ln/>
-        </p:spPr>
-        <p:txBody>
-          <a:bodyPr wrap="square" lIns="0" tIns="0" rIns="0" bIns="0" rtlCol="0" anchor="ctr"/>
-          <a:lstStyle/>
-          <a:p>
-            <a:pPr indent="0" marL="0">
-              <a:buNone/>
-            </a:pPr>
-            <a:r>
-              <a:rPr lang="en-US" sz="1500" b="1" dirty="0">
-                <a:solidFill>
-                  <a:srgbClr val="AC4D33"/>
-                </a:solidFill>
-                <a:latin typeface="Calibri" pitchFamily="34" charset="0"/>
-                <a:ea typeface="Calibri" pitchFamily="34" charset="-122"/>
-                <a:cs typeface="Calibri" pitchFamily="34" charset="-120"/>
-              </a:rPr>
-              <a:t>Chúc rượu – cụng ly</a:t>
-            </a:r>
-            <a:endParaRPr lang="en-US" sz="1500" dirty="0"/>
-          </a:p>
-          <a:p>
-            <a:pPr indent="0" marL="0">
-              <a:buNone/>
-            </a:pPr>
-            <a:r>
-              <a:rPr lang="en-US" sz="1250" dirty="0">
-                <a:solidFill>
-                  <a:srgbClr val="3A2B28"/>
-                </a:solidFill>
-                <a:latin typeface="Calibri" pitchFamily="34" charset="0"/>
-                <a:ea typeface="Calibri" pitchFamily="34" charset="-122"/>
-                <a:cs typeface="Calibri" pitchFamily="34" charset="-120"/>
-              </a:rPr>
-              <a:t>Người vị thế thấp nâng ly thấp hơn khi cụng; chúc ngắn gọn, đúng đối tượng; tôn trọng người không dùng rượu bia — không ép.</a:t>
-            </a:r>
-            <a:endParaRPr lang="en-US" sz="1500" dirty="0"/>
-          </a:p>
-        </p:txBody>
-      </p:sp>
-      <p:sp>
-        <p:nvSpPr>
-          <p:cNvPr id="15" name="Shape 12"/>
-          <p:cNvSpPr/>
-          <p:nvPr/>
-        </p:nvSpPr>
-        <p:spPr>
-          <a:xfrm>
-            <a:off x="6195060" y="3909060"/>
-            <a:ext cx="5509260" cy="2308860"/>
-          </a:xfrm>
-          <a:prstGeom prst="roundRect">
-            <a:avLst>
-              <a:gd name="adj" fmla="val 3564"/>
-            </a:avLst>
-          </a:prstGeom>
-          <a:solidFill>
-            <a:srgbClr val="FDF1EF"/>
-          </a:solidFill>
-          <a:ln w="15875">
-            <a:solidFill>
-              <a:srgbClr val="FBCEC9"/>
-            </a:solidFill>
-            <a:prstDash val="solid"/>
-          </a:ln>
-        </p:spPr>
-        <p:txBody>
-          <a:bodyPr/>
-          <a:p/>
-        </p:txBody>
-      </p:sp>
-      <p:sp>
-        <p:nvSpPr>
-          <p:cNvPr id="16" name="Text 13"/>
-          <p:cNvSpPr/>
-          <p:nvPr/>
-        </p:nvSpPr>
-        <p:spPr>
-          <a:xfrm>
-            <a:off x="6414516" y="3982212"/>
-            <a:ext cx="5070348" cy="2162556"/>
-          </a:xfrm>
-          <a:prstGeom prst="rect">
-            <a:avLst/>
-          </a:prstGeom>
-          <a:noFill/>
-          <a:ln/>
-        </p:spPr>
-        <p:txBody>
-          <a:bodyPr wrap="square" lIns="0" tIns="0" rIns="0" bIns="0" rtlCol="0" anchor="ctr"/>
-          <a:lstStyle/>
-          <a:p>
-            <a:pPr indent="0" marL="0">
-              <a:buNone/>
-            </a:pPr>
-            <a:r>
-              <a:rPr lang="en-US" sz="1500" b="1" dirty="0">
-                <a:solidFill>
-                  <a:srgbClr val="AC4D33"/>
-                </a:solidFill>
-                <a:latin typeface="Calibri" pitchFamily="34" charset="0"/>
-                <a:ea typeface="Calibri" pitchFamily="34" charset="-122"/>
-                <a:cs typeface="Calibri" pitchFamily="34" charset="-120"/>
-              </a:rPr>
-              <a:t>Câu chuyện trên bàn tiệc</a:t>
-            </a:r>
-            <a:endParaRPr lang="en-US" sz="1500" dirty="0"/>
-          </a:p>
-          <a:p>
-            <a:pPr indent="0" marL="0">
-              <a:buNone/>
-            </a:pPr>
-            <a:r>
-              <a:rPr lang="en-US" sz="1250" dirty="0">
-                <a:solidFill>
-                  <a:srgbClr val="3A2B28"/>
-                </a:solidFill>
-                <a:latin typeface="Calibri" pitchFamily="34" charset="0"/>
-                <a:ea typeface="Calibri" pitchFamily="34" charset="-122"/>
-                <a:cs typeface="Calibri" pitchFamily="34" charset="-120"/>
-              </a:rPr>
-              <a:t>Chủ đề nhẹ nhàng: ẩm thực, thể thao, du lịch, quê quán; tránh chính trị, tôn giáo, thu nhập, đời tư; công việc chỉ bàn khi chủ tiệc gợi mở.</a:t>
-            </a:r>
-            <a:endParaRPr lang="en-US" sz="1500" dirty="0"/>
-          </a:p>
-        </p:txBody>
-      </p:sp>
     </p:spTree>
   </p:cSld>
   <p:clrMapOvr>
@@ -12552,14 +12263,108 @@
     </a:clrScheme>
     <a:fontScheme name="Office">
       <a:majorFont>
-        <a:latin typeface="Cambria" panose="020F0302020204030204"/>
-        <a:ea typeface="Cambria"/>
-        <a:cs typeface="Cambria"/>
+        <a:latin typeface="Calibri Light" panose="020F0302020204030204"/>
+        <a:ea typeface=""/>
+        <a:cs typeface=""/>
+        <a:font script="Jpan" typeface="游ゴシック Light"/>
+        <a:font script="Hang" typeface="맑은 고딕"/>
+        <a:font script="Hans" typeface="等线 Light"/>
+        <a:font script="Hant" typeface="新細明體"/>
+        <a:font script="Arab" typeface="Times New Roman"/>
+        <a:font script="Hebr" typeface="Times New Roman"/>
+        <a:font script="Thai" typeface="Angsana New"/>
+        <a:font script="Ethi" typeface="Nyala"/>
+        <a:font script="Beng" typeface="Vrinda"/>
+        <a:font script="Gujr" typeface="Shruti"/>
+        <a:font script="Khmr" typeface="MoolBoran"/>
+        <a:font script="Knda" typeface="Tunga"/>
+        <a:font script="Guru" typeface="Raavi"/>
+        <a:font script="Cans" typeface="Euphemia"/>
+        <a:font script="Cher" typeface="Plantagenet Cherokee"/>
+        <a:font script="Yiii" typeface="Microsoft Yi Baiti"/>
+        <a:font script="Tibt" typeface="Microsoft Himalaya"/>
+        <a:font script="Thaa" typeface="MV Boli"/>
+        <a:font script="Deva" typeface="Mangal"/>
+        <a:font script="Telu" typeface="Gautami"/>
+        <a:font script="Taml" typeface="Latha"/>
+        <a:font script="Syrc" typeface="Estrangelo Edessa"/>
+        <a:font script="Orya" typeface="Kalinga"/>
+        <a:font script="Mlym" typeface="Kartika"/>
+        <a:font script="Laoo" typeface="DokChampa"/>
+        <a:font script="Sinh" typeface="Iskoola Pota"/>
+        <a:font script="Mong" typeface="Mongolian Baiti"/>
+        <a:font script="Viet" typeface="Times New Roman"/>
+        <a:font script="Uigh" typeface="Microsoft Uighur"/>
+        <a:font script="Geor" typeface="Sylfaen"/>
+        <a:font script="Armn" typeface="Arial"/>
+        <a:font script="Bugi" typeface="Leelawadee UI"/>
+        <a:font script="Bopo" typeface="Microsoft JhengHei"/>
+        <a:font script="Java" typeface="Javanese Text"/>
+        <a:font script="Lisu" typeface="Segoe UI"/>
+        <a:font script="Mymr" typeface="Myanmar Text"/>
+        <a:font script="Nkoo" typeface="Ebrima"/>
+        <a:font script="Olck" typeface="Nirmala UI"/>
+        <a:font script="Osma" typeface="Ebrima"/>
+        <a:font script="Phag" typeface="Phagspa"/>
+        <a:font script="Syrn" typeface="Estrangelo Edessa"/>
+        <a:font script="Syrj" typeface="Estrangelo Edessa"/>
+        <a:font script="Syre" typeface="Estrangelo Edessa"/>
+        <a:font script="Sora" typeface="Nirmala UI"/>
+        <a:font script="Tale" typeface="Microsoft Tai Le"/>
+        <a:font script="Talu" typeface="Microsoft New Tai Lue"/>
+        <a:font script="Tfng" typeface="Ebrima"/>
       </a:majorFont>
       <a:minorFont>
         <a:latin typeface="Calibri" panose="020F0502020204030204"/>
-        <a:ea typeface="Calibri"/>
-        <a:cs typeface="Calibri"/>
+        <a:ea typeface=""/>
+        <a:cs typeface=""/>
+        <a:font script="Jpan" typeface="游ゴシック"/>
+        <a:font script="Hang" typeface="맑은 고딕"/>
+        <a:font script="Hans" typeface="等线"/>
+        <a:font script="Hant" typeface="新細明體"/>
+        <a:font script="Arab" typeface="Arial"/>
+        <a:font script="Hebr" typeface="Arial"/>
+        <a:font script="Thai" typeface="Cordia New"/>
+        <a:font script="Ethi" typeface="Nyala"/>
+        <a:font script="Beng" typeface="Vrinda"/>
+        <a:font script="Gujr" typeface="Shruti"/>
+        <a:font script="Khmr" typeface="DaunPenh"/>
+        <a:font script="Knda" typeface="Tunga"/>
+        <a:font script="Guru" typeface="Raavi"/>
+        <a:font script="Cans" typeface="Euphemia"/>
+        <a:font script="Cher" typeface="Plantagenet Cherokee"/>
+        <a:font script="Yiii" typeface="Microsoft Yi Baiti"/>
+        <a:font script="Tibt" typeface="Microsoft Himalaya"/>
+        <a:font script="Thaa" typeface="MV Boli"/>
+        <a:font script="Deva" typeface="Mangal"/>
+        <a:font script="Telu" typeface="Gautami"/>
+        <a:font script="Taml" typeface="Latha"/>
+        <a:font script="Syrc" typeface="Estrangelo Edessa"/>
+        <a:font script="Orya" typeface="Kalinga"/>
+        <a:font script="Mlym" typeface="Kartika"/>
+        <a:font script="Laoo" typeface="DokChampa"/>
+        <a:font script="Sinh" typeface="Iskoola Pota"/>
+        <a:font script="Mong" typeface="Mongolian Baiti"/>
+        <a:font script="Viet" typeface="Arial"/>
+        <a:font script="Uigh" typeface="Microsoft Uighur"/>
+        <a:font script="Geor" typeface="Sylfaen"/>
+        <a:font script="Armn" typeface="Arial"/>
+        <a:font script="Bugi" typeface="Leelawadee UI"/>
+        <a:font script="Bopo" typeface="Microsoft JhengHei"/>
+        <a:font script="Java" typeface="Javanese Text"/>
+        <a:font script="Lisu" typeface="Segoe UI"/>
+        <a:font script="Mymr" typeface="Myanmar Text"/>
+        <a:font script="Nkoo" typeface="Ebrima"/>
+        <a:font script="Olck" typeface="Nirmala UI"/>
+        <a:font script="Osma" typeface="Ebrima"/>
+        <a:font script="Phag" typeface="Phagspa"/>
+        <a:font script="Syrn" typeface="Estrangelo Edessa"/>
+        <a:font script="Syrj" typeface="Estrangelo Edessa"/>
+        <a:font script="Syre" typeface="Estrangelo Edessa"/>
+        <a:font script="Sora" typeface="Nirmala UI"/>
+        <a:font script="Tale" typeface="Microsoft Tai Le"/>
+        <a:font script="Talu" typeface="Microsoft New Tai Lue"/>
+        <a:font script="Tfng" typeface="Ebrima"/>
       </a:minorFont>
     </a:fontScheme>
     <a:fmtScheme name="Office">

--- a/slides/03-tinh-huong-dac-thu.pptx
+++ b/slides/03-tinh-huong-dac-thu.pptx
@@ -720,6 +720,37 @@
               <a:t>• Mẹo thực dụng: nói chậm, rõ, và XÁC NHẬN LẠI BẰNG VĂN BẢN sau cuộc họp đa quốc gia.</a:t>
             </a:r>
           </a:p>
+          <a:p/>
+          <a:p>
+            <a:r>
+              <a:t>NÓI ĐỦ Ý (phần đã rút khỏi slide)</a:t>
+            </a:r>
+          </a:p>
+          <a:p>
+            <a:r>
+              <a:t>• Tìm hiểu trước mỗi cuộc gặp quan trọng, đừng đợi đến lúc ngồi vào bàn.</a:t>
+            </a:r>
+          </a:p>
+          <a:p>
+            <a:r>
+              <a:t>• Quan sát rồi ứng xử tương thích — bắt chước là cách học nhanh nhất.</a:t>
+            </a:r>
+          </a:p>
+          <a:p>
+            <a:r>
+              <a:t>• Hỏi lịch sự thay vì phán xét.</a:t>
+            </a:r>
+          </a:p>
+          <a:p>
+            <a:r>
+              <a:t>• Khác ngôn ngữ: nói chậm, rõ, tránh thành ngữ; tóm tắt thỏa thuận qua email sau họp.</a:t>
+            </a:r>
+          </a:p>
+          <a:p>
+            <a:r>
+              <a:t>• Thiện chí học hỏi luôn được ghi nhận ở mọi nền văn hóa.</a:t>
+            </a:r>
+          </a:p>
         </p:txBody>
       </p:sp>
       <p:sp>
@@ -1270,6 +1301,27 @@
               <a:t>• Khủng hoảng: phản hồi NHANH, nhận trách nhiệm đúng phần của mình.</a:t>
             </a:r>
           </a:p>
+          <a:p/>
+          <a:p>
+            <a:r>
+              <a:t>NÓI ĐỦ Ý (phần đã rút khỏi slide)</a:t>
+            </a:r>
+          </a:p>
+          <a:p>
+            <a:r>
+              <a:t>• Đối tác: quan hệ lâu dài quan trọng hơn lợi thế ngắn hạn — đây là nền cho Chương 4.</a:t>
+            </a:r>
+          </a:p>
+          <a:p>
+            <a:r>
+              <a:t>• Cơ quan nhà nước: hồ sơ, văn bản phải chuẩn thể thức (Chương 5); tác phong nghiêm túc, đúng hẹn; tuyệt đối không “đi tắt” trái quy định.</a:t>
+            </a:r>
+          </a:p>
+          <a:p>
+            <a:r>
+              <a:t>• Truyền thông: thông tin nhất quán, trung thực; khủng hoảng thì nhận trách nhiệm đúng phần của mình, không né tránh.</a:t>
+            </a:r>
+          </a:p>
         </p:txBody>
       </p:sp>
       <p:sp>
@@ -1607,6 +1659,27 @@
               <a:t>• Có ý kiến khác: chọn lúc riêng tư, dựa trên DỮ LIỆU và LỢI ÍCH CHUNG, và tôn trọng quyết định cuối.</a:t>
             </a:r>
           </a:p>
+          <a:p/>
+          <a:p>
+            <a:r>
+              <a:t>NÓI ĐỦ Ý (phần đã rút khỏi slide)</a:t>
+            </a:r>
+          </a:p>
+          <a:p>
+            <a:r>
+              <a:t>• Nhận nhiệm vụ: hỏi lại cho rõ YÊU CẦU, THỜI HẠN, NGUỒN LỰC — ba thứ này thiếu một là làm sai.</a:t>
+            </a:r>
+          </a:p>
+          <a:p>
+            <a:r>
+              <a:t>• Báo cáo: kết quả trước, diễn giải sau. Tin xấu báo SỚM và kèm phương án, đừng che giấu.</a:t>
+            </a:r>
+          </a:p>
+          <a:p>
+            <a:r>
+              <a:t>• Ý kiến khác: chọn lúc riêng tư; nói trên cơ sở dữ liệu và lợi ích chung; nói xong thì tôn trọng quyết định cuối cùng.</a:t>
+            </a:r>
+          </a:p>
         </p:txBody>
       </p:sp>
       <p:sp>
@@ -1713,6 +1786,32 @@
               <a:t>• Với đồng nghiệp: tranh luận về công việc, không công kích cá nhân; tránh bè phái.</a:t>
             </a:r>
           </a:p>
+          <a:p/>
+          <a:p>
+            <a:r>
+              <a:t>NÓI ĐỦ Ý (phần đã rút khỏi slide)</a:t>
+            </a:r>
+          </a:p>
+          <a:p>
+            <a:r>
+              <a:t>• Giao việc kèm NIỀM TIN và NGUỒN LỰC; kiểm tra tiến độ đúng mức, đừng quản lý vụn vặt.</a:t>
+            </a:r>
+          </a:p>
+          <a:p>
+            <a:r>
+              <a:t>• Khen thì công khai, kịp thời, cụ thể. Phê bình thì riêng tư, kèm hướng khắc phục.</a:t>
+            </a:r>
+          </a:p>
+          <a:p>
+            <a:r>
+              <a:t>• Đồng nghiệp: tránh bè phái, tránh tán chuyện sau lưng.</a:t>
+            </a:r>
+          </a:p>
+          <a:p>
+            <a:r>
+              <a:t>• Họp: có chương trình gửi trước, phát biểu ngắn gọn, kết thúc phải có biên bản và người chịu trách nhiệm từng việc.</a:t>
+            </a:r>
+          </a:p>
         </p:txBody>
       </p:sp>
       <p:sp>
@@ -1819,6 +1918,27 @@
               <a:t>CHUYỂN Ý: "Vậy khi khách nổi giận thì làm sao?"''</a:t>
             </a:r>
           </a:p>
+          <a:p/>
+          <a:p>
+            <a:r>
+              <a:t>NÓI ĐỦ Ý (phần đã rút khỏi slide)</a:t>
+            </a:r>
+          </a:p>
+          <a:p>
+            <a:r>
+              <a:t>• Mỗi điểm tiếp xúc — chào đón, tư vấn, giao hàng, hậu mãi — đều xây hoặc phá niềm tin.</a:t>
+            </a:r>
+          </a:p>
+          <a:p>
+            <a:r>
+              <a:t>• Nguyên tắc vàng: chào niềm nở, gọi TÊN khách khi có thể; nói sự thật về sản phẩm; giữ lời hứa về thời hạn.</a:t>
+            </a:r>
+          </a:p>
+          <a:p>
+            <a:r>
+              <a:t>• Tối kỵ: hứa quá khả năng; đổ lỗi cho đồng nghiệp hoặc cho quy trình; bỏ mặc khách sau khi bán xong.</a:t>
+            </a:r>
+          </a:p>
         </p:txBody>
       </p:sp>
       <p:sp>
@@ -2137,6 +2257,32 @@
           <a:p>
             <a:r>
               <a:t>• Chủ đề nên và không nên nói — nhấn: tránh chính trị, tôn giáo, thu nhập, đời tư.</a:t>
+            </a:r>
+          </a:p>
+          <a:p/>
+          <a:p>
+            <a:r>
+              <a:t>NÓI ĐỦ Ý (phần đã rút khỏi slide)</a:t>
+            </a:r>
+          </a:p>
+          <a:p>
+            <a:r>
+              <a:t>• Trước tiệc: trang phục theo tính chất tiệc; vị trí ngồi thể hiện thứ bậc nên phải chờ chủ tiệc xếp chỗ.</a:t>
+            </a:r>
+          </a:p>
+          <a:p>
+            <a:r>
+              <a:t>• Trong bữa: không nói khi đang nhai, không gõ đũa, không xoay đĩa thức ăn về phía mình liên tục.</a:t>
+            </a:r>
+          </a:p>
+          <a:p>
+            <a:r>
+              <a:t>• Chúc rượu: chúc ngắn gọn, đúng đối tượng; tôn trọng người không dùng rượu bia.</a:t>
+            </a:r>
+          </a:p>
+          <a:p>
+            <a:r>
+              <a:t>• Chuyện trò: công việc chỉ bàn khi chủ tiệc gợi mở.</a:t>
             </a:r>
           </a:p>
         </p:txBody>
@@ -3215,7 +3361,7 @@
                 <a:ea typeface="Calibri" pitchFamily="34" charset="-122"/>
                 <a:cs typeface="Calibri" pitchFamily="34" charset="-120"/>
               </a:rPr>
-              <a:t>Bình đẳng, giữ chữ tín, minh bạch thông tin; quan hệ lâu dài quan trọng hơn lợi thế ngắn hạn — nền tảng cho đàm phán ở Chương 4.</a:t>
+              <a:t>Giữ chữ tín, minh bạch; quan hệ lâu dài hơn lợi thế ngắn hạn</a:t>
             </a:r>
             <a:endParaRPr lang="en-US" sz="1500" dirty="0"/>
           </a:p>
@@ -3302,7 +3448,7 @@
                 <a:ea typeface="Calibri" pitchFamily="34" charset="-122"/>
                 <a:cs typeface="Calibri" pitchFamily="34" charset="-120"/>
               </a:rPr>
-              <a:t>Đúng thủ tục, đúng thẩm quyền, hồ sơ – văn bản chuẩn thể thức (Chương 5); tác phong nghiêm túc, đúng hẹn; tuyệt đối không “đi tắt” trái quy định.</a:t>
+              <a:t>Đúng thủ tục, đúng thẩm quyền, văn bản chuẩn thể thức</a:t>
             </a:r>
             <a:endParaRPr lang="en-US" sz="1500" dirty="0"/>
           </a:p>
@@ -3389,7 +3535,7 @@
                 <a:ea typeface="Calibri" pitchFamily="34" charset="-122"/>
                 <a:cs typeface="Calibri" pitchFamily="34" charset="-120"/>
               </a:rPr>
-              <a:t>Chỉ người được ủy quyền phát ngôn; thông tin nhất quán, trung thực; khi có khủng hoảng: phản hồi nhanh, nhận trách nhiệm đúng phần của mình, không né tránh.</a:t>
+              <a:t>Chỉ người được ủy quyền phát ngôn; khủng hoảng thì phản hồi nhanh</a:t>
             </a:r>
             <a:endParaRPr lang="en-US" sz="1500" dirty="0"/>
           </a:p>
@@ -4072,7 +4218,7 @@
                 <a:ea typeface="Calibri" pitchFamily="34" charset="-122"/>
                 <a:cs typeface="Calibri" pitchFamily="34" charset="-120"/>
               </a:rPr>
-              <a:t>Xác nhận tham dự đúng hạn; đến đúng giờ; trang phục theo tính chất tiệc; chờ chủ tiệc mời và xếp chỗ — vị trí ngồi thể hiện thứ bậc.</a:t>
+              <a:t>Xác nhận đúng hạn • đúng giờ • chờ chủ tiệc xếp chỗ</a:t>
             </a:r>
             <a:endParaRPr lang="en-US" sz="1500" dirty="0"/>
           </a:p>
@@ -4159,7 +4305,7 @@
                 <a:ea typeface="Calibri" pitchFamily="34" charset="-122"/>
                 <a:cs typeface="Calibri" pitchFamily="34" charset="-120"/>
               </a:rPr>
-              <a:t>Chủ tiệc bắt đầu trước; dùng dụng cụ từ ngoài vào trong; không nói khi đang nhai, không gõ đũa, không xoay đĩa thức ăn về phía mình liên tục.</a:t>
+              <a:t>Chủ tiệc bắt đầu trước; dụng cụ dùng từ ngoài vào trong</a:t>
             </a:r>
             <a:endParaRPr lang="en-US" sz="1500" dirty="0"/>
           </a:p>
@@ -4246,7 +4392,7 @@
                 <a:ea typeface="Calibri" pitchFamily="34" charset="-122"/>
                 <a:cs typeface="Calibri" pitchFamily="34" charset="-120"/>
               </a:rPr>
-              <a:t>Người vị thế thấp nâng ly thấp hơn khi cụng; chúc ngắn gọn, đúng đối tượng; tôn trọng người không dùng rượu bia — không ép.</a:t>
+              <a:t>Vị thế thấp nâng ly thấp hơn; không ép người không uống</a:t>
             </a:r>
             <a:endParaRPr lang="en-US" sz="1500" dirty="0"/>
           </a:p>
@@ -4333,7 +4479,7 @@
                 <a:ea typeface="Calibri" pitchFamily="34" charset="-122"/>
                 <a:cs typeface="Calibri" pitchFamily="34" charset="-120"/>
               </a:rPr>
-              <a:t>Chủ đề nhẹ nhàng: ẩm thực, thể thao, du lịch, quê quán; tránh chính trị, tôn giáo, thu nhập, đời tư; công việc chỉ bàn khi chủ tiệc gợi mở.</a:t>
+              <a:t>Nên: ẩm thực, thể thao, du lịch • Tránh: chính trị, tôn giáo, thu nhập</a:t>
             </a:r>
             <a:endParaRPr lang="en-US" sz="1500" dirty="0"/>
           </a:p>
@@ -5058,7 +5204,7 @@
                 <a:ea typeface="Calibri" pitchFamily="34" charset="-122"/>
                 <a:cs typeface="Calibri" pitchFamily="34" charset="-120"/>
               </a:rPr>
-              <a:t>văn hóa giao tiếp, nghi thức chào hỏi, kiêng kỵ của đối tác trước mỗi cuộc gặp quan trọng.</a:t>
+              <a:t>nghi thức chào hỏi và điều kiêng kỵ của đối tác</a:t>
             </a:r>
             <a:endParaRPr lang="en-US" sz="1400" dirty="0"/>
           </a:p>
@@ -5174,7 +5320,7 @@
                 <a:ea typeface="Calibri" pitchFamily="34" charset="-122"/>
                 <a:cs typeface="Calibri" pitchFamily="34" charset="-120"/>
               </a:rPr>
-              <a:t>để ý cách đối tác chào, trao danh thiếp, giữ khoảng cách… và ứng xử tương thích.</a:t>
+              <a:t>cách họ chào, trao danh thiếp, giữ khoảng cách</a:t>
             </a:r>
             <a:endParaRPr lang="en-US" sz="1400" dirty="0"/>
           </a:p>
@@ -5290,7 +5436,7 @@
                 <a:ea typeface="Calibri" pitchFamily="34" charset="-122"/>
                 <a:cs typeface="Calibri" pitchFamily="34" charset="-120"/>
               </a:rPr>
-              <a:t>một hành vi “kỳ lạ” có thể hoàn toàn bình thường trong văn hóa của họ — hỏi lịch sự thay vì phán xét.</a:t>
+              <a:t>hành vi “kỳ lạ” có thể rất bình thường với họ</a:t>
             </a:r>
             <a:endParaRPr lang="en-US" sz="1400" dirty="0"/>
           </a:p>
@@ -5406,7 +5552,7 @@
                 <a:ea typeface="Calibri" pitchFamily="34" charset="-122"/>
                 <a:cs typeface="Calibri" pitchFamily="34" charset="-120"/>
               </a:rPr>
-              <a:t>khi khác ngôn ngữ: tránh tiếng lóng, thành ngữ; tóm tắt thỏa thuận qua email sau cuộc họp.</a:t>
+              <a:t>tránh tiếng lóng; tóm tắt thỏa thuận qua email</a:t>
             </a:r>
             <a:endParaRPr lang="en-US" sz="1400" dirty="0"/>
           </a:p>
@@ -5522,7 +5668,7 @@
                 <a:ea typeface="Calibri" pitchFamily="34" charset="-122"/>
                 <a:cs typeface="Calibri" pitchFamily="34" charset="-120"/>
               </a:rPr>
-              <a:t>sẵn sàng xin lỗi khi lỡ phạm điều kiêng kỵ; thiện chí học hỏi luôn được ghi nhận ở mọi nền văn hóa.</a:t>
+              <a:t>xin lỗi khi lỡ phạm điều kiêng kỵ</a:t>
             </a:r>
             <a:endParaRPr lang="en-US" sz="1400" dirty="0"/>
           </a:p>
@@ -10253,7 +10399,7 @@
                 <a:ea typeface="Calibri" pitchFamily="34" charset="-122"/>
                 <a:cs typeface="Calibri" pitchFamily="34" charset="-120"/>
               </a:rPr>
-              <a:t>Lắng nghe – ghi chú – hỏi lại cho rõ yêu cầu, thời hạn, nguồn lực; xác nhận lại bằng tin nhắn/email để hai bên cùng hiểu một cách.</a:t>
+              <a:t>Nghe – ghi – hỏi lại cho rõ; xác nhận lại bằng email</a:t>
             </a:r>
             <a:endParaRPr lang="en-US" sz="1500" dirty="0"/>
           </a:p>
@@ -10340,7 +10486,7 @@
                 <a:ea typeface="Calibri" pitchFamily="34" charset="-122"/>
                 <a:cs typeface="Calibri" pitchFamily="34" charset="-120"/>
               </a:rPr>
-              <a:t>Chủ động, đúng hạn, kết quả trước – diễn giải sau; báo tin xấu sớm kèm phương án xử lý, không che giấu.</a:t>
+              <a:t>Kết quả trước, diễn giải sau; tin xấu báo sớm kèm phương án</a:t>
             </a:r>
             <a:endParaRPr lang="en-US" sz="1500" dirty="0"/>
           </a:p>
@@ -10427,7 +10573,7 @@
                 <a:ea typeface="Calibri" pitchFamily="34" charset="-122"/>
                 <a:cs typeface="Calibri" pitchFamily="34" charset="-120"/>
               </a:rPr>
-              <a:t>Chọn đúng lúc, đúng chỗ (thường là riêng tư); trình bày trên cơ sở dữ liệu và lợi ích chung; tôn trọng quyết định cuối cùng.</a:t>
+              <a:t>Đúng lúc, đúng chỗ, dựa trên dữ liệu; tôn trọng quyết định cuối</a:t>
             </a:r>
             <a:endParaRPr lang="en-US" sz="1500" dirty="0"/>
           </a:p>
@@ -10789,7 +10935,7 @@
                 <a:ea typeface="Calibri" pitchFamily="34" charset="-122"/>
                 <a:cs typeface="Calibri" pitchFamily="34" charset="-120"/>
               </a:rPr>
-              <a:t>Rõ mục tiêu – thời hạn – tiêu chuẩn; giao việc kèm niềm tin và nguồn lực; kiểm tra tiến độ đúng mức, không quản lý vụn vặt.</a:t>
+              <a:t>Rõ mục tiêu – thời hạn – tiêu chuẩn; giao kèm nguồn lực</a:t>
             </a:r>
             <a:endParaRPr lang="en-US" sz="1500" dirty="0"/>
           </a:p>
@@ -10876,7 +11022,7 @@
                 <a:ea typeface="Calibri" pitchFamily="34" charset="-122"/>
                 <a:cs typeface="Calibri" pitchFamily="34" charset="-120"/>
               </a:rPr>
-              <a:t>Khen công khai, kịp thời, cụ thể; phê bình riêng tư, nhắm vào hành vi chứ không nhắm vào con người, kèm hướng khắc phục.</a:t>
+              <a:t>Khen công khai • phê bình riêng tư, nhắm hành vi không nhắm người</a:t>
             </a:r>
             <a:endParaRPr lang="en-US" sz="1500" dirty="0"/>
           </a:p>
@@ -10963,7 +11109,7 @@
                 <a:ea typeface="Calibri" pitchFamily="34" charset="-122"/>
                 <a:cs typeface="Calibri" pitchFamily="34" charset="-120"/>
               </a:rPr>
-              <a:t>Tôn trọng, hợp tác, chia sẻ thông tin; tranh luận về công việc chứ không công kích cá nhân; tránh bè phái, tán chuyện sau lưng.</a:t>
+              <a:t>Tranh luận công việc, không công kích cá nhân; tránh bè phái</a:t>
             </a:r>
             <a:endParaRPr lang="en-US" sz="1500" dirty="0"/>
           </a:p>
@@ -11050,7 +11196,7 @@
                 <a:ea typeface="Calibri" pitchFamily="34" charset="-122"/>
                 <a:cs typeface="Calibri" pitchFamily="34" charset="-120"/>
               </a:rPr>
-              <a:t>Có chương trình gửi trước; đến đúng giờ; phát biểu ngắn gọn vào trọng tâm; có kết luận, biên bản và người chịu trách nhiệm từng việc.</a:t>
+              <a:t>Chương trình gửi trước • kết luận rõ • ai làm việc gì</a:t>
             </a:r>
             <a:endParaRPr lang="en-US" sz="1500" dirty="0"/>
           </a:p>
@@ -11733,7 +11879,7 @@
                 <a:ea typeface="Calibri" pitchFamily="34" charset="-122"/>
                 <a:cs typeface="Calibri" pitchFamily="34" charset="-120"/>
               </a:rPr>
-              <a:t>Khách hàng nuôi sống doanh nghiệp; mỗi điểm tiếp xúc (chào đón, tư vấn, giao hàng, hậu mãi) đều là khoảnh khắc xây hoặc phá niềm tin.</a:t>
+              <a:t>Mỗi điểm tiếp xúc là một khoảnh khắc xây hoặc phá niềm tin</a:t>
             </a:r>
             <a:endParaRPr lang="en-US" sz="1500" dirty="0"/>
           </a:p>
@@ -11820,7 +11966,7 @@
                 <a:ea typeface="Calibri" pitchFamily="34" charset="-122"/>
                 <a:cs typeface="Calibri" pitchFamily="34" charset="-120"/>
               </a:rPr>
-              <a:t>Chào đón niềm nở – gọi tên khách khi có thể; lắng nghe nhu cầu trước khi giới thiệu; nói sự thật về sản phẩm; giữ lời hứa về thời hạn.</a:t>
+              <a:t>Nghe nhu cầu trước khi giới thiệu • nói thật • giữ lời hứa</a:t>
             </a:r>
             <a:endParaRPr lang="en-US" sz="1500" dirty="0"/>
           </a:p>
@@ -11907,7 +12053,7 @@
                 <a:ea typeface="Calibri" pitchFamily="34" charset="-122"/>
                 <a:cs typeface="Calibri" pitchFamily="34" charset="-120"/>
               </a:rPr>
-              <a:t>Tranh cãi thắng – thua với khách; hứa quá khả năng; đổ lỗi cho đồng nghiệp, cho quy trình; bỏ mặc khách sau khi bán xong.</a:t>
+              <a:t>Cãi thắng thua • hứa quá khả năng • bỏ mặc sau khi bán</a:t>
             </a:r>
             <a:endParaRPr lang="en-US" sz="1500" dirty="0"/>
           </a:p>

--- a/slides/03-tinh-huong-dac-thu.pptx
+++ b/slides/03-tinh-huong-dac-thu.pptx
@@ -518,10 +518,18 @@
           <a:lstStyle/>
           <a:p>
             <a:r>
-              <a:rPr lang="en-US" dirty="0"/>
-              <a:t/>
-            </a:r>
-            <a:endParaRPr lang="en-US" dirty="0"/>
+              <a:t>MỞ ĐẦU (2 phút)</a:t>
+            </a:r>
+          </a:p>
+          <a:p>
+            <a:r>
+              <a:t>• Câu dẫn: "Cùng một kỹ năng, nhưng mỗi bối cảnh có một luật chơi riêng."</a:t>
+            </a:r>
+          </a:p>
+          <a:p>
+            <a:r>
+              <a:t>• Hỏi lớp: "Nói chuyện với sếp và nói chuyện với bạn thân khác nhau chỗ nào?"''</a:t>
+            </a:r>
           </a:p>
         </p:txBody>
       </p:sp>
@@ -1278,48 +1286,7 @@
           <a:lstStyle/>
           <a:p>
             <a:r>
-              <a:t>ĐỐI TÁC – CƠ QUAN – TRUYỀN THÔNG (3 phút)</a:t>
-            </a:r>
-          </a:p>
-          <a:p>
-            <a:r>
-              <a:t>• Đối tác: quan hệ LÂU DÀI quan trọng hơn lợi thế ngắn hạn.</a:t>
-            </a:r>
-          </a:p>
-          <a:p>
-            <a:r>
-              <a:t>• Cơ quan nhà nước: đúng thủ tục, đúng thẩm quyền, HỒ SƠ CHUẨN THỂ THỨC — nối sang Chương 5.</a:t>
-            </a:r>
-          </a:p>
-          <a:p>
-            <a:r>
-              <a:t>• Truyền thông: CHỈ NGƯỜI ĐƯỢC ỦY QUYỀN phát ngôn. Nhân viên tuyệt đối không tự trả lời báo chí.</a:t>
-            </a:r>
-          </a:p>
-          <a:p>
-            <a:r>
-              <a:t>• Khủng hoảng: phản hồi NHANH, nhận trách nhiệm đúng phần của mình.</a:t>
-            </a:r>
-          </a:p>
-          <a:p/>
-          <a:p>
-            <a:r>
-              <a:t>NÓI ĐỦ Ý (phần đã rút khỏi slide)</a:t>
-            </a:r>
-          </a:p>
-          <a:p>
-            <a:r>
-              <a:t>• Đối tác: quan hệ lâu dài quan trọng hơn lợi thế ngắn hạn — đây là nền cho Chương 4.</a:t>
-            </a:r>
-          </a:p>
-          <a:p>
-            <a:r>
-              <a:t>• Cơ quan nhà nước: hồ sơ, văn bản phải chuẩn thể thức (Chương 5); tác phong nghiêm túc, đúng hẹn; tuyệt đối không “đi tắt” trái quy định.</a:t>
-            </a:r>
-          </a:p>
-          <a:p>
-            <a:r>
-              <a:t>• Truyền thông: thông tin nhất quán, trung thực; khủng hoảng thì nhận trách nhiệm đúng phần của mình, không né tránh.</a:t>
+              <a:t>CHUYỂN MỤC (30 giây) — báo trước: phần quan trọng nhất chương nằm ở đây (quy trình LAST).</a:t>
             </a:r>
           </a:p>
         </p:txBody>
@@ -2143,10 +2110,49 @@
           <a:lstStyle/>
           <a:p>
             <a:r>
-              <a:rPr lang="en-US" dirty="0"/>
-              <a:t/>
-            </a:r>
-            <a:endParaRPr lang="en-US" dirty="0"/>
+              <a:t>ĐỐI TÁC – CƠ QUAN – TRUYỀN THÔNG (3 phút)</a:t>
+            </a:r>
+          </a:p>
+          <a:p>
+            <a:r>
+              <a:t>• Đối tác: quan hệ LÂU DÀI quan trọng hơn lợi thế ngắn hạn.</a:t>
+            </a:r>
+          </a:p>
+          <a:p>
+            <a:r>
+              <a:t>• Cơ quan nhà nước: đúng thủ tục, đúng thẩm quyền, HỒ SƠ CHUẨN THỂ THỨC — nối sang Chương 5.</a:t>
+            </a:r>
+          </a:p>
+          <a:p>
+            <a:r>
+              <a:t>• Truyền thông: CHỈ NGƯỜI ĐƯỢC ỦY QUYỀN phát ngôn. Nhân viên tuyệt đối không tự trả lời báo chí.</a:t>
+            </a:r>
+          </a:p>
+          <a:p>
+            <a:r>
+              <a:t>• Khủng hoảng: phản hồi NHANH, nhận trách nhiệm đúng phần của mình.</a:t>
+            </a:r>
+          </a:p>
+          <a:p/>
+          <a:p>
+            <a:r>
+              <a:t>NÓI ĐỦ Ý (phần đã rút khỏi slide)</a:t>
+            </a:r>
+          </a:p>
+          <a:p>
+            <a:r>
+              <a:t>• Đối tác: quan hệ lâu dài quan trọng hơn lợi thế ngắn hạn — đây là nền cho Chương 4.</a:t>
+            </a:r>
+          </a:p>
+          <a:p>
+            <a:r>
+              <a:t>• Cơ quan nhà nước: hồ sơ, văn bản phải chuẩn thể thức (Chương 5); tác phong nghiêm túc, đúng hẹn; tuyệt đối không “đi tắt” trái quy định.</a:t>
+            </a:r>
+          </a:p>
+          <a:p>
+            <a:r>
+              <a:t>• Truyền thông: thông tin nhất quán, trung thực; khủng hoảng thì nhận trách nhiệm đúng phần của mình, không né tránh.</a:t>
+            </a:r>
           </a:p>
         </p:txBody>
       </p:sp>
